--- a/docs/pptx/whole/jx-linsubhr-sens-anemia2.pptx
+++ b/docs/pptx/whole/jx-linsubhr-sens-anemia2.pptx
@@ -5339,7 +5339,7 @@
           <p:spPr>
             <a:xfrm>
               <a:off x="817517" y="1896563"/>
-              <a:ext cx="6169365" cy="82021"/>
+              <a:ext cx="6833128" cy="82021"/>
             </a:xfrm>
             <a:prstGeom prst="rect">
               <a:avLst/>
@@ -5371,7 +5371,7 @@
                   <a:latin typeface="Helvetica"/>
                   <a:cs typeface="Helvetica"/>
                 </a:rPr>
-                <a:t>subHR per 0.1 ratio decline: 1.09 (1.03-1.16), p = 0.002  |  per IQR decline (Δ = 0.27): 1.28 (1.10-1.49)  |  IQR: [0.71, 0.98]</a:t>
+                <a:t>subHR per 0.1 ratio decline: 1.09 (1.03-1.16), p_Bonf = 0.011 (n = 6)  |  per IQR decline (Δ = 0.27): 1.28 (1.10-1.49)  |  IQR: [0.71, 0.98]</a:t>
               </a:r>
             </a:p>
           </p:txBody>

--- a/docs/pptx/whole/jx-linsubhr-sens-anemia2.pptx
+++ b/docs/pptx/whole/jx-linsubhr-sens-anemia2.pptx
@@ -5062,8 +5062,8 @@
           </p:nvSpPr>
           <p:spPr>
             <a:xfrm>
-              <a:off x="1980137" y="5785772"/>
-              <a:ext cx="155356" cy="80101"/>
+              <a:off x="1977028" y="5785772"/>
+              <a:ext cx="161574" cy="80101"/>
             </a:xfrm>
             <a:prstGeom prst="rect">
               <a:avLst/>
@@ -5095,7 +5095,7 @@
                   <a:latin typeface="Helvetica"/>
                   <a:cs typeface="Helvetica"/>
                 </a:rPr>
-                <a:t>0.6</a:t>
+                <a:t>-40</a:t>
               </a:r>
             </a:p>
           </p:txBody>
@@ -5108,8 +5108,8 @@
           </p:nvSpPr>
           <p:spPr>
             <a:xfrm>
-              <a:off x="3731922" y="5785772"/>
-              <a:ext cx="155356" cy="80101"/>
+              <a:off x="3728813" y="5785772"/>
+              <a:ext cx="161574" cy="80101"/>
             </a:xfrm>
             <a:prstGeom prst="rect">
               <a:avLst/>
@@ -5141,7 +5141,7 @@
                   <a:latin typeface="Helvetica"/>
                   <a:cs typeface="Helvetica"/>
                 </a:rPr>
-                <a:t>0.8</a:t>
+                <a:t>-20</a:t>
               </a:r>
             </a:p>
           </p:txBody>
@@ -5154,8 +5154,8 @@
           </p:nvSpPr>
           <p:spPr>
             <a:xfrm>
-              <a:off x="5483707" y="5785772"/>
-              <a:ext cx="155356" cy="80101"/>
+              <a:off x="5530296" y="5785772"/>
+              <a:ext cx="62179" cy="80101"/>
             </a:xfrm>
             <a:prstGeom prst="rect">
               <a:avLst/>
@@ -5187,7 +5187,7 @@
                   <a:latin typeface="Helvetica"/>
                   <a:cs typeface="Helvetica"/>
                 </a:rPr>
-                <a:t>1.0</a:t>
+                <a:t>0</a:t>
               </a:r>
             </a:p>
           </p:txBody>
@@ -5200,8 +5200,8 @@
           </p:nvSpPr>
           <p:spPr>
             <a:xfrm>
-              <a:off x="7235493" y="5785772"/>
-              <a:ext cx="155356" cy="80101"/>
+              <a:off x="7250992" y="5785772"/>
+              <a:ext cx="124358" cy="80101"/>
             </a:xfrm>
             <a:prstGeom prst="rect">
               <a:avLst/>
@@ -5233,7 +5233,7 @@
                   <a:latin typeface="Helvetica"/>
                   <a:cs typeface="Helvetica"/>
                 </a:rPr>
-                <a:t>1.2</a:t>
+                <a:t>20</a:t>
               </a:r>
             </a:p>
           </p:txBody>
@@ -5246,8 +5246,8 @@
           </p:nvSpPr>
           <p:spPr>
             <a:xfrm>
-              <a:off x="2691419" y="5925448"/>
-              <a:ext cx="4051889" cy="100218"/>
+              <a:off x="1561815" y="5925448"/>
+              <a:ext cx="6311097" cy="100218"/>
             </a:xfrm>
             <a:prstGeom prst="rect">
               <a:avLst/>
@@ -5279,7 +5279,7 @@
                   <a:latin typeface="Helvetica"/>
                   <a:cs typeface="Helvetica"/>
                 </a:rPr>
-                <a:t>Sensitivity eGFR Ratio (CKD-EPI 2012 CysC / CKD-EPI 2021 Cr)</a:t>
+                <a:t>Sensitivity eGFR Difference (%): 100 × (CKD-EPI 2012 CysC − CKD-EPI 2021 Cr) / CKD-EPI 2021 Cr</a:t>
               </a:r>
             </a:p>
           </p:txBody>
@@ -5339,7 +5339,7 @@
           <p:spPr>
             <a:xfrm>
               <a:off x="817517" y="1896563"/>
-              <a:ext cx="6833128" cy="82021"/>
+              <a:ext cx="6959864" cy="82021"/>
             </a:xfrm>
             <a:prstGeom prst="rect">
               <a:avLst/>
@@ -5371,7 +5371,7 @@
                   <a:latin typeface="Helvetica"/>
                   <a:cs typeface="Helvetica"/>
                 </a:rPr>
-                <a:t>subHR per 0.1 ratio decline: 1.09 (1.03-1.16), p_Bonf = 0.011 (n = 6)  |  per IQR decline (Δ = 0.27): 1.28 (1.10-1.49)  |  IQR: [0.71, 0.98]</a:t>
+                <a:t>subHR per 10 % decline: 1.09 (1.03-1.16), p_Bonf = 0.011 (n = 6)  |  per IQR decline (Δ = 27.5 %): 1.28 (1.10-1.49)  |  IQR: [-29.1, -1.6] %</a:t>
               </a:r>
             </a:p>
           </p:txBody>

--- a/docs/pptx/whole/jx-linsubhr-sens-anemia2.pptx
+++ b/docs/pptx/whole/jx-linsubhr-sens-anemia2.pptx
@@ -2265,34 +2265,26 @@
         </p:sp>
         <p:sp>
           <p:nvSpPr>
-            <p:cNvPr id="4" name="pl4"/>
+            <p:cNvPr id="4" name="rc4"/>
             <p:cNvSpPr/>
             <p:nvPr/>
           </p:nvSpPr>
           <p:spPr>
             <a:xfrm>
-              <a:off x="817517" y="5142518"/>
-              <a:ext cx="7799693" cy="0"/>
+              <a:off x="457200" y="1600200"/>
+              <a:ext cx="8229600" cy="4525962"/>
             </a:xfrm>
-            <a:custGeom>
+            <a:prstGeom prst="rect">
               <a:avLst/>
-              <a:pathLst>
-                <a:path w="7799693" h="0">
-                  <a:moveTo>
-                    <a:pt x="0" y="0"/>
-                  </a:moveTo>
-                  <a:lnTo>
-                    <a:pt x="7799693" y="0"/>
-                  </a:lnTo>
-                  <a:lnTo>
-                    <a:pt x="7799693" y="0"/>
-                  </a:lnTo>
-                </a:path>
-              </a:pathLst>
-            </a:custGeom>
-            <a:ln w="6775" cap="flat">
+            </a:prstGeom>
+            <a:solidFill>
+              <a:srgbClr val="FFFFFF">
+                <a:alpha val="100000"/>
+              </a:srgbClr>
+            </a:solidFill>
+            <a:ln w="13550" cap="rnd">
               <a:solidFill>
-                <a:srgbClr val="EBEBEB">
+                <a:srgbClr val="FFFFFF">
                   <a:alpha val="100000"/>
                 </a:srgbClr>
               </a:solidFill>
@@ -2314,21 +2306,21 @@
           </p:nvSpPr>
           <p:spPr>
             <a:xfrm>
-              <a:off x="817517" y="4313054"/>
-              <a:ext cx="7799693" cy="0"/>
+              <a:off x="887106" y="3250627"/>
+              <a:ext cx="7660515" cy="0"/>
             </a:xfrm>
             <a:custGeom>
               <a:avLst/>
               <a:pathLst>
-                <a:path w="7799693" h="0">
+                <a:path w="7660515" h="0">
                   <a:moveTo>
                     <a:pt x="0" y="0"/>
                   </a:moveTo>
                   <a:lnTo>
-                    <a:pt x="7799693" y="0"/>
-                  </a:lnTo>
-                  <a:lnTo>
-                    <a:pt x="7799693" y="0"/>
+                    <a:pt x="7660515" y="0"/>
+                  </a:lnTo>
+                  <a:lnTo>
+                    <a:pt x="7660515" y="0"/>
                   </a:lnTo>
                 </a:path>
               </a:pathLst>
@@ -2357,21 +2349,21 @@
           </p:nvSpPr>
           <p:spPr>
             <a:xfrm>
-              <a:off x="817517" y="3483591"/>
-              <a:ext cx="7799693" cy="0"/>
+              <a:off x="887106" y="2951293"/>
+              <a:ext cx="7660515" cy="0"/>
             </a:xfrm>
             <a:custGeom>
               <a:avLst/>
               <a:pathLst>
-                <a:path w="7799693" h="0">
+                <a:path w="7660515" h="0">
                   <a:moveTo>
                     <a:pt x="0" y="0"/>
                   </a:moveTo>
                   <a:lnTo>
-                    <a:pt x="7799693" y="0"/>
-                  </a:lnTo>
-                  <a:lnTo>
-                    <a:pt x="7799693" y="0"/>
+                    <a:pt x="7660515" y="0"/>
+                  </a:lnTo>
+                  <a:lnTo>
+                    <a:pt x="7660515" y="0"/>
                   </a:lnTo>
                 </a:path>
               </a:pathLst>
@@ -2400,21 +2392,21 @@
           </p:nvSpPr>
           <p:spPr>
             <a:xfrm>
-              <a:off x="817517" y="2654127"/>
-              <a:ext cx="7799693" cy="0"/>
+              <a:off x="887106" y="2651959"/>
+              <a:ext cx="7660515" cy="0"/>
             </a:xfrm>
             <a:custGeom>
               <a:avLst/>
               <a:pathLst>
-                <a:path w="7799693" h="0">
+                <a:path w="7660515" h="0">
                   <a:moveTo>
                     <a:pt x="0" y="0"/>
                   </a:moveTo>
                   <a:lnTo>
-                    <a:pt x="7799693" y="0"/>
-                  </a:lnTo>
-                  <a:lnTo>
-                    <a:pt x="7799693" y="0"/>
+                    <a:pt x="7660515" y="0"/>
+                  </a:lnTo>
+                  <a:lnTo>
+                    <a:pt x="7660515" y="0"/>
                   </a:lnTo>
                 </a:path>
               </a:pathLst>
@@ -2443,21 +2435,21 @@
           </p:nvSpPr>
           <p:spPr>
             <a:xfrm>
-              <a:off x="1181923" y="2073503"/>
-              <a:ext cx="0" cy="3649639"/>
+              <a:off x="887106" y="2352625"/>
+              <a:ext cx="7660515" cy="0"/>
             </a:xfrm>
             <a:custGeom>
               <a:avLst/>
               <a:pathLst>
-                <a:path w="0" h="3649639">
+                <a:path w="7660515" h="0">
                   <a:moveTo>
-                    <a:pt x="0" y="3649639"/>
+                    <a:pt x="0" y="0"/>
                   </a:moveTo>
                   <a:lnTo>
-                    <a:pt x="0" y="0"/>
-                  </a:lnTo>
-                  <a:lnTo>
-                    <a:pt x="0" y="0"/>
+                    <a:pt x="7660515" y="0"/>
+                  </a:lnTo>
+                  <a:lnTo>
+                    <a:pt x="7660515" y="0"/>
                   </a:lnTo>
                 </a:path>
               </a:pathLst>
@@ -2486,15 +2478,15 @@
           </p:nvSpPr>
           <p:spPr>
             <a:xfrm>
-              <a:off x="2933708" y="2073503"/>
-              <a:ext cx="0" cy="3649639"/>
+              <a:off x="1245010" y="2143092"/>
+              <a:ext cx="0" cy="1317069"/>
             </a:xfrm>
             <a:custGeom>
               <a:avLst/>
               <a:pathLst>
-                <a:path w="0" h="3649639">
+                <a:path w="0" h="1317069">
                   <a:moveTo>
-                    <a:pt x="0" y="3649639"/>
+                    <a:pt x="0" y="1317069"/>
                   </a:moveTo>
                   <a:lnTo>
                     <a:pt x="0" y="0"/>
@@ -2529,15 +2521,15 @@
           </p:nvSpPr>
           <p:spPr>
             <a:xfrm>
-              <a:off x="4685493" y="2073503"/>
-              <a:ext cx="0" cy="3649639"/>
+              <a:off x="2965536" y="2143092"/>
+              <a:ext cx="0" cy="1317069"/>
             </a:xfrm>
             <a:custGeom>
               <a:avLst/>
               <a:pathLst>
-                <a:path w="0" h="3649639">
+                <a:path w="0" h="1317069">
                   <a:moveTo>
-                    <a:pt x="0" y="3649639"/>
+                    <a:pt x="0" y="1317069"/>
                   </a:moveTo>
                   <a:lnTo>
                     <a:pt x="0" y="0"/>
@@ -2572,15 +2564,15 @@
           </p:nvSpPr>
           <p:spPr>
             <a:xfrm>
-              <a:off x="6437278" y="2073503"/>
-              <a:ext cx="0" cy="3649639"/>
+              <a:off x="4686062" y="2143092"/>
+              <a:ext cx="0" cy="1317069"/>
             </a:xfrm>
             <a:custGeom>
               <a:avLst/>
               <a:pathLst>
-                <a:path w="0" h="3649639">
+                <a:path w="0" h="1317069">
                   <a:moveTo>
-                    <a:pt x="0" y="3649639"/>
+                    <a:pt x="0" y="1317069"/>
                   </a:moveTo>
                   <a:lnTo>
                     <a:pt x="0" y="0"/>
@@ -2615,15 +2607,15 @@
           </p:nvSpPr>
           <p:spPr>
             <a:xfrm>
-              <a:off x="8189063" y="2073503"/>
-              <a:ext cx="0" cy="3649639"/>
+              <a:off x="6406588" y="2143092"/>
+              <a:ext cx="0" cy="1317069"/>
             </a:xfrm>
             <a:custGeom>
               <a:avLst/>
               <a:pathLst>
-                <a:path w="0" h="3649639">
+                <a:path w="0" h="1317069">
                   <a:moveTo>
-                    <a:pt x="0" y="3649639"/>
+                    <a:pt x="0" y="1317069"/>
                   </a:moveTo>
                   <a:lnTo>
                     <a:pt x="0" y="0"/>
@@ -2658,26 +2650,26 @@
           </p:nvSpPr>
           <p:spPr>
             <a:xfrm>
-              <a:off x="817517" y="5557249"/>
-              <a:ext cx="7799693" cy="0"/>
+              <a:off x="8127114" y="2143092"/>
+              <a:ext cx="0" cy="1317069"/>
             </a:xfrm>
             <a:custGeom>
               <a:avLst/>
               <a:pathLst>
-                <a:path w="7799693" h="0">
+                <a:path w="0" h="1317069">
                   <a:moveTo>
+                    <a:pt x="0" y="1317069"/>
+                  </a:moveTo>
+                  <a:lnTo>
                     <a:pt x="0" y="0"/>
-                  </a:moveTo>
-                  <a:lnTo>
-                    <a:pt x="7799693" y="0"/>
-                  </a:lnTo>
-                  <a:lnTo>
-                    <a:pt x="7799693" y="0"/>
+                  </a:lnTo>
+                  <a:lnTo>
+                    <a:pt x="0" y="0"/>
                   </a:lnTo>
                 </a:path>
               </a:pathLst>
             </a:custGeom>
-            <a:ln w="13550" cap="flat">
+            <a:ln w="6775" cap="flat">
               <a:solidFill>
                 <a:srgbClr val="EBEBEB">
                   <a:alpha val="100000"/>
@@ -2701,21 +2693,21 @@
           </p:nvSpPr>
           <p:spPr>
             <a:xfrm>
-              <a:off x="817517" y="4727786"/>
-              <a:ext cx="7799693" cy="0"/>
+              <a:off x="887106" y="3400294"/>
+              <a:ext cx="7660515" cy="0"/>
             </a:xfrm>
             <a:custGeom>
               <a:avLst/>
               <a:pathLst>
-                <a:path w="7799693" h="0">
+                <a:path w="7660515" h="0">
                   <a:moveTo>
                     <a:pt x="0" y="0"/>
                   </a:moveTo>
                   <a:lnTo>
-                    <a:pt x="7799693" y="0"/>
-                  </a:lnTo>
-                  <a:lnTo>
-                    <a:pt x="7799693" y="0"/>
+                    <a:pt x="7660515" y="0"/>
+                  </a:lnTo>
+                  <a:lnTo>
+                    <a:pt x="7660515" y="0"/>
                   </a:lnTo>
                 </a:path>
               </a:pathLst>
@@ -2744,21 +2736,21 @@
           </p:nvSpPr>
           <p:spPr>
             <a:xfrm>
-              <a:off x="817517" y="3898322"/>
-              <a:ext cx="7799693" cy="0"/>
+              <a:off x="887106" y="3100960"/>
+              <a:ext cx="7660515" cy="0"/>
             </a:xfrm>
             <a:custGeom>
               <a:avLst/>
               <a:pathLst>
-                <a:path w="7799693" h="0">
+                <a:path w="7660515" h="0">
                   <a:moveTo>
                     <a:pt x="0" y="0"/>
                   </a:moveTo>
                   <a:lnTo>
-                    <a:pt x="7799693" y="0"/>
-                  </a:lnTo>
-                  <a:lnTo>
-                    <a:pt x="7799693" y="0"/>
+                    <a:pt x="7660515" y="0"/>
+                  </a:lnTo>
+                  <a:lnTo>
+                    <a:pt x="7660515" y="0"/>
                   </a:lnTo>
                 </a:path>
               </a:pathLst>
@@ -2787,21 +2779,21 @@
           </p:nvSpPr>
           <p:spPr>
             <a:xfrm>
-              <a:off x="817517" y="3068859"/>
-              <a:ext cx="7799693" cy="0"/>
+              <a:off x="887106" y="2801626"/>
+              <a:ext cx="7660515" cy="0"/>
             </a:xfrm>
             <a:custGeom>
               <a:avLst/>
               <a:pathLst>
-                <a:path w="7799693" h="0">
+                <a:path w="7660515" h="0">
                   <a:moveTo>
                     <a:pt x="0" y="0"/>
                   </a:moveTo>
                   <a:lnTo>
-                    <a:pt x="7799693" y="0"/>
-                  </a:lnTo>
-                  <a:lnTo>
-                    <a:pt x="7799693" y="0"/>
+                    <a:pt x="7660515" y="0"/>
+                  </a:lnTo>
+                  <a:lnTo>
+                    <a:pt x="7660515" y="0"/>
                   </a:lnTo>
                 </a:path>
               </a:pathLst>
@@ -2830,21 +2822,21 @@
           </p:nvSpPr>
           <p:spPr>
             <a:xfrm>
-              <a:off x="817517" y="2239395"/>
-              <a:ext cx="7799693" cy="0"/>
+              <a:off x="887106" y="2502292"/>
+              <a:ext cx="7660515" cy="0"/>
             </a:xfrm>
             <a:custGeom>
               <a:avLst/>
               <a:pathLst>
-                <a:path w="7799693" h="0">
+                <a:path w="7660515" h="0">
                   <a:moveTo>
                     <a:pt x="0" y="0"/>
                   </a:moveTo>
                   <a:lnTo>
-                    <a:pt x="7799693" y="0"/>
-                  </a:lnTo>
-                  <a:lnTo>
-                    <a:pt x="7799693" y="0"/>
+                    <a:pt x="7660515" y="0"/>
+                  </a:lnTo>
+                  <a:lnTo>
+                    <a:pt x="7660515" y="0"/>
                   </a:lnTo>
                 </a:path>
               </a:pathLst>
@@ -2873,21 +2865,21 @@
           </p:nvSpPr>
           <p:spPr>
             <a:xfrm>
-              <a:off x="2057816" y="2073503"/>
-              <a:ext cx="0" cy="3649639"/>
+              <a:off x="887106" y="2202958"/>
+              <a:ext cx="7660515" cy="0"/>
             </a:xfrm>
             <a:custGeom>
               <a:avLst/>
               <a:pathLst>
-                <a:path w="0" h="3649639">
+                <a:path w="7660515" h="0">
                   <a:moveTo>
-                    <a:pt x="0" y="3649639"/>
+                    <a:pt x="0" y="0"/>
                   </a:moveTo>
                   <a:lnTo>
-                    <a:pt x="0" y="0"/>
-                  </a:lnTo>
-                  <a:lnTo>
-                    <a:pt x="0" y="0"/>
+                    <a:pt x="7660515" y="0"/>
+                  </a:lnTo>
+                  <a:lnTo>
+                    <a:pt x="7660515" y="0"/>
                   </a:lnTo>
                 </a:path>
               </a:pathLst>
@@ -2916,15 +2908,15 @@
           </p:nvSpPr>
           <p:spPr>
             <a:xfrm>
-              <a:off x="3809601" y="2073503"/>
-              <a:ext cx="0" cy="3649639"/>
+              <a:off x="2105273" y="2143092"/>
+              <a:ext cx="0" cy="1317069"/>
             </a:xfrm>
             <a:custGeom>
               <a:avLst/>
               <a:pathLst>
-                <a:path w="0" h="3649639">
+                <a:path w="0" h="1317069">
                   <a:moveTo>
-                    <a:pt x="0" y="3649639"/>
+                    <a:pt x="0" y="1317069"/>
                   </a:moveTo>
                   <a:lnTo>
                     <a:pt x="0" y="0"/>
@@ -2959,15 +2951,15 @@
           </p:nvSpPr>
           <p:spPr>
             <a:xfrm>
-              <a:off x="5561386" y="2073503"/>
-              <a:ext cx="0" cy="3649639"/>
+              <a:off x="3825799" y="2143092"/>
+              <a:ext cx="0" cy="1317069"/>
             </a:xfrm>
             <a:custGeom>
               <a:avLst/>
               <a:pathLst>
-                <a:path w="0" h="3649639">
+                <a:path w="0" h="1317069">
                   <a:moveTo>
-                    <a:pt x="0" y="3649639"/>
+                    <a:pt x="0" y="1317069"/>
                   </a:moveTo>
                   <a:lnTo>
                     <a:pt x="0" y="0"/>
@@ -3002,15 +2994,15 @@
           </p:nvSpPr>
           <p:spPr>
             <a:xfrm>
-              <a:off x="7313171" y="2073503"/>
-              <a:ext cx="0" cy="3649639"/>
+              <a:off x="5546325" y="2143092"/>
+              <a:ext cx="0" cy="1317069"/>
             </a:xfrm>
             <a:custGeom>
               <a:avLst/>
               <a:pathLst>
-                <a:path w="0" h="3649639">
+                <a:path w="0" h="1317069">
                   <a:moveTo>
-                    <a:pt x="0" y="3649639"/>
+                    <a:pt x="0" y="1317069"/>
                   </a:moveTo>
                   <a:lnTo>
                     <a:pt x="0" y="0"/>
@@ -3039,618 +3031,661 @@
         </p:sp>
         <p:sp>
           <p:nvSpPr>
-            <p:cNvPr id="22" name="pg22"/>
+            <p:cNvPr id="22" name="pl22"/>
             <p:cNvSpPr/>
             <p:nvPr/>
           </p:nvSpPr>
           <p:spPr>
             <a:xfrm>
-              <a:off x="1172049" y="4181391"/>
-              <a:ext cx="7090630" cy="954228"/>
+              <a:off x="7266851" y="2143092"/>
+              <a:ext cx="0" cy="1317069"/>
             </a:xfrm>
             <a:custGeom>
               <a:avLst/>
               <a:pathLst>
-                <a:path w="7090630" h="954228">
+                <a:path w="0" h="1317069">
+                  <a:moveTo>
+                    <a:pt x="0" y="1317069"/>
+                  </a:moveTo>
+                  <a:lnTo>
+                    <a:pt x="0" y="0"/>
+                  </a:lnTo>
+                  <a:lnTo>
+                    <a:pt x="0" y="0"/>
+                  </a:lnTo>
+                </a:path>
+              </a:pathLst>
+            </a:custGeom>
+            <a:ln w="13550" cap="flat">
+              <a:solidFill>
+                <a:srgbClr val="EBEBEB">
+                  <a:alpha val="100000"/>
+                </a:srgbClr>
+              </a:solidFill>
+              <a:prstDash val="solid"/>
+              <a:round/>
+            </a:ln>
+          </p:spPr>
+          <p:txBody>
+            <a:bodyPr/>
+            <a:lstStyle/>
+            <a:p/>
+          </p:txBody>
+        </p:sp>
+        <p:sp>
+          <p:nvSpPr>
+            <p:cNvPr id="23" name="pg23"/>
+            <p:cNvSpPr/>
+            <p:nvPr/>
+          </p:nvSpPr>
+          <p:spPr>
+            <a:xfrm>
+              <a:off x="1235312" y="2903779"/>
+              <a:ext cx="6964104" cy="344358"/>
+            </a:xfrm>
+            <a:custGeom>
+              <a:avLst/>
+              <a:pathLst>
+                <a:path w="6964104" h="344358">
                   <a:moveTo>
                     <a:pt x="0" y="0"/>
                   </a:moveTo>
                   <a:lnTo>
-                    <a:pt x="71622" y="16338"/>
-                  </a:lnTo>
-                  <a:lnTo>
-                    <a:pt x="143245" y="32483"/>
-                  </a:lnTo>
-                  <a:lnTo>
-                    <a:pt x="214867" y="48437"/>
-                  </a:lnTo>
-                  <a:lnTo>
-                    <a:pt x="286490" y="64200"/>
-                  </a:lnTo>
-                  <a:lnTo>
-                    <a:pt x="358112" y="79777"/>
-                  </a:lnTo>
-                  <a:lnTo>
-                    <a:pt x="429735" y="95168"/>
-                  </a:lnTo>
-                  <a:lnTo>
-                    <a:pt x="501357" y="110377"/>
-                  </a:lnTo>
-                  <a:lnTo>
-                    <a:pt x="572980" y="125405"/>
-                  </a:lnTo>
-                  <a:lnTo>
-                    <a:pt x="644602" y="140255"/>
-                  </a:lnTo>
-                  <a:lnTo>
-                    <a:pt x="716225" y="154928"/>
-                  </a:lnTo>
-                  <a:lnTo>
-                    <a:pt x="787847" y="169427"/>
-                  </a:lnTo>
-                  <a:lnTo>
-                    <a:pt x="859470" y="183754"/>
-                  </a:lnTo>
-                  <a:lnTo>
-                    <a:pt x="931092" y="197911"/>
-                  </a:lnTo>
-                  <a:lnTo>
-                    <a:pt x="1002715" y="211900"/>
-                  </a:lnTo>
-                  <a:lnTo>
-                    <a:pt x="1074337" y="225722"/>
-                  </a:lnTo>
-                  <a:lnTo>
-                    <a:pt x="1145960" y="239381"/>
-                  </a:lnTo>
-                  <a:lnTo>
-                    <a:pt x="1217582" y="252877"/>
-                  </a:lnTo>
-                  <a:lnTo>
-                    <a:pt x="1289205" y="266213"/>
-                  </a:lnTo>
-                  <a:lnTo>
-                    <a:pt x="1360827" y="279390"/>
-                  </a:lnTo>
-                  <a:lnTo>
-                    <a:pt x="1432450" y="292411"/>
-                  </a:lnTo>
-                  <a:lnTo>
-                    <a:pt x="1504073" y="305278"/>
-                  </a:lnTo>
-                  <a:lnTo>
-                    <a:pt x="1575695" y="317991"/>
-                  </a:lnTo>
-                  <a:lnTo>
-                    <a:pt x="1647318" y="330554"/>
-                  </a:lnTo>
-                  <a:lnTo>
-                    <a:pt x="1718940" y="342967"/>
-                  </a:lnTo>
-                  <a:lnTo>
-                    <a:pt x="1790563" y="355233"/>
-                  </a:lnTo>
-                  <a:lnTo>
-                    <a:pt x="1862185" y="367354"/>
-                  </a:lnTo>
-                  <a:lnTo>
-                    <a:pt x="1933808" y="379330"/>
-                  </a:lnTo>
-                  <a:lnTo>
-                    <a:pt x="2005430" y="391164"/>
-                  </a:lnTo>
-                  <a:lnTo>
-                    <a:pt x="2077053" y="402858"/>
-                  </a:lnTo>
-                  <a:lnTo>
-                    <a:pt x="2148675" y="414413"/>
-                  </a:lnTo>
-                  <a:lnTo>
-                    <a:pt x="2220298" y="425830"/>
-                  </a:lnTo>
-                  <a:lnTo>
-                    <a:pt x="2291920" y="437112"/>
-                  </a:lnTo>
-                  <a:lnTo>
-                    <a:pt x="2363543" y="448260"/>
-                  </a:lnTo>
-                  <a:lnTo>
-                    <a:pt x="2435165" y="459276"/>
-                  </a:lnTo>
-                  <a:lnTo>
-                    <a:pt x="2506788" y="470161"/>
-                  </a:lnTo>
-                  <a:lnTo>
-                    <a:pt x="2578410" y="480916"/>
-                  </a:lnTo>
-                  <a:lnTo>
-                    <a:pt x="2650033" y="491544"/>
-                  </a:lnTo>
-                  <a:lnTo>
-                    <a:pt x="2721655" y="502046"/>
-                  </a:lnTo>
-                  <a:lnTo>
-                    <a:pt x="2793278" y="512423"/>
-                  </a:lnTo>
-                  <a:lnTo>
-                    <a:pt x="2864901" y="522676"/>
-                  </a:lnTo>
-                  <a:lnTo>
-                    <a:pt x="2936523" y="532808"/>
-                  </a:lnTo>
-                  <a:lnTo>
-                    <a:pt x="3008146" y="542820"/>
-                  </a:lnTo>
-                  <a:lnTo>
-                    <a:pt x="3079768" y="547843"/>
-                  </a:lnTo>
-                  <a:lnTo>
-                    <a:pt x="3151391" y="550100"/>
-                  </a:lnTo>
-                  <a:lnTo>
-                    <a:pt x="3223013" y="552352"/>
-                  </a:lnTo>
-                  <a:lnTo>
-                    <a:pt x="3294636" y="554597"/>
-                  </a:lnTo>
-                  <a:lnTo>
-                    <a:pt x="3366258" y="556836"/>
-                  </a:lnTo>
-                  <a:lnTo>
-                    <a:pt x="3437881" y="559069"/>
-                  </a:lnTo>
-                  <a:lnTo>
-                    <a:pt x="3509503" y="561296"/>
-                  </a:lnTo>
-                  <a:lnTo>
-                    <a:pt x="3581126" y="563517"/>
-                  </a:lnTo>
-                  <a:lnTo>
-                    <a:pt x="3652748" y="565732"/>
-                  </a:lnTo>
-                  <a:lnTo>
-                    <a:pt x="3724371" y="567941"/>
-                  </a:lnTo>
-                  <a:lnTo>
-                    <a:pt x="3795993" y="570144"/>
-                  </a:lnTo>
-                  <a:lnTo>
-                    <a:pt x="3867616" y="572340"/>
-                  </a:lnTo>
-                  <a:lnTo>
-                    <a:pt x="3939238" y="574531"/>
-                  </a:lnTo>
-                  <a:lnTo>
-                    <a:pt x="4010861" y="576716"/>
-                  </a:lnTo>
-                  <a:lnTo>
-                    <a:pt x="4082483" y="578895"/>
-                  </a:lnTo>
-                  <a:lnTo>
-                    <a:pt x="4154106" y="581068"/>
-                  </a:lnTo>
-                  <a:lnTo>
-                    <a:pt x="4225729" y="583235"/>
-                  </a:lnTo>
-                  <a:lnTo>
-                    <a:pt x="4297351" y="585396"/>
-                  </a:lnTo>
-                  <a:lnTo>
-                    <a:pt x="4368974" y="587551"/>
-                  </a:lnTo>
-                  <a:lnTo>
-                    <a:pt x="4440596" y="589701"/>
-                  </a:lnTo>
-                  <a:lnTo>
-                    <a:pt x="4512219" y="591844"/>
-                  </a:lnTo>
-                  <a:lnTo>
-                    <a:pt x="4583841" y="593982"/>
-                  </a:lnTo>
-                  <a:lnTo>
-                    <a:pt x="4655464" y="596114"/>
-                  </a:lnTo>
-                  <a:lnTo>
-                    <a:pt x="4727086" y="598240"/>
-                  </a:lnTo>
-                  <a:lnTo>
-                    <a:pt x="4798709" y="600360"/>
-                  </a:lnTo>
-                  <a:lnTo>
-                    <a:pt x="4870331" y="602474"/>
-                  </a:lnTo>
-                  <a:lnTo>
-                    <a:pt x="4941954" y="604583"/>
-                  </a:lnTo>
-                  <a:lnTo>
-                    <a:pt x="5013576" y="606686"/>
-                  </a:lnTo>
-                  <a:lnTo>
-                    <a:pt x="5085199" y="608783"/>
-                  </a:lnTo>
-                  <a:lnTo>
-                    <a:pt x="5156821" y="610874"/>
-                  </a:lnTo>
-                  <a:lnTo>
-                    <a:pt x="5228444" y="612960"/>
-                  </a:lnTo>
-                  <a:lnTo>
-                    <a:pt x="5300066" y="615040"/>
-                  </a:lnTo>
-                  <a:lnTo>
-                    <a:pt x="5371689" y="617115"/>
-                  </a:lnTo>
-                  <a:lnTo>
-                    <a:pt x="5443311" y="619183"/>
-                  </a:lnTo>
-                  <a:lnTo>
-                    <a:pt x="5514934" y="621246"/>
-                  </a:lnTo>
-                  <a:lnTo>
-                    <a:pt x="5586557" y="623304"/>
-                  </a:lnTo>
-                  <a:lnTo>
-                    <a:pt x="5658179" y="625356"/>
-                  </a:lnTo>
-                  <a:lnTo>
-                    <a:pt x="5729802" y="627402"/>
-                  </a:lnTo>
-                  <a:lnTo>
-                    <a:pt x="5801424" y="629443"/>
-                  </a:lnTo>
-                  <a:lnTo>
-                    <a:pt x="5873047" y="631478"/>
-                  </a:lnTo>
-                  <a:lnTo>
-                    <a:pt x="5944669" y="633507"/>
-                  </a:lnTo>
-                  <a:lnTo>
-                    <a:pt x="6016292" y="635531"/>
-                  </a:lnTo>
-                  <a:lnTo>
-                    <a:pt x="6087914" y="637550"/>
-                  </a:lnTo>
-                  <a:lnTo>
-                    <a:pt x="6159537" y="639563"/>
-                  </a:lnTo>
-                  <a:lnTo>
-                    <a:pt x="6231159" y="641570"/>
-                  </a:lnTo>
-                  <a:lnTo>
-                    <a:pt x="6302782" y="643572"/>
-                  </a:lnTo>
-                  <a:lnTo>
-                    <a:pt x="6374404" y="645569"/>
-                  </a:lnTo>
-                  <a:lnTo>
-                    <a:pt x="6446027" y="647560"/>
-                  </a:lnTo>
-                  <a:lnTo>
-                    <a:pt x="6517649" y="649546"/>
-                  </a:lnTo>
-                  <a:lnTo>
-                    <a:pt x="6589272" y="651526"/>
-                  </a:lnTo>
-                  <a:lnTo>
-                    <a:pt x="6660894" y="653501"/>
-                  </a:lnTo>
-                  <a:lnTo>
-                    <a:pt x="6732517" y="655471"/>
-                  </a:lnTo>
-                  <a:lnTo>
-                    <a:pt x="6804139" y="657435"/>
-                  </a:lnTo>
-                  <a:lnTo>
-                    <a:pt x="6875762" y="659394"/>
-                  </a:lnTo>
-                  <a:lnTo>
-                    <a:pt x="6947385" y="661347"/>
-                  </a:lnTo>
-                  <a:lnTo>
-                    <a:pt x="7019007" y="663295"/>
-                  </a:lnTo>
-                  <a:lnTo>
-                    <a:pt x="7090630" y="665238"/>
-                  </a:lnTo>
-                  <a:lnTo>
-                    <a:pt x="7090630" y="954228"/>
-                  </a:lnTo>
-                  <a:lnTo>
-                    <a:pt x="7019007" y="949161"/>
-                  </a:lnTo>
-                  <a:lnTo>
-                    <a:pt x="6947385" y="944033"/>
-                  </a:lnTo>
-                  <a:lnTo>
-                    <a:pt x="6875762" y="938843"/>
-                  </a:lnTo>
-                  <a:lnTo>
-                    <a:pt x="6804139" y="933591"/>
-                  </a:lnTo>
-                  <a:lnTo>
-                    <a:pt x="6732517" y="928276"/>
-                  </a:lnTo>
-                  <a:lnTo>
-                    <a:pt x="6660894" y="922897"/>
-                  </a:lnTo>
-                  <a:lnTo>
-                    <a:pt x="6589272" y="917453"/>
-                  </a:lnTo>
-                  <a:lnTo>
-                    <a:pt x="6517649" y="911944"/>
-                  </a:lnTo>
-                  <a:lnTo>
-                    <a:pt x="6446027" y="906368"/>
-                  </a:lnTo>
-                  <a:lnTo>
-                    <a:pt x="6374404" y="900726"/>
-                  </a:lnTo>
-                  <a:lnTo>
-                    <a:pt x="6302782" y="895016"/>
-                  </a:lnTo>
-                  <a:lnTo>
-                    <a:pt x="6231159" y="889237"/>
-                  </a:lnTo>
-                  <a:lnTo>
-                    <a:pt x="6159537" y="883389"/>
-                  </a:lnTo>
-                  <a:lnTo>
-                    <a:pt x="6087914" y="877470"/>
-                  </a:lnTo>
-                  <a:lnTo>
-                    <a:pt x="6016292" y="871480"/>
-                  </a:lnTo>
-                  <a:lnTo>
-                    <a:pt x="5944669" y="865419"/>
-                  </a:lnTo>
-                  <a:lnTo>
-                    <a:pt x="5873047" y="859284"/>
-                  </a:lnTo>
-                  <a:lnTo>
-                    <a:pt x="5801424" y="853076"/>
-                  </a:lnTo>
-                  <a:lnTo>
-                    <a:pt x="5729802" y="846793"/>
-                  </a:lnTo>
-                  <a:lnTo>
-                    <a:pt x="5658179" y="840435"/>
-                  </a:lnTo>
-                  <a:lnTo>
-                    <a:pt x="5586557" y="834000"/>
-                  </a:lnTo>
-                  <a:lnTo>
-                    <a:pt x="5514934" y="827488"/>
-                  </a:lnTo>
-                  <a:lnTo>
-                    <a:pt x="5443311" y="820897"/>
-                  </a:lnTo>
-                  <a:lnTo>
-                    <a:pt x="5371689" y="814228"/>
-                  </a:lnTo>
-                  <a:lnTo>
-                    <a:pt x="5300066" y="807478"/>
-                  </a:lnTo>
-                  <a:lnTo>
-                    <a:pt x="5228444" y="800647"/>
-                  </a:lnTo>
-                  <a:lnTo>
-                    <a:pt x="5156821" y="793734"/>
-                  </a:lnTo>
-                  <a:lnTo>
-                    <a:pt x="5085199" y="786738"/>
-                  </a:lnTo>
-                  <a:lnTo>
-                    <a:pt x="5013576" y="779658"/>
-                  </a:lnTo>
-                  <a:lnTo>
-                    <a:pt x="4941954" y="772492"/>
-                  </a:lnTo>
-                  <a:lnTo>
-                    <a:pt x="4870331" y="765241"/>
-                  </a:lnTo>
-                  <a:lnTo>
-                    <a:pt x="4798709" y="757903"/>
-                  </a:lnTo>
-                  <a:lnTo>
-                    <a:pt x="4727086" y="750476"/>
-                  </a:lnTo>
-                  <a:lnTo>
-                    <a:pt x="4655464" y="742960"/>
-                  </a:lnTo>
-                  <a:lnTo>
-                    <a:pt x="4583841" y="735354"/>
-                  </a:lnTo>
-                  <a:lnTo>
-                    <a:pt x="4512219" y="727656"/>
-                  </a:lnTo>
-                  <a:lnTo>
-                    <a:pt x="4440596" y="719866"/>
-                  </a:lnTo>
-                  <a:lnTo>
-                    <a:pt x="4368974" y="711982"/>
-                  </a:lnTo>
-                  <a:lnTo>
-                    <a:pt x="4297351" y="704003"/>
-                  </a:lnTo>
-                  <a:lnTo>
-                    <a:pt x="4225729" y="695929"/>
-                  </a:lnTo>
-                  <a:lnTo>
-                    <a:pt x="4154106" y="687757"/>
-                  </a:lnTo>
-                  <a:lnTo>
-                    <a:pt x="4082483" y="679488"/>
-                  </a:lnTo>
-                  <a:lnTo>
-                    <a:pt x="4010861" y="671119"/>
-                  </a:lnTo>
-                  <a:lnTo>
-                    <a:pt x="3939238" y="662649"/>
-                  </a:lnTo>
-                  <a:lnTo>
-                    <a:pt x="3867616" y="654078"/>
-                  </a:lnTo>
-                  <a:lnTo>
-                    <a:pt x="3795993" y="645403"/>
-                  </a:lnTo>
-                  <a:lnTo>
-                    <a:pt x="3724371" y="636624"/>
-                  </a:lnTo>
-                  <a:lnTo>
-                    <a:pt x="3652748" y="627740"/>
-                  </a:lnTo>
-                  <a:lnTo>
-                    <a:pt x="3581126" y="618749"/>
-                  </a:lnTo>
-                  <a:lnTo>
-                    <a:pt x="3509503" y="609650"/>
-                  </a:lnTo>
-                  <a:lnTo>
-                    <a:pt x="3437881" y="600442"/>
-                  </a:lnTo>
-                  <a:lnTo>
-                    <a:pt x="3366258" y="591123"/>
-                  </a:lnTo>
-                  <a:lnTo>
-                    <a:pt x="3294636" y="581691"/>
-                  </a:lnTo>
-                  <a:lnTo>
-                    <a:pt x="3223013" y="572147"/>
-                  </a:lnTo>
-                  <a:lnTo>
-                    <a:pt x="3151391" y="562488"/>
-                  </a:lnTo>
-                  <a:lnTo>
-                    <a:pt x="3079768" y="552713"/>
-                  </a:lnTo>
-                  <a:lnTo>
-                    <a:pt x="3008146" y="545579"/>
-                  </a:lnTo>
-                  <a:lnTo>
-                    <a:pt x="2936523" y="543309"/>
-                  </a:lnTo>
-                  <a:lnTo>
-                    <a:pt x="2864901" y="541033"/>
-                  </a:lnTo>
-                  <a:lnTo>
-                    <a:pt x="2793278" y="538750"/>
-                  </a:lnTo>
-                  <a:lnTo>
-                    <a:pt x="2721655" y="536462"/>
-                  </a:lnTo>
-                  <a:lnTo>
-                    <a:pt x="2650033" y="534167"/>
-                  </a:lnTo>
-                  <a:lnTo>
-                    <a:pt x="2578410" y="531866"/>
-                  </a:lnTo>
-                  <a:lnTo>
-                    <a:pt x="2506788" y="529558"/>
-                  </a:lnTo>
-                  <a:lnTo>
-                    <a:pt x="2435165" y="527244"/>
-                  </a:lnTo>
-                  <a:lnTo>
-                    <a:pt x="2363543" y="524924"/>
-                  </a:lnTo>
-                  <a:lnTo>
-                    <a:pt x="2291920" y="522598"/>
-                  </a:lnTo>
-                  <a:lnTo>
-                    <a:pt x="2220298" y="520265"/>
-                  </a:lnTo>
-                  <a:lnTo>
-                    <a:pt x="2148675" y="517926"/>
-                  </a:lnTo>
-                  <a:lnTo>
-                    <a:pt x="2077053" y="515580"/>
-                  </a:lnTo>
-                  <a:lnTo>
-                    <a:pt x="2005430" y="513228"/>
-                  </a:lnTo>
-                  <a:lnTo>
-                    <a:pt x="1933808" y="510870"/>
-                  </a:lnTo>
-                  <a:lnTo>
-                    <a:pt x="1862185" y="508505"/>
-                  </a:lnTo>
-                  <a:lnTo>
-                    <a:pt x="1790563" y="506134"/>
-                  </a:lnTo>
-                  <a:lnTo>
-                    <a:pt x="1718940" y="503756"/>
-                  </a:lnTo>
-                  <a:lnTo>
-                    <a:pt x="1647318" y="501372"/>
-                  </a:lnTo>
-                  <a:lnTo>
-                    <a:pt x="1575695" y="498981"/>
-                  </a:lnTo>
-                  <a:lnTo>
-                    <a:pt x="1504073" y="496583"/>
-                  </a:lnTo>
-                  <a:lnTo>
-                    <a:pt x="1432450" y="494180"/>
-                  </a:lnTo>
-                  <a:lnTo>
-                    <a:pt x="1360827" y="491769"/>
-                  </a:lnTo>
-                  <a:lnTo>
-                    <a:pt x="1289205" y="489352"/>
-                  </a:lnTo>
-                  <a:lnTo>
-                    <a:pt x="1217582" y="486928"/>
-                  </a:lnTo>
-                  <a:lnTo>
-                    <a:pt x="1145960" y="484498"/>
-                  </a:lnTo>
-                  <a:lnTo>
-                    <a:pt x="1074337" y="482061"/>
-                  </a:lnTo>
-                  <a:lnTo>
-                    <a:pt x="1002715" y="479617"/>
-                  </a:lnTo>
-                  <a:lnTo>
-                    <a:pt x="931092" y="477167"/>
-                  </a:lnTo>
-                  <a:lnTo>
-                    <a:pt x="859470" y="474710"/>
-                  </a:lnTo>
-                  <a:lnTo>
-                    <a:pt x="787847" y="472246"/>
-                  </a:lnTo>
-                  <a:lnTo>
-                    <a:pt x="716225" y="469776"/>
-                  </a:lnTo>
-                  <a:lnTo>
-                    <a:pt x="644602" y="467299"/>
-                  </a:lnTo>
-                  <a:lnTo>
-                    <a:pt x="572980" y="464815"/>
-                  </a:lnTo>
-                  <a:lnTo>
-                    <a:pt x="501357" y="462324"/>
-                  </a:lnTo>
-                  <a:lnTo>
-                    <a:pt x="429735" y="459826"/>
-                  </a:lnTo>
-                  <a:lnTo>
-                    <a:pt x="358112" y="457322"/>
-                  </a:lnTo>
-                  <a:lnTo>
-                    <a:pt x="286490" y="454811"/>
-                  </a:lnTo>
-                  <a:lnTo>
-                    <a:pt x="214867" y="452293"/>
-                  </a:lnTo>
-                  <a:lnTo>
-                    <a:pt x="143245" y="449768"/>
-                  </a:lnTo>
-                  <a:lnTo>
-                    <a:pt x="71622" y="447236"/>
-                  </a:lnTo>
-                  <a:lnTo>
-                    <a:pt x="0" y="444697"/>
+                    <a:pt x="70344" y="5896"/>
+                  </a:lnTo>
+                  <a:lnTo>
+                    <a:pt x="140688" y="11722"/>
+                  </a:lnTo>
+                  <a:lnTo>
+                    <a:pt x="211033" y="17479"/>
+                  </a:lnTo>
+                  <a:lnTo>
+                    <a:pt x="281377" y="23168"/>
+                  </a:lnTo>
+                  <a:lnTo>
+                    <a:pt x="351722" y="28789"/>
+                  </a:lnTo>
+                  <a:lnTo>
+                    <a:pt x="422066" y="34344"/>
+                  </a:lnTo>
+                  <a:lnTo>
+                    <a:pt x="492411" y="39832"/>
+                  </a:lnTo>
+                  <a:lnTo>
+                    <a:pt x="562755" y="45255"/>
+                  </a:lnTo>
+                  <a:lnTo>
+                    <a:pt x="633100" y="50614"/>
+                  </a:lnTo>
+                  <a:lnTo>
+                    <a:pt x="703444" y="55910"/>
+                  </a:lnTo>
+                  <a:lnTo>
+                    <a:pt x="773789" y="61142"/>
+                  </a:lnTo>
+                  <a:lnTo>
+                    <a:pt x="844133" y="66312"/>
+                  </a:lnTo>
+                  <a:lnTo>
+                    <a:pt x="914478" y="71421"/>
+                  </a:lnTo>
+                  <a:lnTo>
+                    <a:pt x="984822" y="76469"/>
+                  </a:lnTo>
+                  <a:lnTo>
+                    <a:pt x="1055167" y="81457"/>
+                  </a:lnTo>
+                  <a:lnTo>
+                    <a:pt x="1125511" y="86386"/>
+                  </a:lnTo>
+                  <a:lnTo>
+                    <a:pt x="1195856" y="91257"/>
+                  </a:lnTo>
+                  <a:lnTo>
+                    <a:pt x="1266200" y="96070"/>
+                  </a:lnTo>
+                  <a:lnTo>
+                    <a:pt x="1336545" y="100825"/>
+                  </a:lnTo>
+                  <a:lnTo>
+                    <a:pt x="1406889" y="105524"/>
+                  </a:lnTo>
+                  <a:lnTo>
+                    <a:pt x="1477234" y="110167"/>
+                  </a:lnTo>
+                  <a:lnTo>
+                    <a:pt x="1547578" y="114755"/>
+                  </a:lnTo>
+                  <a:lnTo>
+                    <a:pt x="1617923" y="119289"/>
+                  </a:lnTo>
+                  <a:lnTo>
+                    <a:pt x="1688267" y="123769"/>
+                  </a:lnTo>
+                  <a:lnTo>
+                    <a:pt x="1758612" y="128195"/>
+                  </a:lnTo>
+                  <a:lnTo>
+                    <a:pt x="1828956" y="132569"/>
+                  </a:lnTo>
+                  <a:lnTo>
+                    <a:pt x="1899301" y="136891"/>
+                  </a:lnTo>
+                  <a:lnTo>
+                    <a:pt x="1969645" y="141162"/>
+                  </a:lnTo>
+                  <a:lnTo>
+                    <a:pt x="2039990" y="145382"/>
+                  </a:lnTo>
+                  <a:lnTo>
+                    <a:pt x="2110334" y="149552"/>
+                  </a:lnTo>
+                  <a:lnTo>
+                    <a:pt x="2180679" y="153672"/>
+                  </a:lnTo>
+                  <a:lnTo>
+                    <a:pt x="2251023" y="157743"/>
+                  </a:lnTo>
+                  <a:lnTo>
+                    <a:pt x="2321368" y="161766"/>
+                  </a:lnTo>
+                  <a:lnTo>
+                    <a:pt x="2391712" y="165742"/>
+                  </a:lnTo>
+                  <a:lnTo>
+                    <a:pt x="2462057" y="169670"/>
+                  </a:lnTo>
+                  <a:lnTo>
+                    <a:pt x="2532401" y="173551"/>
+                  </a:lnTo>
+                  <a:lnTo>
+                    <a:pt x="2602746" y="177386"/>
+                  </a:lnTo>
+                  <a:lnTo>
+                    <a:pt x="2673090" y="181176"/>
+                  </a:lnTo>
+                  <a:lnTo>
+                    <a:pt x="2743435" y="184921"/>
+                  </a:lnTo>
+                  <a:lnTo>
+                    <a:pt x="2813779" y="188621"/>
+                  </a:lnTo>
+                  <a:lnTo>
+                    <a:pt x="2884124" y="192278"/>
+                  </a:lnTo>
+                  <a:lnTo>
+                    <a:pt x="2954468" y="195891"/>
+                  </a:lnTo>
+                  <a:lnTo>
+                    <a:pt x="3024813" y="197703"/>
+                  </a:lnTo>
+                  <a:lnTo>
+                    <a:pt x="3095157" y="198518"/>
+                  </a:lnTo>
+                  <a:lnTo>
+                    <a:pt x="3165502" y="199330"/>
+                  </a:lnTo>
+                  <a:lnTo>
+                    <a:pt x="3235846" y="200141"/>
+                  </a:lnTo>
+                  <a:lnTo>
+                    <a:pt x="3306191" y="200949"/>
+                  </a:lnTo>
+                  <a:lnTo>
+                    <a:pt x="3376535" y="201755"/>
+                  </a:lnTo>
+                  <a:lnTo>
+                    <a:pt x="3446880" y="202558"/>
+                  </a:lnTo>
+                  <a:lnTo>
+                    <a:pt x="3517224" y="203360"/>
+                  </a:lnTo>
+                  <a:lnTo>
+                    <a:pt x="3587569" y="204159"/>
+                  </a:lnTo>
+                  <a:lnTo>
+                    <a:pt x="3657913" y="204956"/>
+                  </a:lnTo>
+                  <a:lnTo>
+                    <a:pt x="3728257" y="205751"/>
+                  </a:lnTo>
+                  <a:lnTo>
+                    <a:pt x="3798602" y="206544"/>
+                  </a:lnTo>
+                  <a:lnTo>
+                    <a:pt x="3868946" y="207335"/>
+                  </a:lnTo>
+                  <a:lnTo>
+                    <a:pt x="3939291" y="208123"/>
+                  </a:lnTo>
+                  <a:lnTo>
+                    <a:pt x="4009635" y="208909"/>
+                  </a:lnTo>
+                  <a:lnTo>
+                    <a:pt x="4079980" y="209693"/>
+                  </a:lnTo>
+                  <a:lnTo>
+                    <a:pt x="4150324" y="210475"/>
+                  </a:lnTo>
+                  <a:lnTo>
+                    <a:pt x="4220669" y="211255"/>
+                  </a:lnTo>
+                  <a:lnTo>
+                    <a:pt x="4291013" y="212033"/>
+                  </a:lnTo>
+                  <a:lnTo>
+                    <a:pt x="4361358" y="212809"/>
+                  </a:lnTo>
+                  <a:lnTo>
+                    <a:pt x="4431702" y="213582"/>
+                  </a:lnTo>
+                  <a:lnTo>
+                    <a:pt x="4502047" y="214354"/>
+                  </a:lnTo>
+                  <a:lnTo>
+                    <a:pt x="4572391" y="215123"/>
+                  </a:lnTo>
+                  <a:lnTo>
+                    <a:pt x="4642736" y="215890"/>
+                  </a:lnTo>
+                  <a:lnTo>
+                    <a:pt x="4713080" y="216655"/>
+                  </a:lnTo>
+                  <a:lnTo>
+                    <a:pt x="4783425" y="217418"/>
+                  </a:lnTo>
+                  <a:lnTo>
+                    <a:pt x="4853769" y="218179"/>
+                  </a:lnTo>
+                  <a:lnTo>
+                    <a:pt x="4924114" y="218938"/>
+                  </a:lnTo>
+                  <a:lnTo>
+                    <a:pt x="4994458" y="219695"/>
+                  </a:lnTo>
+                  <a:lnTo>
+                    <a:pt x="5064803" y="220450"/>
+                  </a:lnTo>
+                  <a:lnTo>
+                    <a:pt x="5135147" y="221203"/>
+                  </a:lnTo>
+                  <a:lnTo>
+                    <a:pt x="5205492" y="221953"/>
+                  </a:lnTo>
+                  <a:lnTo>
+                    <a:pt x="5275836" y="222702"/>
+                  </a:lnTo>
+                  <a:lnTo>
+                    <a:pt x="5346181" y="223448"/>
+                  </a:lnTo>
+                  <a:lnTo>
+                    <a:pt x="5416525" y="224193"/>
+                  </a:lnTo>
+                  <a:lnTo>
+                    <a:pt x="5486870" y="224935"/>
+                  </a:lnTo>
+                  <a:lnTo>
+                    <a:pt x="5557214" y="225676"/>
+                  </a:lnTo>
+                  <a:lnTo>
+                    <a:pt x="5627559" y="226414"/>
+                  </a:lnTo>
+                  <a:lnTo>
+                    <a:pt x="5697903" y="227151"/>
+                  </a:lnTo>
+                  <a:lnTo>
+                    <a:pt x="5768248" y="227885"/>
+                  </a:lnTo>
+                  <a:lnTo>
+                    <a:pt x="5838592" y="228618"/>
+                  </a:lnTo>
+                  <a:lnTo>
+                    <a:pt x="5908937" y="229348"/>
+                  </a:lnTo>
+                  <a:lnTo>
+                    <a:pt x="5979281" y="230076"/>
+                  </a:lnTo>
+                  <a:lnTo>
+                    <a:pt x="6049626" y="230803"/>
+                  </a:lnTo>
+                  <a:lnTo>
+                    <a:pt x="6119970" y="231527"/>
+                  </a:lnTo>
+                  <a:lnTo>
+                    <a:pt x="6190315" y="232250"/>
+                  </a:lnTo>
+                  <a:lnTo>
+                    <a:pt x="6260659" y="232970"/>
+                  </a:lnTo>
+                  <a:lnTo>
+                    <a:pt x="6331004" y="233689"/>
+                  </a:lnTo>
+                  <a:lnTo>
+                    <a:pt x="6401348" y="234406"/>
+                  </a:lnTo>
+                  <a:lnTo>
+                    <a:pt x="6471693" y="235120"/>
+                  </a:lnTo>
+                  <a:lnTo>
+                    <a:pt x="6542037" y="235833"/>
+                  </a:lnTo>
+                  <a:lnTo>
+                    <a:pt x="6612382" y="236544"/>
+                  </a:lnTo>
+                  <a:lnTo>
+                    <a:pt x="6682726" y="237252"/>
+                  </a:lnTo>
+                  <a:lnTo>
+                    <a:pt x="6753071" y="237959"/>
+                  </a:lnTo>
+                  <a:lnTo>
+                    <a:pt x="6823415" y="238664"/>
+                  </a:lnTo>
+                  <a:lnTo>
+                    <a:pt x="6893760" y="239367"/>
+                  </a:lnTo>
+                  <a:lnTo>
+                    <a:pt x="6964104" y="240068"/>
+                  </a:lnTo>
+                  <a:lnTo>
+                    <a:pt x="6964104" y="344358"/>
+                  </a:lnTo>
+                  <a:lnTo>
+                    <a:pt x="6893760" y="342530"/>
+                  </a:lnTo>
+                  <a:lnTo>
+                    <a:pt x="6823415" y="340679"/>
+                  </a:lnTo>
+                  <a:lnTo>
+                    <a:pt x="6753071" y="338806"/>
+                  </a:lnTo>
+                  <a:lnTo>
+                    <a:pt x="6682726" y="336911"/>
+                  </a:lnTo>
+                  <a:lnTo>
+                    <a:pt x="6612382" y="334993"/>
+                  </a:lnTo>
+                  <a:lnTo>
+                    <a:pt x="6542037" y="333051"/>
+                  </a:lnTo>
+                  <a:lnTo>
+                    <a:pt x="6471693" y="331087"/>
+                  </a:lnTo>
+                  <a:lnTo>
+                    <a:pt x="6401348" y="329099"/>
+                  </a:lnTo>
+                  <a:lnTo>
+                    <a:pt x="6331004" y="327087"/>
+                  </a:lnTo>
+                  <a:lnTo>
+                    <a:pt x="6260659" y="325050"/>
+                  </a:lnTo>
+                  <a:lnTo>
+                    <a:pt x="6190315" y="322990"/>
+                  </a:lnTo>
+                  <a:lnTo>
+                    <a:pt x="6119970" y="320904"/>
+                  </a:lnTo>
+                  <a:lnTo>
+                    <a:pt x="6049626" y="318794"/>
+                  </a:lnTo>
+                  <a:lnTo>
+                    <a:pt x="5979281" y="316658"/>
+                  </a:lnTo>
+                  <a:lnTo>
+                    <a:pt x="5908937" y="314496"/>
+                  </a:lnTo>
+                  <a:lnTo>
+                    <a:pt x="5838592" y="312309"/>
+                  </a:lnTo>
+                  <a:lnTo>
+                    <a:pt x="5768248" y="310095"/>
+                  </a:lnTo>
+                  <a:lnTo>
+                    <a:pt x="5697903" y="307855"/>
+                  </a:lnTo>
+                  <a:lnTo>
+                    <a:pt x="5627559" y="305587"/>
+                  </a:lnTo>
+                  <a:lnTo>
+                    <a:pt x="5557214" y="303293"/>
+                  </a:lnTo>
+                  <a:lnTo>
+                    <a:pt x="5486870" y="300971"/>
+                  </a:lnTo>
+                  <a:lnTo>
+                    <a:pt x="5416525" y="298620"/>
+                  </a:lnTo>
+                  <a:lnTo>
+                    <a:pt x="5346181" y="296242"/>
+                  </a:lnTo>
+                  <a:lnTo>
+                    <a:pt x="5275836" y="293835"/>
+                  </a:lnTo>
+                  <a:lnTo>
+                    <a:pt x="5205492" y="291399"/>
+                  </a:lnTo>
+                  <a:lnTo>
+                    <a:pt x="5135147" y="288934"/>
+                  </a:lnTo>
+                  <a:lnTo>
+                    <a:pt x="5064803" y="286440"/>
+                  </a:lnTo>
+                  <a:lnTo>
+                    <a:pt x="4994458" y="283915"/>
+                  </a:lnTo>
+                  <a:lnTo>
+                    <a:pt x="4924114" y="281360"/>
+                  </a:lnTo>
+                  <a:lnTo>
+                    <a:pt x="4853769" y="278774"/>
+                  </a:lnTo>
+                  <a:lnTo>
+                    <a:pt x="4783425" y="276157"/>
+                  </a:lnTo>
+                  <a:lnTo>
+                    <a:pt x="4713080" y="273509"/>
+                  </a:lnTo>
+                  <a:lnTo>
+                    <a:pt x="4642736" y="270829"/>
+                  </a:lnTo>
+                  <a:lnTo>
+                    <a:pt x="4572391" y="268116"/>
+                  </a:lnTo>
+                  <a:lnTo>
+                    <a:pt x="4502047" y="265372"/>
+                  </a:lnTo>
+                  <a:lnTo>
+                    <a:pt x="4431702" y="262594"/>
+                  </a:lnTo>
+                  <a:lnTo>
+                    <a:pt x="4361358" y="259782"/>
+                  </a:lnTo>
+                  <a:lnTo>
+                    <a:pt x="4291013" y="256937"/>
+                  </a:lnTo>
+                  <a:lnTo>
+                    <a:pt x="4220669" y="254058"/>
+                  </a:lnTo>
+                  <a:lnTo>
+                    <a:pt x="4150324" y="251144"/>
+                  </a:lnTo>
+                  <a:lnTo>
+                    <a:pt x="4079980" y="248195"/>
+                  </a:lnTo>
+                  <a:lnTo>
+                    <a:pt x="4009635" y="245211"/>
+                  </a:lnTo>
+                  <a:lnTo>
+                    <a:pt x="3939291" y="242191"/>
+                  </a:lnTo>
+                  <a:lnTo>
+                    <a:pt x="3868946" y="239134"/>
+                  </a:lnTo>
+                  <a:lnTo>
+                    <a:pt x="3798602" y="236041"/>
+                  </a:lnTo>
+                  <a:lnTo>
+                    <a:pt x="3728257" y="232910"/>
+                  </a:lnTo>
+                  <a:lnTo>
+                    <a:pt x="3657913" y="229742"/>
+                  </a:lnTo>
+                  <a:lnTo>
+                    <a:pt x="3587569" y="226536"/>
+                  </a:lnTo>
+                  <a:lnTo>
+                    <a:pt x="3517224" y="223292"/>
+                  </a:lnTo>
+                  <a:lnTo>
+                    <a:pt x="3446880" y="220008"/>
+                  </a:lnTo>
+                  <a:lnTo>
+                    <a:pt x="3376535" y="216685"/>
+                  </a:lnTo>
+                  <a:lnTo>
+                    <a:pt x="3306191" y="213322"/>
+                  </a:lnTo>
+                  <a:lnTo>
+                    <a:pt x="3235846" y="209918"/>
+                  </a:lnTo>
+                  <a:lnTo>
+                    <a:pt x="3165502" y="206474"/>
+                  </a:lnTo>
+                  <a:lnTo>
+                    <a:pt x="3095157" y="202988"/>
+                  </a:lnTo>
+                  <a:lnTo>
+                    <a:pt x="3024813" y="199461"/>
+                  </a:lnTo>
+                  <a:lnTo>
+                    <a:pt x="2954468" y="196886"/>
+                  </a:lnTo>
+                  <a:lnTo>
+                    <a:pt x="2884124" y="196067"/>
+                  </a:lnTo>
+                  <a:lnTo>
+                    <a:pt x="2813779" y="195246"/>
+                  </a:lnTo>
+                  <a:lnTo>
+                    <a:pt x="2743435" y="194422"/>
+                  </a:lnTo>
+                  <a:lnTo>
+                    <a:pt x="2673090" y="193596"/>
+                  </a:lnTo>
+                  <a:lnTo>
+                    <a:pt x="2602746" y="192768"/>
+                  </a:lnTo>
+                  <a:lnTo>
+                    <a:pt x="2532401" y="191937"/>
+                  </a:lnTo>
+                  <a:lnTo>
+                    <a:pt x="2462057" y="191105"/>
+                  </a:lnTo>
+                  <a:lnTo>
+                    <a:pt x="2391712" y="190270"/>
+                  </a:lnTo>
+                  <a:lnTo>
+                    <a:pt x="2321368" y="189433"/>
+                  </a:lnTo>
+                  <a:lnTo>
+                    <a:pt x="2251023" y="188593"/>
+                  </a:lnTo>
+                  <a:lnTo>
+                    <a:pt x="2180679" y="187751"/>
+                  </a:lnTo>
+                  <a:lnTo>
+                    <a:pt x="2110334" y="186907"/>
+                  </a:lnTo>
+                  <a:lnTo>
+                    <a:pt x="2039990" y="186060"/>
+                  </a:lnTo>
+                  <a:lnTo>
+                    <a:pt x="1969645" y="185212"/>
+                  </a:lnTo>
+                  <a:lnTo>
+                    <a:pt x="1899301" y="184361"/>
+                  </a:lnTo>
+                  <a:lnTo>
+                    <a:pt x="1828956" y="183507"/>
+                  </a:lnTo>
+                  <a:lnTo>
+                    <a:pt x="1758612" y="182651"/>
+                  </a:lnTo>
+                  <a:lnTo>
+                    <a:pt x="1688267" y="181793"/>
+                  </a:lnTo>
+                  <a:lnTo>
+                    <a:pt x="1617923" y="180933"/>
+                  </a:lnTo>
+                  <a:lnTo>
+                    <a:pt x="1547578" y="180070"/>
+                  </a:lnTo>
+                  <a:lnTo>
+                    <a:pt x="1477234" y="179205"/>
+                  </a:lnTo>
+                  <a:lnTo>
+                    <a:pt x="1406889" y="178337"/>
+                  </a:lnTo>
+                  <a:lnTo>
+                    <a:pt x="1336545" y="177468"/>
+                  </a:lnTo>
+                  <a:lnTo>
+                    <a:pt x="1266200" y="176595"/>
+                  </a:lnTo>
+                  <a:lnTo>
+                    <a:pt x="1195856" y="175721"/>
+                  </a:lnTo>
+                  <a:lnTo>
+                    <a:pt x="1125511" y="174844"/>
+                  </a:lnTo>
+                  <a:lnTo>
+                    <a:pt x="1055167" y="173964"/>
+                  </a:lnTo>
+                  <a:lnTo>
+                    <a:pt x="984822" y="173082"/>
+                  </a:lnTo>
+                  <a:lnTo>
+                    <a:pt x="914478" y="172198"/>
+                  </a:lnTo>
+                  <a:lnTo>
+                    <a:pt x="844133" y="171311"/>
+                  </a:lnTo>
+                  <a:lnTo>
+                    <a:pt x="773789" y="170422"/>
+                  </a:lnTo>
+                  <a:lnTo>
+                    <a:pt x="703444" y="169531"/>
+                  </a:lnTo>
+                  <a:lnTo>
+                    <a:pt x="633100" y="168637"/>
+                  </a:lnTo>
+                  <a:lnTo>
+                    <a:pt x="562755" y="167740"/>
+                  </a:lnTo>
+                  <a:lnTo>
+                    <a:pt x="492411" y="166842"/>
+                  </a:lnTo>
+                  <a:lnTo>
+                    <a:pt x="422066" y="165940"/>
+                  </a:lnTo>
+                  <a:lnTo>
+                    <a:pt x="351722" y="165036"/>
+                  </a:lnTo>
+                  <a:lnTo>
+                    <a:pt x="281377" y="164130"/>
+                  </a:lnTo>
+                  <a:lnTo>
+                    <a:pt x="211033" y="163221"/>
+                  </a:lnTo>
+                  <a:lnTo>
+                    <a:pt x="140688" y="162310"/>
+                  </a:lnTo>
+                  <a:lnTo>
+                    <a:pt x="70344" y="161397"/>
+                  </a:lnTo>
+                  <a:lnTo>
+                    <a:pt x="0" y="160480"/>
                   </a:lnTo>
                   <a:close/>
                 </a:path>
@@ -3670,643 +3705,318 @@
         </p:sp>
         <p:sp>
           <p:nvSpPr>
-            <p:cNvPr id="23" name="pl23"/>
-            <p:cNvSpPr/>
-            <p:nvPr/>
-          </p:nvSpPr>
-          <p:spPr>
-            <a:xfrm>
-              <a:off x="1172049" y="4181391"/>
-              <a:ext cx="7090630" cy="665238"/>
-            </a:xfrm>
-            <a:custGeom>
-              <a:avLst/>
-              <a:pathLst>
-                <a:path w="7090630" h="665238">
-                  <a:moveTo>
-                    <a:pt x="0" y="0"/>
-                  </a:moveTo>
-                  <a:lnTo>
-                    <a:pt x="71622" y="16338"/>
-                  </a:lnTo>
-                  <a:lnTo>
-                    <a:pt x="143245" y="32483"/>
-                  </a:lnTo>
-                  <a:lnTo>
-                    <a:pt x="214867" y="48437"/>
-                  </a:lnTo>
-                  <a:lnTo>
-                    <a:pt x="286490" y="64200"/>
-                  </a:lnTo>
-                  <a:lnTo>
-                    <a:pt x="358112" y="79777"/>
-                  </a:lnTo>
-                  <a:lnTo>
-                    <a:pt x="429735" y="95168"/>
-                  </a:lnTo>
-                  <a:lnTo>
-                    <a:pt x="501357" y="110377"/>
-                  </a:lnTo>
-                  <a:lnTo>
-                    <a:pt x="572980" y="125405"/>
-                  </a:lnTo>
-                  <a:lnTo>
-                    <a:pt x="644602" y="140255"/>
-                  </a:lnTo>
-                  <a:lnTo>
-                    <a:pt x="716225" y="154928"/>
-                  </a:lnTo>
-                  <a:lnTo>
-                    <a:pt x="787847" y="169427"/>
-                  </a:lnTo>
-                  <a:lnTo>
-                    <a:pt x="859470" y="183754"/>
-                  </a:lnTo>
-                  <a:lnTo>
-                    <a:pt x="931092" y="197911"/>
-                  </a:lnTo>
-                  <a:lnTo>
-                    <a:pt x="1002715" y="211900"/>
-                  </a:lnTo>
-                  <a:lnTo>
-                    <a:pt x="1074337" y="225722"/>
-                  </a:lnTo>
-                  <a:lnTo>
-                    <a:pt x="1145960" y="239381"/>
-                  </a:lnTo>
-                  <a:lnTo>
-                    <a:pt x="1217582" y="252877"/>
-                  </a:lnTo>
-                  <a:lnTo>
-                    <a:pt x="1289205" y="266213"/>
-                  </a:lnTo>
-                  <a:lnTo>
-                    <a:pt x="1360827" y="279390"/>
-                  </a:lnTo>
-                  <a:lnTo>
-                    <a:pt x="1432450" y="292411"/>
-                  </a:lnTo>
-                  <a:lnTo>
-                    <a:pt x="1504073" y="305278"/>
-                  </a:lnTo>
-                  <a:lnTo>
-                    <a:pt x="1575695" y="317991"/>
-                  </a:lnTo>
-                  <a:lnTo>
-                    <a:pt x="1647318" y="330554"/>
-                  </a:lnTo>
-                  <a:lnTo>
-                    <a:pt x="1718940" y="342967"/>
-                  </a:lnTo>
-                  <a:lnTo>
-                    <a:pt x="1790563" y="355233"/>
-                  </a:lnTo>
-                  <a:lnTo>
-                    <a:pt x="1862185" y="367354"/>
-                  </a:lnTo>
-                  <a:lnTo>
-                    <a:pt x="1933808" y="379330"/>
-                  </a:lnTo>
-                  <a:lnTo>
-                    <a:pt x="2005430" y="391164"/>
-                  </a:lnTo>
-                  <a:lnTo>
-                    <a:pt x="2077053" y="402858"/>
-                  </a:lnTo>
-                  <a:lnTo>
-                    <a:pt x="2148675" y="414413"/>
-                  </a:lnTo>
-                  <a:lnTo>
-                    <a:pt x="2220298" y="425830"/>
-                  </a:lnTo>
-                  <a:lnTo>
-                    <a:pt x="2291920" y="437112"/>
-                  </a:lnTo>
-                  <a:lnTo>
-                    <a:pt x="2363543" y="448260"/>
-                  </a:lnTo>
-                  <a:lnTo>
-                    <a:pt x="2435165" y="459276"/>
-                  </a:lnTo>
-                  <a:lnTo>
-                    <a:pt x="2506788" y="470161"/>
-                  </a:lnTo>
-                  <a:lnTo>
-                    <a:pt x="2578410" y="480916"/>
-                  </a:lnTo>
-                  <a:lnTo>
-                    <a:pt x="2650033" y="491544"/>
-                  </a:lnTo>
-                  <a:lnTo>
-                    <a:pt x="2721655" y="502046"/>
-                  </a:lnTo>
-                  <a:lnTo>
-                    <a:pt x="2793278" y="512423"/>
-                  </a:lnTo>
-                  <a:lnTo>
-                    <a:pt x="2864901" y="522676"/>
-                  </a:lnTo>
-                  <a:lnTo>
-                    <a:pt x="2936523" y="532808"/>
-                  </a:lnTo>
-                  <a:lnTo>
-                    <a:pt x="3008146" y="542820"/>
-                  </a:lnTo>
-                  <a:lnTo>
-                    <a:pt x="3079768" y="547843"/>
-                  </a:lnTo>
-                  <a:lnTo>
-                    <a:pt x="3151391" y="550100"/>
-                  </a:lnTo>
-                  <a:lnTo>
-                    <a:pt x="3223013" y="552352"/>
-                  </a:lnTo>
-                  <a:lnTo>
-                    <a:pt x="3294636" y="554597"/>
-                  </a:lnTo>
-                  <a:lnTo>
-                    <a:pt x="3366258" y="556836"/>
-                  </a:lnTo>
-                  <a:lnTo>
-                    <a:pt x="3437881" y="559069"/>
-                  </a:lnTo>
-                  <a:lnTo>
-                    <a:pt x="3509503" y="561296"/>
-                  </a:lnTo>
-                  <a:lnTo>
-                    <a:pt x="3581126" y="563517"/>
-                  </a:lnTo>
-                  <a:lnTo>
-                    <a:pt x="3652748" y="565732"/>
-                  </a:lnTo>
-                  <a:lnTo>
-                    <a:pt x="3724371" y="567941"/>
-                  </a:lnTo>
-                  <a:lnTo>
-                    <a:pt x="3795993" y="570144"/>
-                  </a:lnTo>
-                  <a:lnTo>
-                    <a:pt x="3867616" y="572340"/>
-                  </a:lnTo>
-                  <a:lnTo>
-                    <a:pt x="3939238" y="574531"/>
-                  </a:lnTo>
-                  <a:lnTo>
-                    <a:pt x="4010861" y="576716"/>
-                  </a:lnTo>
-                  <a:lnTo>
-                    <a:pt x="4082483" y="578895"/>
-                  </a:lnTo>
-                  <a:lnTo>
-                    <a:pt x="4154106" y="581068"/>
-                  </a:lnTo>
-                  <a:lnTo>
-                    <a:pt x="4225729" y="583235"/>
-                  </a:lnTo>
-                  <a:lnTo>
-                    <a:pt x="4297351" y="585396"/>
-                  </a:lnTo>
-                  <a:lnTo>
-                    <a:pt x="4368974" y="587551"/>
-                  </a:lnTo>
-                  <a:lnTo>
-                    <a:pt x="4440596" y="589701"/>
-                  </a:lnTo>
-                  <a:lnTo>
-                    <a:pt x="4512219" y="591844"/>
-                  </a:lnTo>
-                  <a:lnTo>
-                    <a:pt x="4583841" y="593982"/>
-                  </a:lnTo>
-                  <a:lnTo>
-                    <a:pt x="4655464" y="596114"/>
-                  </a:lnTo>
-                  <a:lnTo>
-                    <a:pt x="4727086" y="598240"/>
-                  </a:lnTo>
-                  <a:lnTo>
-                    <a:pt x="4798709" y="600360"/>
-                  </a:lnTo>
-                  <a:lnTo>
-                    <a:pt x="4870331" y="602474"/>
-                  </a:lnTo>
-                  <a:lnTo>
-                    <a:pt x="4941954" y="604583"/>
-                  </a:lnTo>
-                  <a:lnTo>
-                    <a:pt x="5013576" y="606686"/>
-                  </a:lnTo>
-                  <a:lnTo>
-                    <a:pt x="5085199" y="608783"/>
-                  </a:lnTo>
-                  <a:lnTo>
-                    <a:pt x="5156821" y="610874"/>
-                  </a:lnTo>
-                  <a:lnTo>
-                    <a:pt x="5228444" y="612960"/>
-                  </a:lnTo>
-                  <a:lnTo>
-                    <a:pt x="5300066" y="615040"/>
-                  </a:lnTo>
-                  <a:lnTo>
-                    <a:pt x="5371689" y="617115"/>
-                  </a:lnTo>
-                  <a:lnTo>
-                    <a:pt x="5443311" y="619183"/>
-                  </a:lnTo>
-                  <a:lnTo>
-                    <a:pt x="5514934" y="621246"/>
-                  </a:lnTo>
-                  <a:lnTo>
-                    <a:pt x="5586557" y="623304"/>
-                  </a:lnTo>
-                  <a:lnTo>
-                    <a:pt x="5658179" y="625356"/>
-                  </a:lnTo>
-                  <a:lnTo>
-                    <a:pt x="5729802" y="627402"/>
-                  </a:lnTo>
-                  <a:lnTo>
-                    <a:pt x="5801424" y="629443"/>
-                  </a:lnTo>
-                  <a:lnTo>
-                    <a:pt x="5873047" y="631478"/>
-                  </a:lnTo>
-                  <a:lnTo>
-                    <a:pt x="5944669" y="633507"/>
-                  </a:lnTo>
-                  <a:lnTo>
-                    <a:pt x="6016292" y="635531"/>
-                  </a:lnTo>
-                  <a:lnTo>
-                    <a:pt x="6087914" y="637550"/>
-                  </a:lnTo>
-                  <a:lnTo>
-                    <a:pt x="6159537" y="639563"/>
-                  </a:lnTo>
-                  <a:lnTo>
-                    <a:pt x="6231159" y="641570"/>
-                  </a:lnTo>
-                  <a:lnTo>
-                    <a:pt x="6302782" y="643572"/>
-                  </a:lnTo>
-                  <a:lnTo>
-                    <a:pt x="6374404" y="645569"/>
-                  </a:lnTo>
-                  <a:lnTo>
-                    <a:pt x="6446027" y="647560"/>
-                  </a:lnTo>
-                  <a:lnTo>
-                    <a:pt x="6517649" y="649546"/>
-                  </a:lnTo>
-                  <a:lnTo>
-                    <a:pt x="6589272" y="651526"/>
-                  </a:lnTo>
-                  <a:lnTo>
-                    <a:pt x="6660894" y="653501"/>
-                  </a:lnTo>
-                  <a:lnTo>
-                    <a:pt x="6732517" y="655471"/>
-                  </a:lnTo>
-                  <a:lnTo>
-                    <a:pt x="6804139" y="657435"/>
-                  </a:lnTo>
-                  <a:lnTo>
-                    <a:pt x="6875762" y="659394"/>
-                  </a:lnTo>
-                  <a:lnTo>
-                    <a:pt x="6947385" y="661347"/>
-                  </a:lnTo>
-                  <a:lnTo>
-                    <a:pt x="7019007" y="663295"/>
-                  </a:lnTo>
-                  <a:lnTo>
-                    <a:pt x="7090630" y="665238"/>
-                  </a:lnTo>
-                </a:path>
-              </a:pathLst>
-            </a:custGeom>
-          </p:spPr>
-          <p:txBody>
-            <a:bodyPr/>
-            <a:lstStyle/>
-            <a:p/>
-          </p:txBody>
-        </p:sp>
-        <p:sp>
-          <p:nvSpPr>
             <p:cNvPr id="24" name="pl24"/>
             <p:cNvSpPr/>
             <p:nvPr/>
           </p:nvSpPr>
           <p:spPr>
             <a:xfrm>
-              <a:off x="1172049" y="4626088"/>
-              <a:ext cx="7090630" cy="509531"/>
+              <a:off x="1235312" y="2903779"/>
+              <a:ext cx="6964104" cy="240068"/>
             </a:xfrm>
             <a:custGeom>
               <a:avLst/>
               <a:pathLst>
-                <a:path w="7090630" h="509531">
+                <a:path w="6964104" h="240068">
                   <a:moveTo>
-                    <a:pt x="7090630" y="509531"/>
+                    <a:pt x="0" y="0"/>
                   </a:moveTo>
                   <a:lnTo>
-                    <a:pt x="7019007" y="504464"/>
-                  </a:lnTo>
-                  <a:lnTo>
-                    <a:pt x="6947385" y="499336"/>
-                  </a:lnTo>
-                  <a:lnTo>
-                    <a:pt x="6875762" y="494146"/>
-                  </a:lnTo>
-                  <a:lnTo>
-                    <a:pt x="6804139" y="488894"/>
-                  </a:lnTo>
-                  <a:lnTo>
-                    <a:pt x="6732517" y="483579"/>
-                  </a:lnTo>
-                  <a:lnTo>
-                    <a:pt x="6660894" y="478199"/>
-                  </a:lnTo>
-                  <a:lnTo>
-                    <a:pt x="6589272" y="472756"/>
-                  </a:lnTo>
-                  <a:lnTo>
-                    <a:pt x="6517649" y="467246"/>
-                  </a:lnTo>
-                  <a:lnTo>
-                    <a:pt x="6446027" y="461671"/>
-                  </a:lnTo>
-                  <a:lnTo>
-                    <a:pt x="6374404" y="456029"/>
-                  </a:lnTo>
-                  <a:lnTo>
-                    <a:pt x="6302782" y="450318"/>
-                  </a:lnTo>
-                  <a:lnTo>
-                    <a:pt x="6231159" y="444540"/>
-                  </a:lnTo>
-                  <a:lnTo>
-                    <a:pt x="6159537" y="438691"/>
-                  </a:lnTo>
-                  <a:lnTo>
-                    <a:pt x="6087914" y="432773"/>
-                  </a:lnTo>
-                  <a:lnTo>
-                    <a:pt x="6016292" y="426783"/>
-                  </a:lnTo>
-                  <a:lnTo>
-                    <a:pt x="5944669" y="420721"/>
-                  </a:lnTo>
-                  <a:lnTo>
-                    <a:pt x="5873047" y="414587"/>
-                  </a:lnTo>
-                  <a:lnTo>
-                    <a:pt x="5801424" y="408378"/>
-                  </a:lnTo>
-                  <a:lnTo>
-                    <a:pt x="5729802" y="402096"/>
-                  </a:lnTo>
-                  <a:lnTo>
-                    <a:pt x="5658179" y="395737"/>
-                  </a:lnTo>
-                  <a:lnTo>
-                    <a:pt x="5586557" y="389302"/>
-                  </a:lnTo>
-                  <a:lnTo>
-                    <a:pt x="5514934" y="382790"/>
-                  </a:lnTo>
-                  <a:lnTo>
-                    <a:pt x="5443311" y="376200"/>
-                  </a:lnTo>
-                  <a:lnTo>
-                    <a:pt x="5371689" y="369530"/>
-                  </a:lnTo>
-                  <a:lnTo>
-                    <a:pt x="5300066" y="362780"/>
-                  </a:lnTo>
-                  <a:lnTo>
-                    <a:pt x="5228444" y="355950"/>
-                  </a:lnTo>
-                  <a:lnTo>
-                    <a:pt x="5156821" y="349037"/>
-                  </a:lnTo>
-                  <a:lnTo>
-                    <a:pt x="5085199" y="342041"/>
-                  </a:lnTo>
-                  <a:lnTo>
-                    <a:pt x="5013576" y="334960"/>
-                  </a:lnTo>
-                  <a:lnTo>
-                    <a:pt x="4941954" y="327795"/>
-                  </a:lnTo>
-                  <a:lnTo>
-                    <a:pt x="4870331" y="320544"/>
-                  </a:lnTo>
-                  <a:lnTo>
-                    <a:pt x="4798709" y="313205"/>
-                  </a:lnTo>
-                  <a:lnTo>
-                    <a:pt x="4727086" y="305779"/>
-                  </a:lnTo>
-                  <a:lnTo>
-                    <a:pt x="4655464" y="298263"/>
-                  </a:lnTo>
-                  <a:lnTo>
-                    <a:pt x="4583841" y="290656"/>
-                  </a:lnTo>
-                  <a:lnTo>
-                    <a:pt x="4512219" y="282959"/>
-                  </a:lnTo>
-                  <a:lnTo>
-                    <a:pt x="4440596" y="275169"/>
-                  </a:lnTo>
-                  <a:lnTo>
-                    <a:pt x="4368974" y="267285"/>
-                  </a:lnTo>
-                  <a:lnTo>
-                    <a:pt x="4297351" y="259306"/>
-                  </a:lnTo>
-                  <a:lnTo>
-                    <a:pt x="4225729" y="251232"/>
-                  </a:lnTo>
-                  <a:lnTo>
-                    <a:pt x="4154106" y="243060"/>
-                  </a:lnTo>
-                  <a:lnTo>
-                    <a:pt x="4082483" y="234790"/>
-                  </a:lnTo>
-                  <a:lnTo>
-                    <a:pt x="4010861" y="226421"/>
-                  </a:lnTo>
-                  <a:lnTo>
-                    <a:pt x="3939238" y="217952"/>
-                  </a:lnTo>
-                  <a:lnTo>
-                    <a:pt x="3867616" y="209380"/>
-                  </a:lnTo>
-                  <a:lnTo>
-                    <a:pt x="3795993" y="200706"/>
-                  </a:lnTo>
-                  <a:lnTo>
-                    <a:pt x="3724371" y="191927"/>
-                  </a:lnTo>
-                  <a:lnTo>
-                    <a:pt x="3652748" y="183043"/>
-                  </a:lnTo>
-                  <a:lnTo>
-                    <a:pt x="3581126" y="174052"/>
-                  </a:lnTo>
-                  <a:lnTo>
-                    <a:pt x="3509503" y="164953"/>
-                  </a:lnTo>
-                  <a:lnTo>
-                    <a:pt x="3437881" y="155744"/>
-                  </a:lnTo>
-                  <a:lnTo>
-                    <a:pt x="3366258" y="146425"/>
-                  </a:lnTo>
-                  <a:lnTo>
-                    <a:pt x="3294636" y="136994"/>
-                  </a:lnTo>
-                  <a:lnTo>
-                    <a:pt x="3223013" y="127450"/>
-                  </a:lnTo>
-                  <a:lnTo>
-                    <a:pt x="3151391" y="117791"/>
-                  </a:lnTo>
-                  <a:lnTo>
-                    <a:pt x="3079768" y="108015"/>
-                  </a:lnTo>
-                  <a:lnTo>
-                    <a:pt x="3008146" y="100882"/>
-                  </a:lnTo>
-                  <a:lnTo>
-                    <a:pt x="2936523" y="98612"/>
-                  </a:lnTo>
-                  <a:lnTo>
-                    <a:pt x="2864901" y="96335"/>
-                  </a:lnTo>
-                  <a:lnTo>
-                    <a:pt x="2793278" y="94053"/>
-                  </a:lnTo>
-                  <a:lnTo>
-                    <a:pt x="2721655" y="91764"/>
-                  </a:lnTo>
-                  <a:lnTo>
-                    <a:pt x="2650033" y="89469"/>
-                  </a:lnTo>
-                  <a:lnTo>
-                    <a:pt x="2578410" y="87168"/>
-                  </a:lnTo>
-                  <a:lnTo>
-                    <a:pt x="2506788" y="84861"/>
-                  </a:lnTo>
-                  <a:lnTo>
-                    <a:pt x="2435165" y="82547"/>
-                  </a:lnTo>
-                  <a:lnTo>
-                    <a:pt x="2363543" y="80227"/>
-                  </a:lnTo>
-                  <a:lnTo>
-                    <a:pt x="2291920" y="77901"/>
-                  </a:lnTo>
-                  <a:lnTo>
-                    <a:pt x="2220298" y="75568"/>
-                  </a:lnTo>
-                  <a:lnTo>
-                    <a:pt x="2148675" y="73229"/>
-                  </a:lnTo>
-                  <a:lnTo>
-                    <a:pt x="2077053" y="70883"/>
-                  </a:lnTo>
-                  <a:lnTo>
-                    <a:pt x="2005430" y="68531"/>
-                  </a:lnTo>
-                  <a:lnTo>
-                    <a:pt x="1933808" y="66173"/>
-                  </a:lnTo>
-                  <a:lnTo>
-                    <a:pt x="1862185" y="63808"/>
-                  </a:lnTo>
-                  <a:lnTo>
-                    <a:pt x="1790563" y="61436"/>
-                  </a:lnTo>
-                  <a:lnTo>
-                    <a:pt x="1718940" y="59059"/>
-                  </a:lnTo>
-                  <a:lnTo>
-                    <a:pt x="1647318" y="56674"/>
-                  </a:lnTo>
-                  <a:lnTo>
-                    <a:pt x="1575695" y="54284"/>
-                  </a:lnTo>
-                  <a:lnTo>
-                    <a:pt x="1504073" y="51886"/>
-                  </a:lnTo>
-                  <a:lnTo>
-                    <a:pt x="1432450" y="49482"/>
-                  </a:lnTo>
-                  <a:lnTo>
-                    <a:pt x="1360827" y="47072"/>
-                  </a:lnTo>
-                  <a:lnTo>
-                    <a:pt x="1289205" y="44655"/>
-                  </a:lnTo>
-                  <a:lnTo>
-                    <a:pt x="1217582" y="42231"/>
-                  </a:lnTo>
-                  <a:lnTo>
-                    <a:pt x="1145960" y="39801"/>
-                  </a:lnTo>
-                  <a:lnTo>
-                    <a:pt x="1074337" y="37364"/>
-                  </a:lnTo>
-                  <a:lnTo>
-                    <a:pt x="1002715" y="34920"/>
-                  </a:lnTo>
-                  <a:lnTo>
-                    <a:pt x="931092" y="32470"/>
-                  </a:lnTo>
-                  <a:lnTo>
-                    <a:pt x="859470" y="30013"/>
-                  </a:lnTo>
-                  <a:lnTo>
-                    <a:pt x="787847" y="27549"/>
-                  </a:lnTo>
-                  <a:lnTo>
-                    <a:pt x="716225" y="25079"/>
-                  </a:lnTo>
-                  <a:lnTo>
-                    <a:pt x="644602" y="22601"/>
-                  </a:lnTo>
-                  <a:lnTo>
-                    <a:pt x="572980" y="20117"/>
-                  </a:lnTo>
-                  <a:lnTo>
-                    <a:pt x="501357" y="17627"/>
-                  </a:lnTo>
-                  <a:lnTo>
-                    <a:pt x="429735" y="15129"/>
-                  </a:lnTo>
-                  <a:lnTo>
-                    <a:pt x="358112" y="12625"/>
-                  </a:lnTo>
-                  <a:lnTo>
-                    <a:pt x="286490" y="10113"/>
-                  </a:lnTo>
-                  <a:lnTo>
-                    <a:pt x="214867" y="7595"/>
-                  </a:lnTo>
-                  <a:lnTo>
-                    <a:pt x="143245" y="5070"/>
-                  </a:lnTo>
-                  <a:lnTo>
-                    <a:pt x="71622" y="2538"/>
-                  </a:lnTo>
-                  <a:lnTo>
-                    <a:pt x="0" y="0"/>
+                    <a:pt x="70344" y="5896"/>
+                  </a:lnTo>
+                  <a:lnTo>
+                    <a:pt x="140688" y="11722"/>
+                  </a:lnTo>
+                  <a:lnTo>
+                    <a:pt x="211033" y="17479"/>
+                  </a:lnTo>
+                  <a:lnTo>
+                    <a:pt x="281377" y="23168"/>
+                  </a:lnTo>
+                  <a:lnTo>
+                    <a:pt x="351722" y="28789"/>
+                  </a:lnTo>
+                  <a:lnTo>
+                    <a:pt x="422066" y="34344"/>
+                  </a:lnTo>
+                  <a:lnTo>
+                    <a:pt x="492411" y="39832"/>
+                  </a:lnTo>
+                  <a:lnTo>
+                    <a:pt x="562755" y="45255"/>
+                  </a:lnTo>
+                  <a:lnTo>
+                    <a:pt x="633100" y="50614"/>
+                  </a:lnTo>
+                  <a:lnTo>
+                    <a:pt x="703444" y="55910"/>
+                  </a:lnTo>
+                  <a:lnTo>
+                    <a:pt x="773789" y="61142"/>
+                  </a:lnTo>
+                  <a:lnTo>
+                    <a:pt x="844133" y="66312"/>
+                  </a:lnTo>
+                  <a:lnTo>
+                    <a:pt x="914478" y="71421"/>
+                  </a:lnTo>
+                  <a:lnTo>
+                    <a:pt x="984822" y="76469"/>
+                  </a:lnTo>
+                  <a:lnTo>
+                    <a:pt x="1055167" y="81457"/>
+                  </a:lnTo>
+                  <a:lnTo>
+                    <a:pt x="1125511" y="86386"/>
+                  </a:lnTo>
+                  <a:lnTo>
+                    <a:pt x="1195856" y="91257"/>
+                  </a:lnTo>
+                  <a:lnTo>
+                    <a:pt x="1266200" y="96070"/>
+                  </a:lnTo>
+                  <a:lnTo>
+                    <a:pt x="1336545" y="100825"/>
+                  </a:lnTo>
+                  <a:lnTo>
+                    <a:pt x="1406889" y="105524"/>
+                  </a:lnTo>
+                  <a:lnTo>
+                    <a:pt x="1477234" y="110167"/>
+                  </a:lnTo>
+                  <a:lnTo>
+                    <a:pt x="1547578" y="114755"/>
+                  </a:lnTo>
+                  <a:lnTo>
+                    <a:pt x="1617923" y="119289"/>
+                  </a:lnTo>
+                  <a:lnTo>
+                    <a:pt x="1688267" y="123769"/>
+                  </a:lnTo>
+                  <a:lnTo>
+                    <a:pt x="1758612" y="128195"/>
+                  </a:lnTo>
+                  <a:lnTo>
+                    <a:pt x="1828956" y="132569"/>
+                  </a:lnTo>
+                  <a:lnTo>
+                    <a:pt x="1899301" y="136891"/>
+                  </a:lnTo>
+                  <a:lnTo>
+                    <a:pt x="1969645" y="141162"/>
+                  </a:lnTo>
+                  <a:lnTo>
+                    <a:pt x="2039990" y="145382"/>
+                  </a:lnTo>
+                  <a:lnTo>
+                    <a:pt x="2110334" y="149552"/>
+                  </a:lnTo>
+                  <a:lnTo>
+                    <a:pt x="2180679" y="153672"/>
+                  </a:lnTo>
+                  <a:lnTo>
+                    <a:pt x="2251023" y="157743"/>
+                  </a:lnTo>
+                  <a:lnTo>
+                    <a:pt x="2321368" y="161766"/>
+                  </a:lnTo>
+                  <a:lnTo>
+                    <a:pt x="2391712" y="165742"/>
+                  </a:lnTo>
+                  <a:lnTo>
+                    <a:pt x="2462057" y="169670"/>
+                  </a:lnTo>
+                  <a:lnTo>
+                    <a:pt x="2532401" y="173551"/>
+                  </a:lnTo>
+                  <a:lnTo>
+                    <a:pt x="2602746" y="177386"/>
+                  </a:lnTo>
+                  <a:lnTo>
+                    <a:pt x="2673090" y="181176"/>
+                  </a:lnTo>
+                  <a:lnTo>
+                    <a:pt x="2743435" y="184921"/>
+                  </a:lnTo>
+                  <a:lnTo>
+                    <a:pt x="2813779" y="188621"/>
+                  </a:lnTo>
+                  <a:lnTo>
+                    <a:pt x="2884124" y="192278"/>
+                  </a:lnTo>
+                  <a:lnTo>
+                    <a:pt x="2954468" y="195891"/>
+                  </a:lnTo>
+                  <a:lnTo>
+                    <a:pt x="3024813" y="197703"/>
+                  </a:lnTo>
+                  <a:lnTo>
+                    <a:pt x="3095157" y="198518"/>
+                  </a:lnTo>
+                  <a:lnTo>
+                    <a:pt x="3165502" y="199330"/>
+                  </a:lnTo>
+                  <a:lnTo>
+                    <a:pt x="3235846" y="200141"/>
+                  </a:lnTo>
+                  <a:lnTo>
+                    <a:pt x="3306191" y="200949"/>
+                  </a:lnTo>
+                  <a:lnTo>
+                    <a:pt x="3376535" y="201755"/>
+                  </a:lnTo>
+                  <a:lnTo>
+                    <a:pt x="3446880" y="202558"/>
+                  </a:lnTo>
+                  <a:lnTo>
+                    <a:pt x="3517224" y="203360"/>
+                  </a:lnTo>
+                  <a:lnTo>
+                    <a:pt x="3587569" y="204159"/>
+                  </a:lnTo>
+                  <a:lnTo>
+                    <a:pt x="3657913" y="204956"/>
+                  </a:lnTo>
+                  <a:lnTo>
+                    <a:pt x="3728257" y="205751"/>
+                  </a:lnTo>
+                  <a:lnTo>
+                    <a:pt x="3798602" y="206544"/>
+                  </a:lnTo>
+                  <a:lnTo>
+                    <a:pt x="3868946" y="207335"/>
+                  </a:lnTo>
+                  <a:lnTo>
+                    <a:pt x="3939291" y="208123"/>
+                  </a:lnTo>
+                  <a:lnTo>
+                    <a:pt x="4009635" y="208909"/>
+                  </a:lnTo>
+                  <a:lnTo>
+                    <a:pt x="4079980" y="209693"/>
+                  </a:lnTo>
+                  <a:lnTo>
+                    <a:pt x="4150324" y="210475"/>
+                  </a:lnTo>
+                  <a:lnTo>
+                    <a:pt x="4220669" y="211255"/>
+                  </a:lnTo>
+                  <a:lnTo>
+                    <a:pt x="4291013" y="212033"/>
+                  </a:lnTo>
+                  <a:lnTo>
+                    <a:pt x="4361358" y="212809"/>
+                  </a:lnTo>
+                  <a:lnTo>
+                    <a:pt x="4431702" y="213582"/>
+                  </a:lnTo>
+                  <a:lnTo>
+                    <a:pt x="4502047" y="214354"/>
+                  </a:lnTo>
+                  <a:lnTo>
+                    <a:pt x="4572391" y="215123"/>
+                  </a:lnTo>
+                  <a:lnTo>
+                    <a:pt x="4642736" y="215890"/>
+                  </a:lnTo>
+                  <a:lnTo>
+                    <a:pt x="4713080" y="216655"/>
+                  </a:lnTo>
+                  <a:lnTo>
+                    <a:pt x="4783425" y="217418"/>
+                  </a:lnTo>
+                  <a:lnTo>
+                    <a:pt x="4853769" y="218179"/>
+                  </a:lnTo>
+                  <a:lnTo>
+                    <a:pt x="4924114" y="218938"/>
+                  </a:lnTo>
+                  <a:lnTo>
+                    <a:pt x="4994458" y="219695"/>
+                  </a:lnTo>
+                  <a:lnTo>
+                    <a:pt x="5064803" y="220450"/>
+                  </a:lnTo>
+                  <a:lnTo>
+                    <a:pt x="5135147" y="221203"/>
+                  </a:lnTo>
+                  <a:lnTo>
+                    <a:pt x="5205492" y="221953"/>
+                  </a:lnTo>
+                  <a:lnTo>
+                    <a:pt x="5275836" y="222702"/>
+                  </a:lnTo>
+                  <a:lnTo>
+                    <a:pt x="5346181" y="223448"/>
+                  </a:lnTo>
+                  <a:lnTo>
+                    <a:pt x="5416525" y="224193"/>
+                  </a:lnTo>
+                  <a:lnTo>
+                    <a:pt x="5486870" y="224935"/>
+                  </a:lnTo>
+                  <a:lnTo>
+                    <a:pt x="5557214" y="225676"/>
+                  </a:lnTo>
+                  <a:lnTo>
+                    <a:pt x="5627559" y="226414"/>
+                  </a:lnTo>
+                  <a:lnTo>
+                    <a:pt x="5697903" y="227151"/>
+                  </a:lnTo>
+                  <a:lnTo>
+                    <a:pt x="5768248" y="227885"/>
+                  </a:lnTo>
+                  <a:lnTo>
+                    <a:pt x="5838592" y="228618"/>
+                  </a:lnTo>
+                  <a:lnTo>
+                    <a:pt x="5908937" y="229348"/>
+                  </a:lnTo>
+                  <a:lnTo>
+                    <a:pt x="5979281" y="230076"/>
+                  </a:lnTo>
+                  <a:lnTo>
+                    <a:pt x="6049626" y="230803"/>
+                  </a:lnTo>
+                  <a:lnTo>
+                    <a:pt x="6119970" y="231527"/>
+                  </a:lnTo>
+                  <a:lnTo>
+                    <a:pt x="6190315" y="232250"/>
+                  </a:lnTo>
+                  <a:lnTo>
+                    <a:pt x="6260659" y="232970"/>
+                  </a:lnTo>
+                  <a:lnTo>
+                    <a:pt x="6331004" y="233689"/>
+                  </a:lnTo>
+                  <a:lnTo>
+                    <a:pt x="6401348" y="234406"/>
+                  </a:lnTo>
+                  <a:lnTo>
+                    <a:pt x="6471693" y="235120"/>
+                  </a:lnTo>
+                  <a:lnTo>
+                    <a:pt x="6542037" y="235833"/>
+                  </a:lnTo>
+                  <a:lnTo>
+                    <a:pt x="6612382" y="236544"/>
+                  </a:lnTo>
+                  <a:lnTo>
+                    <a:pt x="6682726" y="237252"/>
+                  </a:lnTo>
+                  <a:lnTo>
+                    <a:pt x="6753071" y="237959"/>
+                  </a:lnTo>
+                  <a:lnTo>
+                    <a:pt x="6823415" y="238664"/>
+                  </a:lnTo>
+                  <a:lnTo>
+                    <a:pt x="6893760" y="239367"/>
+                  </a:lnTo>
+                  <a:lnTo>
+                    <a:pt x="6964104" y="240068"/>
                   </a:lnTo>
                 </a:path>
               </a:pathLst>
@@ -4326,312 +4036,637 @@
           </p:nvSpPr>
           <p:spPr>
             <a:xfrm>
-              <a:off x="1172049" y="4425372"/>
-              <a:ext cx="7090630" cy="584503"/>
+              <a:off x="1235312" y="3064260"/>
+              <a:ext cx="6964104" cy="183877"/>
             </a:xfrm>
             <a:custGeom>
               <a:avLst/>
               <a:pathLst>
-                <a:path w="7090630" h="584503">
+                <a:path w="6964104" h="183877">
+                  <a:moveTo>
+                    <a:pt x="6964104" y="183877"/>
+                  </a:moveTo>
+                  <a:lnTo>
+                    <a:pt x="6893760" y="182049"/>
+                  </a:lnTo>
+                  <a:lnTo>
+                    <a:pt x="6823415" y="180198"/>
+                  </a:lnTo>
+                  <a:lnTo>
+                    <a:pt x="6753071" y="178325"/>
+                  </a:lnTo>
+                  <a:lnTo>
+                    <a:pt x="6682726" y="176430"/>
+                  </a:lnTo>
+                  <a:lnTo>
+                    <a:pt x="6612382" y="174512"/>
+                  </a:lnTo>
+                  <a:lnTo>
+                    <a:pt x="6542037" y="172571"/>
+                  </a:lnTo>
+                  <a:lnTo>
+                    <a:pt x="6471693" y="170606"/>
+                  </a:lnTo>
+                  <a:lnTo>
+                    <a:pt x="6401348" y="168618"/>
+                  </a:lnTo>
+                  <a:lnTo>
+                    <a:pt x="6331004" y="166606"/>
+                  </a:lnTo>
+                  <a:lnTo>
+                    <a:pt x="6260659" y="164570"/>
+                  </a:lnTo>
+                  <a:lnTo>
+                    <a:pt x="6190315" y="162509"/>
+                  </a:lnTo>
+                  <a:lnTo>
+                    <a:pt x="6119970" y="160424"/>
+                  </a:lnTo>
+                  <a:lnTo>
+                    <a:pt x="6049626" y="158313"/>
+                  </a:lnTo>
+                  <a:lnTo>
+                    <a:pt x="5979281" y="156177"/>
+                  </a:lnTo>
+                  <a:lnTo>
+                    <a:pt x="5908937" y="154016"/>
+                  </a:lnTo>
+                  <a:lnTo>
+                    <a:pt x="5838592" y="151828"/>
+                  </a:lnTo>
+                  <a:lnTo>
+                    <a:pt x="5768248" y="149614"/>
+                  </a:lnTo>
+                  <a:lnTo>
+                    <a:pt x="5697903" y="147374"/>
+                  </a:lnTo>
+                  <a:lnTo>
+                    <a:pt x="5627559" y="145107"/>
+                  </a:lnTo>
+                  <a:lnTo>
+                    <a:pt x="5557214" y="142812"/>
+                  </a:lnTo>
+                  <a:lnTo>
+                    <a:pt x="5486870" y="140490"/>
+                  </a:lnTo>
+                  <a:lnTo>
+                    <a:pt x="5416525" y="138140"/>
+                  </a:lnTo>
+                  <a:lnTo>
+                    <a:pt x="5346181" y="135761"/>
+                  </a:lnTo>
+                  <a:lnTo>
+                    <a:pt x="5275836" y="133354"/>
+                  </a:lnTo>
+                  <a:lnTo>
+                    <a:pt x="5205492" y="130919"/>
+                  </a:lnTo>
+                  <a:lnTo>
+                    <a:pt x="5135147" y="128454"/>
+                  </a:lnTo>
+                  <a:lnTo>
+                    <a:pt x="5064803" y="125959"/>
+                  </a:lnTo>
+                  <a:lnTo>
+                    <a:pt x="4994458" y="123434"/>
+                  </a:lnTo>
+                  <a:lnTo>
+                    <a:pt x="4924114" y="120879"/>
+                  </a:lnTo>
+                  <a:lnTo>
+                    <a:pt x="4853769" y="118293"/>
+                  </a:lnTo>
+                  <a:lnTo>
+                    <a:pt x="4783425" y="115676"/>
+                  </a:lnTo>
+                  <a:lnTo>
+                    <a:pt x="4713080" y="113028"/>
+                  </a:lnTo>
+                  <a:lnTo>
+                    <a:pt x="4642736" y="110348"/>
+                  </a:lnTo>
+                  <a:lnTo>
+                    <a:pt x="4572391" y="107636"/>
+                  </a:lnTo>
+                  <a:lnTo>
+                    <a:pt x="4502047" y="104891"/>
+                  </a:lnTo>
+                  <a:lnTo>
+                    <a:pt x="4431702" y="102113"/>
+                  </a:lnTo>
+                  <a:lnTo>
+                    <a:pt x="4361358" y="99302"/>
+                  </a:lnTo>
+                  <a:lnTo>
+                    <a:pt x="4291013" y="96456"/>
+                  </a:lnTo>
+                  <a:lnTo>
+                    <a:pt x="4220669" y="93577"/>
+                  </a:lnTo>
+                  <a:lnTo>
+                    <a:pt x="4150324" y="90663"/>
+                  </a:lnTo>
+                  <a:lnTo>
+                    <a:pt x="4079980" y="87714"/>
+                  </a:lnTo>
+                  <a:lnTo>
+                    <a:pt x="4009635" y="84730"/>
+                  </a:lnTo>
+                  <a:lnTo>
+                    <a:pt x="3939291" y="81710"/>
+                  </a:lnTo>
+                  <a:lnTo>
+                    <a:pt x="3868946" y="78653"/>
+                  </a:lnTo>
+                  <a:lnTo>
+                    <a:pt x="3798602" y="75560"/>
+                  </a:lnTo>
+                  <a:lnTo>
+                    <a:pt x="3728257" y="72430"/>
+                  </a:lnTo>
+                  <a:lnTo>
+                    <a:pt x="3657913" y="69262"/>
+                  </a:lnTo>
+                  <a:lnTo>
+                    <a:pt x="3587569" y="66056"/>
+                  </a:lnTo>
+                  <a:lnTo>
+                    <a:pt x="3517224" y="62811"/>
+                  </a:lnTo>
+                  <a:lnTo>
+                    <a:pt x="3446880" y="59527"/>
+                  </a:lnTo>
+                  <a:lnTo>
+                    <a:pt x="3376535" y="56204"/>
+                  </a:lnTo>
+                  <a:lnTo>
+                    <a:pt x="3306191" y="52841"/>
+                  </a:lnTo>
+                  <a:lnTo>
+                    <a:pt x="3235846" y="49438"/>
+                  </a:lnTo>
+                  <a:lnTo>
+                    <a:pt x="3165502" y="45993"/>
+                  </a:lnTo>
+                  <a:lnTo>
+                    <a:pt x="3095157" y="42508"/>
+                  </a:lnTo>
+                  <a:lnTo>
+                    <a:pt x="3024813" y="38980"/>
+                  </a:lnTo>
+                  <a:lnTo>
+                    <a:pt x="2954468" y="36405"/>
+                  </a:lnTo>
+                  <a:lnTo>
+                    <a:pt x="2884124" y="35586"/>
+                  </a:lnTo>
+                  <a:lnTo>
+                    <a:pt x="2813779" y="34765"/>
+                  </a:lnTo>
+                  <a:lnTo>
+                    <a:pt x="2743435" y="33941"/>
+                  </a:lnTo>
+                  <a:lnTo>
+                    <a:pt x="2673090" y="33115"/>
+                  </a:lnTo>
+                  <a:lnTo>
+                    <a:pt x="2602746" y="32287"/>
+                  </a:lnTo>
+                  <a:lnTo>
+                    <a:pt x="2532401" y="31457"/>
+                  </a:lnTo>
+                  <a:lnTo>
+                    <a:pt x="2462057" y="30624"/>
+                  </a:lnTo>
+                  <a:lnTo>
+                    <a:pt x="2391712" y="29789"/>
+                  </a:lnTo>
+                  <a:lnTo>
+                    <a:pt x="2321368" y="28952"/>
+                  </a:lnTo>
+                  <a:lnTo>
+                    <a:pt x="2251023" y="28112"/>
+                  </a:lnTo>
+                  <a:lnTo>
+                    <a:pt x="2180679" y="27270"/>
+                  </a:lnTo>
+                  <a:lnTo>
+                    <a:pt x="2110334" y="26426"/>
+                  </a:lnTo>
+                  <a:lnTo>
+                    <a:pt x="2039990" y="25580"/>
+                  </a:lnTo>
+                  <a:lnTo>
+                    <a:pt x="1969645" y="24731"/>
+                  </a:lnTo>
+                  <a:lnTo>
+                    <a:pt x="1899301" y="23880"/>
+                  </a:lnTo>
+                  <a:lnTo>
+                    <a:pt x="1828956" y="23026"/>
+                  </a:lnTo>
+                  <a:lnTo>
+                    <a:pt x="1758612" y="22171"/>
+                  </a:lnTo>
+                  <a:lnTo>
+                    <a:pt x="1688267" y="21313"/>
+                  </a:lnTo>
+                  <a:lnTo>
+                    <a:pt x="1617923" y="20452"/>
+                  </a:lnTo>
+                  <a:lnTo>
+                    <a:pt x="1547578" y="19589"/>
+                  </a:lnTo>
+                  <a:lnTo>
+                    <a:pt x="1477234" y="18724"/>
+                  </a:lnTo>
+                  <a:lnTo>
+                    <a:pt x="1406889" y="17857"/>
+                  </a:lnTo>
+                  <a:lnTo>
+                    <a:pt x="1336545" y="16987"/>
+                  </a:lnTo>
+                  <a:lnTo>
+                    <a:pt x="1266200" y="16114"/>
+                  </a:lnTo>
+                  <a:lnTo>
+                    <a:pt x="1195856" y="15240"/>
+                  </a:lnTo>
+                  <a:lnTo>
+                    <a:pt x="1125511" y="14363"/>
+                  </a:lnTo>
+                  <a:lnTo>
+                    <a:pt x="1055167" y="13483"/>
+                  </a:lnTo>
+                  <a:lnTo>
+                    <a:pt x="984822" y="12602"/>
+                  </a:lnTo>
+                  <a:lnTo>
+                    <a:pt x="914478" y="11717"/>
+                  </a:lnTo>
+                  <a:lnTo>
+                    <a:pt x="844133" y="10831"/>
+                  </a:lnTo>
+                  <a:lnTo>
+                    <a:pt x="773789" y="9941"/>
+                  </a:lnTo>
+                  <a:lnTo>
+                    <a:pt x="703444" y="9050"/>
+                  </a:lnTo>
+                  <a:lnTo>
+                    <a:pt x="633100" y="8156"/>
+                  </a:lnTo>
+                  <a:lnTo>
+                    <a:pt x="562755" y="7260"/>
+                  </a:lnTo>
+                  <a:lnTo>
+                    <a:pt x="492411" y="6361"/>
+                  </a:lnTo>
+                  <a:lnTo>
+                    <a:pt x="422066" y="5459"/>
+                  </a:lnTo>
+                  <a:lnTo>
+                    <a:pt x="351722" y="4556"/>
+                  </a:lnTo>
+                  <a:lnTo>
+                    <a:pt x="281377" y="3649"/>
+                  </a:lnTo>
+                  <a:lnTo>
+                    <a:pt x="211033" y="2741"/>
+                  </a:lnTo>
+                  <a:lnTo>
+                    <a:pt x="140688" y="1829"/>
+                  </a:lnTo>
+                  <a:lnTo>
+                    <a:pt x="70344" y="916"/>
+                  </a:lnTo>
+                  <a:lnTo>
+                    <a:pt x="0" y="0"/>
+                  </a:lnTo>
+                </a:path>
+              </a:pathLst>
+            </a:custGeom>
+          </p:spPr>
+          <p:txBody>
+            <a:bodyPr/>
+            <a:lstStyle/>
+            <a:p/>
+          </p:txBody>
+        </p:sp>
+        <p:sp>
+          <p:nvSpPr>
+            <p:cNvPr id="26" name="pl26"/>
+            <p:cNvSpPr/>
+            <p:nvPr/>
+          </p:nvSpPr>
+          <p:spPr>
+            <a:xfrm>
+              <a:off x="1235312" y="2991826"/>
+              <a:ext cx="6964104" cy="210933"/>
+            </a:xfrm>
+            <a:custGeom>
+              <a:avLst/>
+              <a:pathLst>
+                <a:path w="6964104" h="210933">
                   <a:moveTo>
                     <a:pt x="0" y="0"/>
                   </a:moveTo>
                   <a:lnTo>
-                    <a:pt x="71622" y="8275"/>
-                  </a:lnTo>
-                  <a:lnTo>
-                    <a:pt x="143245" y="16490"/>
-                  </a:lnTo>
-                  <a:lnTo>
-                    <a:pt x="214867" y="24646"/>
-                  </a:lnTo>
-                  <a:lnTo>
-                    <a:pt x="286490" y="32741"/>
-                  </a:lnTo>
-                  <a:lnTo>
-                    <a:pt x="358112" y="40778"/>
-                  </a:lnTo>
-                  <a:lnTo>
-                    <a:pt x="429735" y="48755"/>
-                  </a:lnTo>
-                  <a:lnTo>
-                    <a:pt x="501357" y="56674"/>
-                  </a:lnTo>
-                  <a:lnTo>
-                    <a:pt x="572980" y="64536"/>
-                  </a:lnTo>
-                  <a:lnTo>
-                    <a:pt x="644602" y="72340"/>
-                  </a:lnTo>
-                  <a:lnTo>
-                    <a:pt x="716225" y="80087"/>
-                  </a:lnTo>
-                  <a:lnTo>
-                    <a:pt x="787847" y="87777"/>
-                  </a:lnTo>
-                  <a:lnTo>
-                    <a:pt x="859470" y="95411"/>
-                  </a:lnTo>
-                  <a:lnTo>
-                    <a:pt x="931092" y="102989"/>
-                  </a:lnTo>
-                  <a:lnTo>
-                    <a:pt x="1002715" y="110512"/>
-                  </a:lnTo>
-                  <a:lnTo>
-                    <a:pt x="1074337" y="117979"/>
-                  </a:lnTo>
-                  <a:lnTo>
-                    <a:pt x="1145960" y="125392"/>
-                  </a:lnTo>
-                  <a:lnTo>
-                    <a:pt x="1217582" y="132751"/>
-                  </a:lnTo>
-                  <a:lnTo>
-                    <a:pt x="1289205" y="140057"/>
-                  </a:lnTo>
-                  <a:lnTo>
-                    <a:pt x="1360827" y="147308"/>
-                  </a:lnTo>
-                  <a:lnTo>
-                    <a:pt x="1432450" y="154507"/>
-                  </a:lnTo>
-                  <a:lnTo>
-                    <a:pt x="1504073" y="161653"/>
-                  </a:lnTo>
-                  <a:lnTo>
-                    <a:pt x="1575695" y="168747"/>
-                  </a:lnTo>
-                  <a:lnTo>
-                    <a:pt x="1647318" y="175789"/>
-                  </a:lnTo>
-                  <a:lnTo>
-                    <a:pt x="1718940" y="182779"/>
-                  </a:lnTo>
-                  <a:lnTo>
-                    <a:pt x="1790563" y="189719"/>
-                  </a:lnTo>
-                  <a:lnTo>
-                    <a:pt x="1862185" y="196607"/>
-                  </a:lnTo>
-                  <a:lnTo>
-                    <a:pt x="1933808" y="203445"/>
-                  </a:lnTo>
-                  <a:lnTo>
-                    <a:pt x="2005430" y="210234"/>
-                  </a:lnTo>
-                  <a:lnTo>
-                    <a:pt x="2077053" y="216972"/>
-                  </a:lnTo>
-                  <a:lnTo>
-                    <a:pt x="2148675" y="223662"/>
-                  </a:lnTo>
-                  <a:lnTo>
-                    <a:pt x="2220298" y="230302"/>
-                  </a:lnTo>
-                  <a:lnTo>
-                    <a:pt x="2291920" y="236894"/>
-                  </a:lnTo>
-                  <a:lnTo>
-                    <a:pt x="2363543" y="243438"/>
-                  </a:lnTo>
-                  <a:lnTo>
-                    <a:pt x="2435165" y="249933"/>
-                  </a:lnTo>
-                  <a:lnTo>
-                    <a:pt x="2506788" y="256382"/>
-                  </a:lnTo>
-                  <a:lnTo>
-                    <a:pt x="2578410" y="262783"/>
-                  </a:lnTo>
-                  <a:lnTo>
-                    <a:pt x="2650033" y="269137"/>
-                  </a:lnTo>
-                  <a:lnTo>
-                    <a:pt x="2721655" y="275445"/>
-                  </a:lnTo>
-                  <a:lnTo>
-                    <a:pt x="2793278" y="281707"/>
-                  </a:lnTo>
-                  <a:lnTo>
-                    <a:pt x="2864901" y="287923"/>
-                  </a:lnTo>
-                  <a:lnTo>
-                    <a:pt x="2936523" y="294094"/>
-                  </a:lnTo>
-                  <a:lnTo>
-                    <a:pt x="3008146" y="300219"/>
-                  </a:lnTo>
-                  <a:lnTo>
-                    <a:pt x="3079768" y="306300"/>
-                  </a:lnTo>
-                  <a:lnTo>
-                    <a:pt x="3151391" y="312336"/>
-                  </a:lnTo>
-                  <a:lnTo>
-                    <a:pt x="3223013" y="318328"/>
-                  </a:lnTo>
-                  <a:lnTo>
-                    <a:pt x="3294636" y="324277"/>
-                  </a:lnTo>
-                  <a:lnTo>
-                    <a:pt x="3366258" y="330181"/>
-                  </a:lnTo>
-                  <a:lnTo>
-                    <a:pt x="3437881" y="336043"/>
-                  </a:lnTo>
-                  <a:lnTo>
-                    <a:pt x="3509503" y="341862"/>
-                  </a:lnTo>
-                  <a:lnTo>
-                    <a:pt x="3581126" y="347638"/>
-                  </a:lnTo>
-                  <a:lnTo>
-                    <a:pt x="3652748" y="353372"/>
-                  </a:lnTo>
-                  <a:lnTo>
-                    <a:pt x="3724371" y="359064"/>
-                  </a:lnTo>
-                  <a:lnTo>
-                    <a:pt x="3795993" y="364714"/>
-                  </a:lnTo>
-                  <a:lnTo>
-                    <a:pt x="3867616" y="370324"/>
-                  </a:lnTo>
-                  <a:lnTo>
-                    <a:pt x="3939238" y="375892"/>
-                  </a:lnTo>
-                  <a:lnTo>
-                    <a:pt x="4010861" y="381419"/>
-                  </a:lnTo>
-                  <a:lnTo>
-                    <a:pt x="4082483" y="386906"/>
-                  </a:lnTo>
-                  <a:lnTo>
-                    <a:pt x="4154106" y="392353"/>
-                  </a:lnTo>
-                  <a:lnTo>
-                    <a:pt x="4225729" y="397760"/>
-                  </a:lnTo>
-                  <a:lnTo>
-                    <a:pt x="4297351" y="403127"/>
-                  </a:lnTo>
-                  <a:lnTo>
-                    <a:pt x="4368974" y="408456"/>
-                  </a:lnTo>
-                  <a:lnTo>
-                    <a:pt x="4440596" y="413745"/>
-                  </a:lnTo>
-                  <a:lnTo>
-                    <a:pt x="4512219" y="418996"/>
-                  </a:lnTo>
-                  <a:lnTo>
-                    <a:pt x="4583841" y="424208"/>
-                  </a:lnTo>
-                  <a:lnTo>
-                    <a:pt x="4655464" y="429382"/>
-                  </a:lnTo>
-                  <a:lnTo>
-                    <a:pt x="4727086" y="434518"/>
-                  </a:lnTo>
-                  <a:lnTo>
-                    <a:pt x="4798709" y="439617"/>
-                  </a:lnTo>
-                  <a:lnTo>
-                    <a:pt x="4870331" y="444679"/>
-                  </a:lnTo>
-                  <a:lnTo>
-                    <a:pt x="4941954" y="449703"/>
-                  </a:lnTo>
-                  <a:lnTo>
-                    <a:pt x="5013576" y="454691"/>
-                  </a:lnTo>
-                  <a:lnTo>
-                    <a:pt x="5085199" y="459642"/>
-                  </a:lnTo>
-                  <a:lnTo>
-                    <a:pt x="5156821" y="464557"/>
-                  </a:lnTo>
-                  <a:lnTo>
-                    <a:pt x="5228444" y="469436"/>
-                  </a:lnTo>
-                  <a:lnTo>
-                    <a:pt x="5300066" y="474280"/>
-                  </a:lnTo>
-                  <a:lnTo>
-                    <a:pt x="5371689" y="479088"/>
-                  </a:lnTo>
-                  <a:lnTo>
-                    <a:pt x="5443311" y="483861"/>
-                  </a:lnTo>
-                  <a:lnTo>
-                    <a:pt x="5514934" y="488599"/>
-                  </a:lnTo>
-                  <a:lnTo>
-                    <a:pt x="5586557" y="493302"/>
-                  </a:lnTo>
-                  <a:lnTo>
-                    <a:pt x="5658179" y="497971"/>
-                  </a:lnTo>
-                  <a:lnTo>
-                    <a:pt x="5729802" y="502606"/>
-                  </a:lnTo>
-                  <a:lnTo>
-                    <a:pt x="5801424" y="507207"/>
-                  </a:lnTo>
-                  <a:lnTo>
-                    <a:pt x="5873047" y="511774"/>
-                  </a:lnTo>
-                  <a:lnTo>
-                    <a:pt x="5944669" y="516308"/>
-                  </a:lnTo>
-                  <a:lnTo>
-                    <a:pt x="6016292" y="520809"/>
-                  </a:lnTo>
-                  <a:lnTo>
-                    <a:pt x="6087914" y="525276"/>
-                  </a:lnTo>
-                  <a:lnTo>
-                    <a:pt x="6159537" y="529712"/>
-                  </a:lnTo>
-                  <a:lnTo>
-                    <a:pt x="6231159" y="534114"/>
-                  </a:lnTo>
-                  <a:lnTo>
-                    <a:pt x="6302782" y="538485"/>
-                  </a:lnTo>
-                  <a:lnTo>
-                    <a:pt x="6374404" y="542823"/>
-                  </a:lnTo>
-                  <a:lnTo>
-                    <a:pt x="6446027" y="547130"/>
-                  </a:lnTo>
-                  <a:lnTo>
-                    <a:pt x="6517649" y="551406"/>
-                  </a:lnTo>
-                  <a:lnTo>
-                    <a:pt x="6589272" y="555650"/>
-                  </a:lnTo>
-                  <a:lnTo>
-                    <a:pt x="6660894" y="559863"/>
-                  </a:lnTo>
-                  <a:lnTo>
-                    <a:pt x="6732517" y="564045"/>
-                  </a:lnTo>
-                  <a:lnTo>
-                    <a:pt x="6804139" y="568197"/>
-                  </a:lnTo>
-                  <a:lnTo>
-                    <a:pt x="6875762" y="572318"/>
-                  </a:lnTo>
-                  <a:lnTo>
-                    <a:pt x="6947385" y="576410"/>
-                  </a:lnTo>
-                  <a:lnTo>
-                    <a:pt x="7019007" y="580471"/>
-                  </a:lnTo>
-                  <a:lnTo>
-                    <a:pt x="7090630" y="584503"/>
+                    <a:pt x="70344" y="2986"/>
+                  </a:lnTo>
+                  <a:lnTo>
+                    <a:pt x="140688" y="5951"/>
+                  </a:lnTo>
+                  <a:lnTo>
+                    <a:pt x="211033" y="8894"/>
+                  </a:lnTo>
+                  <a:lnTo>
+                    <a:pt x="281377" y="11815"/>
+                  </a:lnTo>
+                  <a:lnTo>
+                    <a:pt x="351722" y="14715"/>
+                  </a:lnTo>
+                  <a:lnTo>
+                    <a:pt x="422066" y="17594"/>
+                  </a:lnTo>
+                  <a:lnTo>
+                    <a:pt x="492411" y="20452"/>
+                  </a:lnTo>
+                  <a:lnTo>
+                    <a:pt x="562755" y="23289"/>
+                  </a:lnTo>
+                  <a:lnTo>
+                    <a:pt x="633100" y="26105"/>
+                  </a:lnTo>
+                  <a:lnTo>
+                    <a:pt x="703444" y="28901"/>
+                  </a:lnTo>
+                  <a:lnTo>
+                    <a:pt x="773789" y="31676"/>
+                  </a:lnTo>
+                  <a:lnTo>
+                    <a:pt x="844133" y="34431"/>
+                  </a:lnTo>
+                  <a:lnTo>
+                    <a:pt x="914478" y="37166"/>
+                  </a:lnTo>
+                  <a:lnTo>
+                    <a:pt x="984822" y="39881"/>
+                  </a:lnTo>
+                  <a:lnTo>
+                    <a:pt x="1055167" y="42576"/>
+                  </a:lnTo>
+                  <a:lnTo>
+                    <a:pt x="1125511" y="45251"/>
+                  </a:lnTo>
+                  <a:lnTo>
+                    <a:pt x="1195856" y="47907"/>
+                  </a:lnTo>
+                  <a:lnTo>
+                    <a:pt x="1266200" y="50543"/>
+                  </a:lnTo>
+                  <a:lnTo>
+                    <a:pt x="1336545" y="53160"/>
+                  </a:lnTo>
+                  <a:lnTo>
+                    <a:pt x="1406889" y="55758"/>
+                  </a:lnTo>
+                  <a:lnTo>
+                    <a:pt x="1477234" y="58336"/>
+                  </a:lnTo>
+                  <a:lnTo>
+                    <a:pt x="1547578" y="60896"/>
+                  </a:lnTo>
+                  <a:lnTo>
+                    <a:pt x="1617923" y="63438"/>
+                  </a:lnTo>
+                  <a:lnTo>
+                    <a:pt x="1688267" y="65960"/>
+                  </a:lnTo>
+                  <a:lnTo>
+                    <a:pt x="1758612" y="68465"/>
+                  </a:lnTo>
+                  <a:lnTo>
+                    <a:pt x="1828956" y="70951"/>
+                  </a:lnTo>
+                  <a:lnTo>
+                    <a:pt x="1899301" y="73418"/>
+                  </a:lnTo>
+                  <a:lnTo>
+                    <a:pt x="1969645" y="75868"/>
+                  </a:lnTo>
+                  <a:lnTo>
+                    <a:pt x="2039990" y="78300"/>
+                  </a:lnTo>
+                  <a:lnTo>
+                    <a:pt x="2110334" y="80714"/>
+                  </a:lnTo>
+                  <a:lnTo>
+                    <a:pt x="2180679" y="83110"/>
+                  </a:lnTo>
+                  <a:lnTo>
+                    <a:pt x="2251023" y="85489"/>
+                  </a:lnTo>
+                  <a:lnTo>
+                    <a:pt x="2321368" y="87851"/>
+                  </a:lnTo>
+                  <a:lnTo>
+                    <a:pt x="2391712" y="90195"/>
+                  </a:lnTo>
+                  <a:lnTo>
+                    <a:pt x="2462057" y="92522"/>
+                  </a:lnTo>
+                  <a:lnTo>
+                    <a:pt x="2532401" y="94832"/>
+                  </a:lnTo>
+                  <a:lnTo>
+                    <a:pt x="2602746" y="97125"/>
+                  </a:lnTo>
+                  <a:lnTo>
+                    <a:pt x="2673090" y="99401"/>
+                  </a:lnTo>
+                  <a:lnTo>
+                    <a:pt x="2743435" y="101661"/>
+                  </a:lnTo>
+                  <a:lnTo>
+                    <a:pt x="2813779" y="103904"/>
+                  </a:lnTo>
+                  <a:lnTo>
+                    <a:pt x="2884124" y="106131"/>
+                  </a:lnTo>
+                  <a:lnTo>
+                    <a:pt x="2954468" y="108342"/>
+                  </a:lnTo>
+                  <a:lnTo>
+                    <a:pt x="3024813" y="110536"/>
+                  </a:lnTo>
+                  <a:lnTo>
+                    <a:pt x="3095157" y="112714"/>
+                  </a:lnTo>
+                  <a:lnTo>
+                    <a:pt x="3165502" y="114877"/>
+                  </a:lnTo>
+                  <a:lnTo>
+                    <a:pt x="3235846" y="117023"/>
+                  </a:lnTo>
+                  <a:lnTo>
+                    <a:pt x="3306191" y="119154"/>
+                  </a:lnTo>
+                  <a:lnTo>
+                    <a:pt x="3376535" y="121270"/>
+                  </a:lnTo>
+                  <a:lnTo>
+                    <a:pt x="3446880" y="123370"/>
+                  </a:lnTo>
+                  <a:lnTo>
+                    <a:pt x="3517224" y="125454"/>
+                  </a:lnTo>
+                  <a:lnTo>
+                    <a:pt x="3587569" y="127523"/>
+                  </a:lnTo>
+                  <a:lnTo>
+                    <a:pt x="3657913" y="129577"/>
+                  </a:lnTo>
+                  <a:lnTo>
+                    <a:pt x="3728257" y="131617"/>
+                  </a:lnTo>
+                  <a:lnTo>
+                    <a:pt x="3798602" y="133641"/>
+                  </a:lnTo>
+                  <a:lnTo>
+                    <a:pt x="3868946" y="135650"/>
+                  </a:lnTo>
+                  <a:lnTo>
+                    <a:pt x="3939291" y="137645"/>
+                  </a:lnTo>
+                  <a:lnTo>
+                    <a:pt x="4009635" y="139625"/>
+                  </a:lnTo>
+                  <a:lnTo>
+                    <a:pt x="4079980" y="141591"/>
+                  </a:lnTo>
+                  <a:lnTo>
+                    <a:pt x="4150324" y="143542"/>
+                  </a:lnTo>
+                  <a:lnTo>
+                    <a:pt x="4220669" y="145479"/>
+                  </a:lnTo>
+                  <a:lnTo>
+                    <a:pt x="4291013" y="147402"/>
+                  </a:lnTo>
+                  <a:lnTo>
+                    <a:pt x="4361358" y="149311"/>
+                  </a:lnTo>
+                  <a:lnTo>
+                    <a:pt x="4431702" y="151205"/>
+                  </a:lnTo>
+                  <a:lnTo>
+                    <a:pt x="4502047" y="153086"/>
+                  </a:lnTo>
+                  <a:lnTo>
+                    <a:pt x="4572391" y="154954"/>
+                  </a:lnTo>
+                  <a:lnTo>
+                    <a:pt x="4642736" y="156807"/>
+                  </a:lnTo>
+                  <a:lnTo>
+                    <a:pt x="4713080" y="158647"/>
+                  </a:lnTo>
+                  <a:lnTo>
+                    <a:pt x="4783425" y="160474"/>
+                  </a:lnTo>
+                  <a:lnTo>
+                    <a:pt x="4853769" y="162287"/>
+                  </a:lnTo>
+                  <a:lnTo>
+                    <a:pt x="4924114" y="164087"/>
+                  </a:lnTo>
+                  <a:lnTo>
+                    <a:pt x="4994458" y="165874"/>
+                  </a:lnTo>
+                  <a:lnTo>
+                    <a:pt x="5064803" y="167647"/>
+                  </a:lnTo>
+                  <a:lnTo>
+                    <a:pt x="5135147" y="169408"/>
+                  </a:lnTo>
+                  <a:lnTo>
+                    <a:pt x="5205492" y="171156"/>
+                  </a:lnTo>
+                  <a:lnTo>
+                    <a:pt x="5275836" y="172891"/>
+                  </a:lnTo>
+                  <a:lnTo>
+                    <a:pt x="5346181" y="174614"/>
+                  </a:lnTo>
+                  <a:lnTo>
+                    <a:pt x="5416525" y="176323"/>
+                  </a:lnTo>
+                  <a:lnTo>
+                    <a:pt x="5486870" y="178021"/>
+                  </a:lnTo>
+                  <a:lnTo>
+                    <a:pt x="5557214" y="179706"/>
+                  </a:lnTo>
+                  <a:lnTo>
+                    <a:pt x="5627559" y="181378"/>
+                  </a:lnTo>
+                  <a:lnTo>
+                    <a:pt x="5697903" y="183039"/>
+                  </a:lnTo>
+                  <a:lnTo>
+                    <a:pt x="5768248" y="184687"/>
+                  </a:lnTo>
+                  <a:lnTo>
+                    <a:pt x="5838592" y="186323"/>
+                  </a:lnTo>
+                  <a:lnTo>
+                    <a:pt x="5908937" y="187947"/>
+                  </a:lnTo>
+                  <a:lnTo>
+                    <a:pt x="5979281" y="189560"/>
+                  </a:lnTo>
+                  <a:lnTo>
+                    <a:pt x="6049626" y="191160"/>
+                  </a:lnTo>
+                  <a:lnTo>
+                    <a:pt x="6119970" y="192749"/>
+                  </a:lnTo>
+                  <a:lnTo>
+                    <a:pt x="6190315" y="194326"/>
+                  </a:lnTo>
+                  <a:lnTo>
+                    <a:pt x="6260659" y="195892"/>
+                  </a:lnTo>
+                  <a:lnTo>
+                    <a:pt x="6331004" y="197446"/>
+                  </a:lnTo>
+                  <a:lnTo>
+                    <a:pt x="6401348" y="198989"/>
+                  </a:lnTo>
+                  <a:lnTo>
+                    <a:pt x="6471693" y="200521"/>
+                  </a:lnTo>
+                  <a:lnTo>
+                    <a:pt x="6542037" y="202041"/>
+                  </a:lnTo>
+                  <a:lnTo>
+                    <a:pt x="6612382" y="203550"/>
+                  </a:lnTo>
+                  <a:lnTo>
+                    <a:pt x="6682726" y="205049"/>
+                  </a:lnTo>
+                  <a:lnTo>
+                    <a:pt x="6753071" y="206536"/>
+                  </a:lnTo>
+                  <a:lnTo>
+                    <a:pt x="6823415" y="208012"/>
+                  </a:lnTo>
+                  <a:lnTo>
+                    <a:pt x="6893760" y="209478"/>
+                  </a:lnTo>
+                  <a:lnTo>
+                    <a:pt x="6964104" y="210933"/>
                   </a:lnTo>
                 </a:path>
               </a:pathLst>
@@ -4654,27 +4689,27 @@
         </p:sp>
         <p:sp>
           <p:nvSpPr>
-            <p:cNvPr id="26" name="pl26"/>
+            <p:cNvPr id="27" name="pl27"/>
             <p:cNvSpPr/>
             <p:nvPr/>
           </p:nvSpPr>
           <p:spPr>
             <a:xfrm>
-              <a:off x="817517" y="4727786"/>
-              <a:ext cx="7799693" cy="0"/>
+              <a:off x="887106" y="3100960"/>
+              <a:ext cx="7660515" cy="0"/>
             </a:xfrm>
             <a:custGeom>
               <a:avLst/>
               <a:pathLst>
-                <a:path w="7799693" h="0">
+                <a:path w="7660515" h="0">
                   <a:moveTo>
                     <a:pt x="0" y="0"/>
                   </a:moveTo>
                   <a:lnTo>
-                    <a:pt x="7799693" y="0"/>
-                  </a:lnTo>
-                  <a:lnTo>
-                    <a:pt x="7799693" y="0"/>
+                    <a:pt x="7660515" y="0"/>
+                  </a:lnTo>
+                  <a:lnTo>
+                    <a:pt x="7660515" y="0"/>
                   </a:lnTo>
                 </a:path>
               </a:pathLst>
@@ -4697,21 +4732,21 @@
         </p:sp>
         <p:sp>
           <p:nvSpPr>
-            <p:cNvPr id="27" name="pl27"/>
+            <p:cNvPr id="28" name="pl28"/>
             <p:cNvSpPr/>
             <p:nvPr/>
           </p:nvSpPr>
           <p:spPr>
             <a:xfrm>
-              <a:off x="4205975" y="2073503"/>
-              <a:ext cx="0" cy="3649639"/>
+              <a:off x="4215100" y="2143092"/>
+              <a:ext cx="0" cy="1317069"/>
             </a:xfrm>
             <a:custGeom>
               <a:avLst/>
               <a:pathLst>
-                <a:path w="0" h="3649639">
+                <a:path w="0" h="1317069">
                   <a:moveTo>
-                    <a:pt x="0" y="3649639"/>
+                    <a:pt x="0" y="1317069"/>
                   </a:moveTo>
                   <a:lnTo>
                     <a:pt x="0" y="0"/>
@@ -4740,21 +4775,21 @@
         </p:sp>
         <p:sp>
           <p:nvSpPr>
-            <p:cNvPr id="28" name="pl28"/>
+            <p:cNvPr id="29" name="pl29"/>
             <p:cNvSpPr/>
             <p:nvPr/>
           </p:nvSpPr>
           <p:spPr>
             <a:xfrm>
-              <a:off x="3016442" y="2073503"/>
-              <a:ext cx="0" cy="3649639"/>
+              <a:off x="3046793" y="2143092"/>
+              <a:ext cx="0" cy="1317069"/>
             </a:xfrm>
             <a:custGeom>
               <a:avLst/>
               <a:pathLst>
-                <a:path w="0" h="3649639">
+                <a:path w="0" h="1317069">
                   <a:moveTo>
-                    <a:pt x="0" y="3649639"/>
+                    <a:pt x="0" y="1317069"/>
                   </a:moveTo>
                   <a:lnTo>
                     <a:pt x="0" y="0"/>
@@ -4783,21 +4818,21 @@
         </p:sp>
         <p:sp>
           <p:nvSpPr>
-            <p:cNvPr id="29" name="pl29"/>
+            <p:cNvPr id="30" name="pl30"/>
             <p:cNvSpPr/>
             <p:nvPr/>
           </p:nvSpPr>
           <p:spPr>
             <a:xfrm>
-              <a:off x="5421760" y="2073503"/>
-              <a:ext cx="0" cy="3649639"/>
+              <a:off x="5409191" y="2143092"/>
+              <a:ext cx="0" cy="1317069"/>
             </a:xfrm>
             <a:custGeom>
               <a:avLst/>
               <a:pathLst>
-                <a:path w="0" h="3649639">
+                <a:path w="0" h="1317069">
                   <a:moveTo>
-                    <a:pt x="0" y="3649639"/>
+                    <a:pt x="0" y="1317069"/>
                   </a:moveTo>
                   <a:lnTo>
                     <a:pt x="0" y="0"/>
@@ -4826,13 +4861,13 @@
         </p:sp>
         <p:sp>
           <p:nvSpPr>
-            <p:cNvPr id="30" name="tx30"/>
+            <p:cNvPr id="31" name="tx31"/>
             <p:cNvSpPr/>
             <p:nvPr/>
           </p:nvSpPr>
           <p:spPr>
             <a:xfrm>
-              <a:off x="692708" y="5517199"/>
+              <a:off x="762297" y="3360243"/>
               <a:ext cx="62179" cy="80101"/>
             </a:xfrm>
             <a:prstGeom prst="rect">
@@ -4872,13 +4907,13 @@
         </p:sp>
         <p:sp>
           <p:nvSpPr>
-            <p:cNvPr id="31" name="tx31"/>
+            <p:cNvPr id="32" name="tx32"/>
             <p:cNvSpPr/>
             <p:nvPr/>
           </p:nvSpPr>
           <p:spPr>
             <a:xfrm>
-              <a:off x="692708" y="4687735"/>
+              <a:off x="762297" y="3060909"/>
               <a:ext cx="62179" cy="80101"/>
             </a:xfrm>
             <a:prstGeom prst="rect">
@@ -4918,13 +4953,13 @@
         </p:sp>
         <p:sp>
           <p:nvSpPr>
-            <p:cNvPr id="32" name="tx32"/>
+            <p:cNvPr id="33" name="tx33"/>
             <p:cNvSpPr/>
             <p:nvPr/>
           </p:nvSpPr>
           <p:spPr>
             <a:xfrm>
-              <a:off x="692708" y="3858272"/>
+              <a:off x="762297" y="2761575"/>
               <a:ext cx="62179" cy="80101"/>
             </a:xfrm>
             <a:prstGeom prst="rect">
@@ -4964,13 +4999,13 @@
         </p:sp>
         <p:sp>
           <p:nvSpPr>
-            <p:cNvPr id="33" name="tx33"/>
+            <p:cNvPr id="34" name="tx34"/>
             <p:cNvSpPr/>
             <p:nvPr/>
           </p:nvSpPr>
           <p:spPr>
             <a:xfrm>
-              <a:off x="692708" y="3028808"/>
+              <a:off x="762297" y="2462242"/>
               <a:ext cx="62179" cy="80101"/>
             </a:xfrm>
             <a:prstGeom prst="rect">
@@ -5010,13 +5045,13 @@
         </p:sp>
         <p:sp>
           <p:nvSpPr>
-            <p:cNvPr id="34" name="tx34"/>
+            <p:cNvPr id="35" name="tx35"/>
             <p:cNvSpPr/>
             <p:nvPr/>
           </p:nvSpPr>
           <p:spPr>
             <a:xfrm>
-              <a:off x="692708" y="2199345"/>
+              <a:off x="762297" y="2162908"/>
               <a:ext cx="62179" cy="80101"/>
             </a:xfrm>
             <a:prstGeom prst="rect">
@@ -5056,13 +5091,13 @@
         </p:sp>
         <p:sp>
           <p:nvSpPr>
-            <p:cNvPr id="35" name="tx35"/>
+            <p:cNvPr id="36" name="tx36"/>
             <p:cNvSpPr/>
             <p:nvPr/>
           </p:nvSpPr>
           <p:spPr>
             <a:xfrm>
-              <a:off x="1977028" y="5785772"/>
+              <a:off x="2024485" y="3522791"/>
               <a:ext cx="161574" cy="80101"/>
             </a:xfrm>
             <a:prstGeom prst="rect">
@@ -5102,13 +5137,13 @@
         </p:sp>
         <p:sp>
           <p:nvSpPr>
-            <p:cNvPr id="36" name="tx36"/>
+            <p:cNvPr id="37" name="tx37"/>
             <p:cNvSpPr/>
             <p:nvPr/>
           </p:nvSpPr>
           <p:spPr>
             <a:xfrm>
-              <a:off x="3728813" y="5785772"/>
+              <a:off x="3745012" y="3522791"/>
               <a:ext cx="161574" cy="80101"/>
             </a:xfrm>
             <a:prstGeom prst="rect">
@@ -5148,13 +5183,13 @@
         </p:sp>
         <p:sp>
           <p:nvSpPr>
-            <p:cNvPr id="37" name="tx37"/>
+            <p:cNvPr id="38" name="tx38"/>
             <p:cNvSpPr/>
             <p:nvPr/>
           </p:nvSpPr>
           <p:spPr>
             <a:xfrm>
-              <a:off x="5530296" y="5785772"/>
+              <a:off x="5515235" y="3522791"/>
               <a:ext cx="62179" cy="80101"/>
             </a:xfrm>
             <a:prstGeom prst="rect">
@@ -5194,13 +5229,13 @@
         </p:sp>
         <p:sp>
           <p:nvSpPr>
-            <p:cNvPr id="38" name="tx38"/>
+            <p:cNvPr id="39" name="tx39"/>
             <p:cNvSpPr/>
             <p:nvPr/>
           </p:nvSpPr>
           <p:spPr>
             <a:xfrm>
-              <a:off x="7250992" y="5785772"/>
+              <a:off x="7204672" y="3522791"/>
               <a:ext cx="124358" cy="80101"/>
             </a:xfrm>
             <a:prstGeom prst="rect">
@@ -5240,13 +5275,13 @@
         </p:sp>
         <p:sp>
           <p:nvSpPr>
-            <p:cNvPr id="39" name="tx39"/>
+            <p:cNvPr id="40" name="tx40"/>
             <p:cNvSpPr/>
             <p:nvPr/>
           </p:nvSpPr>
           <p:spPr>
             <a:xfrm>
-              <a:off x="1561815" y="5925448"/>
+              <a:off x="1561815" y="3662467"/>
               <a:ext cx="6311097" cy="100218"/>
             </a:xfrm>
             <a:prstGeom prst="rect">
@@ -5286,13 +5321,13 @@
         </p:sp>
         <p:sp>
           <p:nvSpPr>
-            <p:cNvPr id="40" name="tx40"/>
+            <p:cNvPr id="41" name="tx41"/>
             <p:cNvSpPr/>
             <p:nvPr/>
           </p:nvSpPr>
           <p:spPr>
             <a:xfrm rot="-5400000">
-              <a:off x="68446" y="3848213"/>
+              <a:off x="138035" y="2751517"/>
               <a:ext cx="1016904" cy="100218"/>
             </a:xfrm>
             <a:prstGeom prst="rect">
@@ -5332,13 +5367,13 @@
         </p:sp>
         <p:sp>
           <p:nvSpPr>
-            <p:cNvPr id="41" name="tx41"/>
+            <p:cNvPr id="42" name="tx42"/>
             <p:cNvSpPr/>
             <p:nvPr/>
           </p:nvSpPr>
           <p:spPr>
             <a:xfrm>
-              <a:off x="817517" y="1896563"/>
+              <a:off x="887106" y="1966152"/>
               <a:ext cx="6959864" cy="82021"/>
             </a:xfrm>
             <a:prstGeom prst="rect">
@@ -5378,13 +5413,3746 @@
         </p:sp>
         <p:sp>
           <p:nvSpPr>
-            <p:cNvPr id="42" name="tx42"/>
+            <p:cNvPr id="43" name="tx43"/>
             <p:cNvSpPr/>
             <p:nvPr/>
           </p:nvSpPr>
           <p:spPr>
             <a:xfrm>
-              <a:off x="817517" y="1669789"/>
+              <a:off x="887106" y="1739378"/>
+              <a:ext cx="2132106" cy="120152"/>
+            </a:xfrm>
+            <a:prstGeom prst="rect">
+              <a:avLst/>
+            </a:prstGeom>
+            <a:noFill/>
+          </p:spPr>
+          <p:txBody>
+            <a:bodyPr lIns="0" rIns="0" tIns="0" bIns="0" anchorCtr="1" anchor="ctr" wrap="none"/>
+            <a:lstStyle/>
+            <a:p>
+              <a:pPr algn="l" marL="0" marR="0" indent="0">
+                <a:lnSpc>
+                  <a:spcPts val="1320"/>
+                </a:lnSpc>
+                <a:spcBef>
+                  <a:spcPts val="0"/>
+                </a:spcBef>
+                <a:spcAft>
+                  <a:spcPts val="0"/>
+                </a:spcAft>
+              </a:pPr>
+              <a:r>
+                <a:rPr sz="1320">
+                  <a:solidFill>
+                    <a:srgbClr val="000000">
+                      <a:alpha val="100000"/>
+                    </a:srgbClr>
+                  </a:solidFill>
+                  <a:latin typeface="Helvetica"/>
+                  <a:cs typeface="Helvetica"/>
+                </a:rPr>
+                <a:t>Anemia Grade 2 (Sensitivity)</a:t>
+              </a:r>
+            </a:p>
+          </p:txBody>
+        </p:sp>
+        <p:sp>
+          <p:nvSpPr>
+            <p:cNvPr id="44" name="pl44"/>
+            <p:cNvSpPr/>
+            <p:nvPr/>
+          </p:nvSpPr>
+          <p:spPr>
+            <a:xfrm>
+              <a:off x="887106" y="5444019"/>
+              <a:ext cx="7660515" cy="0"/>
+            </a:xfrm>
+            <a:custGeom>
+              <a:avLst/>
+              <a:pathLst>
+                <a:path w="7660515" h="0">
+                  <a:moveTo>
+                    <a:pt x="0" y="0"/>
+                  </a:moveTo>
+                  <a:lnTo>
+                    <a:pt x="7660515" y="0"/>
+                  </a:lnTo>
+                  <a:lnTo>
+                    <a:pt x="7660515" y="0"/>
+                  </a:lnTo>
+                </a:path>
+              </a:pathLst>
+            </a:custGeom>
+            <a:ln w="6775" cap="flat">
+              <a:solidFill>
+                <a:srgbClr val="EBEBEB">
+                  <a:alpha val="100000"/>
+                </a:srgbClr>
+              </a:solidFill>
+              <a:prstDash val="solid"/>
+              <a:round/>
+            </a:ln>
+          </p:spPr>
+          <p:txBody>
+            <a:bodyPr/>
+            <a:lstStyle/>
+            <a:p/>
+          </p:txBody>
+        </p:sp>
+        <p:sp>
+          <p:nvSpPr>
+            <p:cNvPr id="45" name="pl45"/>
+            <p:cNvSpPr/>
+            <p:nvPr/>
+          </p:nvSpPr>
+          <p:spPr>
+            <a:xfrm>
+              <a:off x="887106" y="5144686"/>
+              <a:ext cx="7660515" cy="0"/>
+            </a:xfrm>
+            <a:custGeom>
+              <a:avLst/>
+              <a:pathLst>
+                <a:path w="7660515" h="0">
+                  <a:moveTo>
+                    <a:pt x="0" y="0"/>
+                  </a:moveTo>
+                  <a:lnTo>
+                    <a:pt x="7660515" y="0"/>
+                  </a:lnTo>
+                  <a:lnTo>
+                    <a:pt x="7660515" y="0"/>
+                  </a:lnTo>
+                </a:path>
+              </a:pathLst>
+            </a:custGeom>
+            <a:ln w="6775" cap="flat">
+              <a:solidFill>
+                <a:srgbClr val="EBEBEB">
+                  <a:alpha val="100000"/>
+                </a:srgbClr>
+              </a:solidFill>
+              <a:prstDash val="solid"/>
+              <a:round/>
+            </a:ln>
+          </p:spPr>
+          <p:txBody>
+            <a:bodyPr/>
+            <a:lstStyle/>
+            <a:p/>
+          </p:txBody>
+        </p:sp>
+        <p:sp>
+          <p:nvSpPr>
+            <p:cNvPr id="46" name="pl46"/>
+            <p:cNvSpPr/>
+            <p:nvPr/>
+          </p:nvSpPr>
+          <p:spPr>
+            <a:xfrm>
+              <a:off x="887106" y="4845352"/>
+              <a:ext cx="7660515" cy="0"/>
+            </a:xfrm>
+            <a:custGeom>
+              <a:avLst/>
+              <a:pathLst>
+                <a:path w="7660515" h="0">
+                  <a:moveTo>
+                    <a:pt x="0" y="0"/>
+                  </a:moveTo>
+                  <a:lnTo>
+                    <a:pt x="7660515" y="0"/>
+                  </a:lnTo>
+                  <a:lnTo>
+                    <a:pt x="7660515" y="0"/>
+                  </a:lnTo>
+                </a:path>
+              </a:pathLst>
+            </a:custGeom>
+            <a:ln w="6775" cap="flat">
+              <a:solidFill>
+                <a:srgbClr val="EBEBEB">
+                  <a:alpha val="100000"/>
+                </a:srgbClr>
+              </a:solidFill>
+              <a:prstDash val="solid"/>
+              <a:round/>
+            </a:ln>
+          </p:spPr>
+          <p:txBody>
+            <a:bodyPr/>
+            <a:lstStyle/>
+            <a:p/>
+          </p:txBody>
+        </p:sp>
+        <p:sp>
+          <p:nvSpPr>
+            <p:cNvPr id="47" name="pl47"/>
+            <p:cNvSpPr/>
+            <p:nvPr/>
+          </p:nvSpPr>
+          <p:spPr>
+            <a:xfrm>
+              <a:off x="887106" y="4546018"/>
+              <a:ext cx="7660515" cy="0"/>
+            </a:xfrm>
+            <a:custGeom>
+              <a:avLst/>
+              <a:pathLst>
+                <a:path w="7660515" h="0">
+                  <a:moveTo>
+                    <a:pt x="0" y="0"/>
+                  </a:moveTo>
+                  <a:lnTo>
+                    <a:pt x="7660515" y="0"/>
+                  </a:lnTo>
+                  <a:lnTo>
+                    <a:pt x="7660515" y="0"/>
+                  </a:lnTo>
+                </a:path>
+              </a:pathLst>
+            </a:custGeom>
+            <a:ln w="6775" cap="flat">
+              <a:solidFill>
+                <a:srgbClr val="EBEBEB">
+                  <a:alpha val="100000"/>
+                </a:srgbClr>
+              </a:solidFill>
+              <a:prstDash val="solid"/>
+              <a:round/>
+            </a:ln>
+          </p:spPr>
+          <p:txBody>
+            <a:bodyPr/>
+            <a:lstStyle/>
+            <a:p/>
+          </p:txBody>
+        </p:sp>
+        <p:sp>
+          <p:nvSpPr>
+            <p:cNvPr id="48" name="pl48"/>
+            <p:cNvSpPr/>
+            <p:nvPr/>
+          </p:nvSpPr>
+          <p:spPr>
+            <a:xfrm>
+              <a:off x="1675141" y="4336484"/>
+              <a:ext cx="0" cy="1317069"/>
+            </a:xfrm>
+            <a:custGeom>
+              <a:avLst/>
+              <a:pathLst>
+                <a:path w="0" h="1317069">
+                  <a:moveTo>
+                    <a:pt x="0" y="1317069"/>
+                  </a:moveTo>
+                  <a:lnTo>
+                    <a:pt x="0" y="0"/>
+                  </a:lnTo>
+                  <a:lnTo>
+                    <a:pt x="0" y="0"/>
+                  </a:lnTo>
+                </a:path>
+              </a:pathLst>
+            </a:custGeom>
+            <a:ln w="6775" cap="flat">
+              <a:solidFill>
+                <a:srgbClr val="EBEBEB">
+                  <a:alpha val="100000"/>
+                </a:srgbClr>
+              </a:solidFill>
+              <a:prstDash val="solid"/>
+              <a:round/>
+            </a:ln>
+          </p:spPr>
+          <p:txBody>
+            <a:bodyPr/>
+            <a:lstStyle/>
+            <a:p/>
+          </p:txBody>
+        </p:sp>
+        <p:sp>
+          <p:nvSpPr>
+            <p:cNvPr id="49" name="pl49"/>
+            <p:cNvSpPr/>
+            <p:nvPr/>
+          </p:nvSpPr>
+          <p:spPr>
+            <a:xfrm>
+              <a:off x="2535404" y="4336484"/>
+              <a:ext cx="0" cy="1317069"/>
+            </a:xfrm>
+            <a:custGeom>
+              <a:avLst/>
+              <a:pathLst>
+                <a:path w="0" h="1317069">
+                  <a:moveTo>
+                    <a:pt x="0" y="1317069"/>
+                  </a:moveTo>
+                  <a:lnTo>
+                    <a:pt x="0" y="0"/>
+                  </a:lnTo>
+                  <a:lnTo>
+                    <a:pt x="0" y="0"/>
+                  </a:lnTo>
+                </a:path>
+              </a:pathLst>
+            </a:custGeom>
+            <a:ln w="6775" cap="flat">
+              <a:solidFill>
+                <a:srgbClr val="EBEBEB">
+                  <a:alpha val="100000"/>
+                </a:srgbClr>
+              </a:solidFill>
+              <a:prstDash val="solid"/>
+              <a:round/>
+            </a:ln>
+          </p:spPr>
+          <p:txBody>
+            <a:bodyPr/>
+            <a:lstStyle/>
+            <a:p/>
+          </p:txBody>
+        </p:sp>
+        <p:sp>
+          <p:nvSpPr>
+            <p:cNvPr id="50" name="pl50"/>
+            <p:cNvSpPr/>
+            <p:nvPr/>
+          </p:nvSpPr>
+          <p:spPr>
+            <a:xfrm>
+              <a:off x="3395667" y="4336484"/>
+              <a:ext cx="0" cy="1317069"/>
+            </a:xfrm>
+            <a:custGeom>
+              <a:avLst/>
+              <a:pathLst>
+                <a:path w="0" h="1317069">
+                  <a:moveTo>
+                    <a:pt x="0" y="1317069"/>
+                  </a:moveTo>
+                  <a:lnTo>
+                    <a:pt x="0" y="0"/>
+                  </a:lnTo>
+                  <a:lnTo>
+                    <a:pt x="0" y="0"/>
+                  </a:lnTo>
+                </a:path>
+              </a:pathLst>
+            </a:custGeom>
+            <a:ln w="6775" cap="flat">
+              <a:solidFill>
+                <a:srgbClr val="EBEBEB">
+                  <a:alpha val="100000"/>
+                </a:srgbClr>
+              </a:solidFill>
+              <a:prstDash val="solid"/>
+              <a:round/>
+            </a:ln>
+          </p:spPr>
+          <p:txBody>
+            <a:bodyPr/>
+            <a:lstStyle/>
+            <a:p/>
+          </p:txBody>
+        </p:sp>
+        <p:sp>
+          <p:nvSpPr>
+            <p:cNvPr id="51" name="pl51"/>
+            <p:cNvSpPr/>
+            <p:nvPr/>
+          </p:nvSpPr>
+          <p:spPr>
+            <a:xfrm>
+              <a:off x="4255930" y="4336484"/>
+              <a:ext cx="0" cy="1317069"/>
+            </a:xfrm>
+            <a:custGeom>
+              <a:avLst/>
+              <a:pathLst>
+                <a:path w="0" h="1317069">
+                  <a:moveTo>
+                    <a:pt x="0" y="1317069"/>
+                  </a:moveTo>
+                  <a:lnTo>
+                    <a:pt x="0" y="0"/>
+                  </a:lnTo>
+                  <a:lnTo>
+                    <a:pt x="0" y="0"/>
+                  </a:lnTo>
+                </a:path>
+              </a:pathLst>
+            </a:custGeom>
+            <a:ln w="6775" cap="flat">
+              <a:solidFill>
+                <a:srgbClr val="EBEBEB">
+                  <a:alpha val="100000"/>
+                </a:srgbClr>
+              </a:solidFill>
+              <a:prstDash val="solid"/>
+              <a:round/>
+            </a:ln>
+          </p:spPr>
+          <p:txBody>
+            <a:bodyPr/>
+            <a:lstStyle/>
+            <a:p/>
+          </p:txBody>
+        </p:sp>
+        <p:sp>
+          <p:nvSpPr>
+            <p:cNvPr id="52" name="pl52"/>
+            <p:cNvSpPr/>
+            <p:nvPr/>
+          </p:nvSpPr>
+          <p:spPr>
+            <a:xfrm>
+              <a:off x="5116193" y="4336484"/>
+              <a:ext cx="0" cy="1317069"/>
+            </a:xfrm>
+            <a:custGeom>
+              <a:avLst/>
+              <a:pathLst>
+                <a:path w="0" h="1317069">
+                  <a:moveTo>
+                    <a:pt x="0" y="1317069"/>
+                  </a:moveTo>
+                  <a:lnTo>
+                    <a:pt x="0" y="0"/>
+                  </a:lnTo>
+                  <a:lnTo>
+                    <a:pt x="0" y="0"/>
+                  </a:lnTo>
+                </a:path>
+              </a:pathLst>
+            </a:custGeom>
+            <a:ln w="6775" cap="flat">
+              <a:solidFill>
+                <a:srgbClr val="EBEBEB">
+                  <a:alpha val="100000"/>
+                </a:srgbClr>
+              </a:solidFill>
+              <a:prstDash val="solid"/>
+              <a:round/>
+            </a:ln>
+          </p:spPr>
+          <p:txBody>
+            <a:bodyPr/>
+            <a:lstStyle/>
+            <a:p/>
+          </p:txBody>
+        </p:sp>
+        <p:sp>
+          <p:nvSpPr>
+            <p:cNvPr id="53" name="pl53"/>
+            <p:cNvSpPr/>
+            <p:nvPr/>
+          </p:nvSpPr>
+          <p:spPr>
+            <a:xfrm>
+              <a:off x="5976457" y="4336484"/>
+              <a:ext cx="0" cy="1317069"/>
+            </a:xfrm>
+            <a:custGeom>
+              <a:avLst/>
+              <a:pathLst>
+                <a:path w="0" h="1317069">
+                  <a:moveTo>
+                    <a:pt x="0" y="1317069"/>
+                  </a:moveTo>
+                  <a:lnTo>
+                    <a:pt x="0" y="0"/>
+                  </a:lnTo>
+                  <a:lnTo>
+                    <a:pt x="0" y="0"/>
+                  </a:lnTo>
+                </a:path>
+              </a:pathLst>
+            </a:custGeom>
+            <a:ln w="6775" cap="flat">
+              <a:solidFill>
+                <a:srgbClr val="EBEBEB">
+                  <a:alpha val="100000"/>
+                </a:srgbClr>
+              </a:solidFill>
+              <a:prstDash val="solid"/>
+              <a:round/>
+            </a:ln>
+          </p:spPr>
+          <p:txBody>
+            <a:bodyPr/>
+            <a:lstStyle/>
+            <a:p/>
+          </p:txBody>
+        </p:sp>
+        <p:sp>
+          <p:nvSpPr>
+            <p:cNvPr id="54" name="pl54"/>
+            <p:cNvSpPr/>
+            <p:nvPr/>
+          </p:nvSpPr>
+          <p:spPr>
+            <a:xfrm>
+              <a:off x="6836720" y="4336484"/>
+              <a:ext cx="0" cy="1317069"/>
+            </a:xfrm>
+            <a:custGeom>
+              <a:avLst/>
+              <a:pathLst>
+                <a:path w="0" h="1317069">
+                  <a:moveTo>
+                    <a:pt x="0" y="1317069"/>
+                  </a:moveTo>
+                  <a:lnTo>
+                    <a:pt x="0" y="0"/>
+                  </a:lnTo>
+                  <a:lnTo>
+                    <a:pt x="0" y="0"/>
+                  </a:lnTo>
+                </a:path>
+              </a:pathLst>
+            </a:custGeom>
+            <a:ln w="6775" cap="flat">
+              <a:solidFill>
+                <a:srgbClr val="EBEBEB">
+                  <a:alpha val="100000"/>
+                </a:srgbClr>
+              </a:solidFill>
+              <a:prstDash val="solid"/>
+              <a:round/>
+            </a:ln>
+          </p:spPr>
+          <p:txBody>
+            <a:bodyPr/>
+            <a:lstStyle/>
+            <a:p/>
+          </p:txBody>
+        </p:sp>
+        <p:sp>
+          <p:nvSpPr>
+            <p:cNvPr id="55" name="pl55"/>
+            <p:cNvSpPr/>
+            <p:nvPr/>
+          </p:nvSpPr>
+          <p:spPr>
+            <a:xfrm>
+              <a:off x="7696983" y="4336484"/>
+              <a:ext cx="0" cy="1317069"/>
+            </a:xfrm>
+            <a:custGeom>
+              <a:avLst/>
+              <a:pathLst>
+                <a:path w="0" h="1317069">
+                  <a:moveTo>
+                    <a:pt x="0" y="1317069"/>
+                  </a:moveTo>
+                  <a:lnTo>
+                    <a:pt x="0" y="0"/>
+                  </a:lnTo>
+                  <a:lnTo>
+                    <a:pt x="0" y="0"/>
+                  </a:lnTo>
+                </a:path>
+              </a:pathLst>
+            </a:custGeom>
+            <a:ln w="6775" cap="flat">
+              <a:solidFill>
+                <a:srgbClr val="EBEBEB">
+                  <a:alpha val="100000"/>
+                </a:srgbClr>
+              </a:solidFill>
+              <a:prstDash val="solid"/>
+              <a:round/>
+            </a:ln>
+          </p:spPr>
+          <p:txBody>
+            <a:bodyPr/>
+            <a:lstStyle/>
+            <a:p/>
+          </p:txBody>
+        </p:sp>
+        <p:sp>
+          <p:nvSpPr>
+            <p:cNvPr id="56" name="pl56"/>
+            <p:cNvSpPr/>
+            <p:nvPr/>
+          </p:nvSpPr>
+          <p:spPr>
+            <a:xfrm>
+              <a:off x="887106" y="5593686"/>
+              <a:ext cx="7660515" cy="0"/>
+            </a:xfrm>
+            <a:custGeom>
+              <a:avLst/>
+              <a:pathLst>
+                <a:path w="7660515" h="0">
+                  <a:moveTo>
+                    <a:pt x="0" y="0"/>
+                  </a:moveTo>
+                  <a:lnTo>
+                    <a:pt x="7660515" y="0"/>
+                  </a:lnTo>
+                  <a:lnTo>
+                    <a:pt x="7660515" y="0"/>
+                  </a:lnTo>
+                </a:path>
+              </a:pathLst>
+            </a:custGeom>
+            <a:ln w="13550" cap="flat">
+              <a:solidFill>
+                <a:srgbClr val="EBEBEB">
+                  <a:alpha val="100000"/>
+                </a:srgbClr>
+              </a:solidFill>
+              <a:prstDash val="solid"/>
+              <a:round/>
+            </a:ln>
+          </p:spPr>
+          <p:txBody>
+            <a:bodyPr/>
+            <a:lstStyle/>
+            <a:p/>
+          </p:txBody>
+        </p:sp>
+        <p:sp>
+          <p:nvSpPr>
+            <p:cNvPr id="57" name="pl57"/>
+            <p:cNvSpPr/>
+            <p:nvPr/>
+          </p:nvSpPr>
+          <p:spPr>
+            <a:xfrm>
+              <a:off x="887106" y="5294352"/>
+              <a:ext cx="7660515" cy="0"/>
+            </a:xfrm>
+            <a:custGeom>
+              <a:avLst/>
+              <a:pathLst>
+                <a:path w="7660515" h="0">
+                  <a:moveTo>
+                    <a:pt x="0" y="0"/>
+                  </a:moveTo>
+                  <a:lnTo>
+                    <a:pt x="7660515" y="0"/>
+                  </a:lnTo>
+                  <a:lnTo>
+                    <a:pt x="7660515" y="0"/>
+                  </a:lnTo>
+                </a:path>
+              </a:pathLst>
+            </a:custGeom>
+            <a:ln w="13550" cap="flat">
+              <a:solidFill>
+                <a:srgbClr val="EBEBEB">
+                  <a:alpha val="100000"/>
+                </a:srgbClr>
+              </a:solidFill>
+              <a:prstDash val="solid"/>
+              <a:round/>
+            </a:ln>
+          </p:spPr>
+          <p:txBody>
+            <a:bodyPr/>
+            <a:lstStyle/>
+            <a:p/>
+          </p:txBody>
+        </p:sp>
+        <p:sp>
+          <p:nvSpPr>
+            <p:cNvPr id="58" name="pl58"/>
+            <p:cNvSpPr/>
+            <p:nvPr/>
+          </p:nvSpPr>
+          <p:spPr>
+            <a:xfrm>
+              <a:off x="887106" y="4995019"/>
+              <a:ext cx="7660515" cy="0"/>
+            </a:xfrm>
+            <a:custGeom>
+              <a:avLst/>
+              <a:pathLst>
+                <a:path w="7660515" h="0">
+                  <a:moveTo>
+                    <a:pt x="0" y="0"/>
+                  </a:moveTo>
+                  <a:lnTo>
+                    <a:pt x="7660515" y="0"/>
+                  </a:lnTo>
+                  <a:lnTo>
+                    <a:pt x="7660515" y="0"/>
+                  </a:lnTo>
+                </a:path>
+              </a:pathLst>
+            </a:custGeom>
+            <a:ln w="13550" cap="flat">
+              <a:solidFill>
+                <a:srgbClr val="EBEBEB">
+                  <a:alpha val="100000"/>
+                </a:srgbClr>
+              </a:solidFill>
+              <a:prstDash val="solid"/>
+              <a:round/>
+            </a:ln>
+          </p:spPr>
+          <p:txBody>
+            <a:bodyPr/>
+            <a:lstStyle/>
+            <a:p/>
+          </p:txBody>
+        </p:sp>
+        <p:sp>
+          <p:nvSpPr>
+            <p:cNvPr id="59" name="pl59"/>
+            <p:cNvSpPr/>
+            <p:nvPr/>
+          </p:nvSpPr>
+          <p:spPr>
+            <a:xfrm>
+              <a:off x="887106" y="4695685"/>
+              <a:ext cx="7660515" cy="0"/>
+            </a:xfrm>
+            <a:custGeom>
+              <a:avLst/>
+              <a:pathLst>
+                <a:path w="7660515" h="0">
+                  <a:moveTo>
+                    <a:pt x="0" y="0"/>
+                  </a:moveTo>
+                  <a:lnTo>
+                    <a:pt x="7660515" y="0"/>
+                  </a:lnTo>
+                  <a:lnTo>
+                    <a:pt x="7660515" y="0"/>
+                  </a:lnTo>
+                </a:path>
+              </a:pathLst>
+            </a:custGeom>
+            <a:ln w="13550" cap="flat">
+              <a:solidFill>
+                <a:srgbClr val="EBEBEB">
+                  <a:alpha val="100000"/>
+                </a:srgbClr>
+              </a:solidFill>
+              <a:prstDash val="solid"/>
+              <a:round/>
+            </a:ln>
+          </p:spPr>
+          <p:txBody>
+            <a:bodyPr/>
+            <a:lstStyle/>
+            <a:p/>
+          </p:txBody>
+        </p:sp>
+        <p:sp>
+          <p:nvSpPr>
+            <p:cNvPr id="60" name="pl60"/>
+            <p:cNvSpPr/>
+            <p:nvPr/>
+          </p:nvSpPr>
+          <p:spPr>
+            <a:xfrm>
+              <a:off x="887106" y="4396351"/>
+              <a:ext cx="7660515" cy="0"/>
+            </a:xfrm>
+            <a:custGeom>
+              <a:avLst/>
+              <a:pathLst>
+                <a:path w="7660515" h="0">
+                  <a:moveTo>
+                    <a:pt x="0" y="0"/>
+                  </a:moveTo>
+                  <a:lnTo>
+                    <a:pt x="7660515" y="0"/>
+                  </a:lnTo>
+                  <a:lnTo>
+                    <a:pt x="7660515" y="0"/>
+                  </a:lnTo>
+                </a:path>
+              </a:pathLst>
+            </a:custGeom>
+            <a:ln w="13550" cap="flat">
+              <a:solidFill>
+                <a:srgbClr val="EBEBEB">
+                  <a:alpha val="100000"/>
+                </a:srgbClr>
+              </a:solidFill>
+              <a:prstDash val="solid"/>
+              <a:round/>
+            </a:ln>
+          </p:spPr>
+          <p:txBody>
+            <a:bodyPr/>
+            <a:lstStyle/>
+            <a:p/>
+          </p:txBody>
+        </p:sp>
+        <p:sp>
+          <p:nvSpPr>
+            <p:cNvPr id="61" name="pl61"/>
+            <p:cNvSpPr/>
+            <p:nvPr/>
+          </p:nvSpPr>
+          <p:spPr>
+            <a:xfrm>
+              <a:off x="1245010" y="4336484"/>
+              <a:ext cx="0" cy="1317069"/>
+            </a:xfrm>
+            <a:custGeom>
+              <a:avLst/>
+              <a:pathLst>
+                <a:path w="0" h="1317069">
+                  <a:moveTo>
+                    <a:pt x="0" y="1317069"/>
+                  </a:moveTo>
+                  <a:lnTo>
+                    <a:pt x="0" y="0"/>
+                  </a:lnTo>
+                  <a:lnTo>
+                    <a:pt x="0" y="0"/>
+                  </a:lnTo>
+                </a:path>
+              </a:pathLst>
+            </a:custGeom>
+            <a:ln w="13550" cap="flat">
+              <a:solidFill>
+                <a:srgbClr val="EBEBEB">
+                  <a:alpha val="100000"/>
+                </a:srgbClr>
+              </a:solidFill>
+              <a:prstDash val="solid"/>
+              <a:round/>
+            </a:ln>
+          </p:spPr>
+          <p:txBody>
+            <a:bodyPr/>
+            <a:lstStyle/>
+            <a:p/>
+          </p:txBody>
+        </p:sp>
+        <p:sp>
+          <p:nvSpPr>
+            <p:cNvPr id="62" name="pl62"/>
+            <p:cNvSpPr/>
+            <p:nvPr/>
+          </p:nvSpPr>
+          <p:spPr>
+            <a:xfrm>
+              <a:off x="2105273" y="4336484"/>
+              <a:ext cx="0" cy="1317069"/>
+            </a:xfrm>
+            <a:custGeom>
+              <a:avLst/>
+              <a:pathLst>
+                <a:path w="0" h="1317069">
+                  <a:moveTo>
+                    <a:pt x="0" y="1317069"/>
+                  </a:moveTo>
+                  <a:lnTo>
+                    <a:pt x="0" y="0"/>
+                  </a:lnTo>
+                  <a:lnTo>
+                    <a:pt x="0" y="0"/>
+                  </a:lnTo>
+                </a:path>
+              </a:pathLst>
+            </a:custGeom>
+            <a:ln w="13550" cap="flat">
+              <a:solidFill>
+                <a:srgbClr val="EBEBEB">
+                  <a:alpha val="100000"/>
+                </a:srgbClr>
+              </a:solidFill>
+              <a:prstDash val="solid"/>
+              <a:round/>
+            </a:ln>
+          </p:spPr>
+          <p:txBody>
+            <a:bodyPr/>
+            <a:lstStyle/>
+            <a:p/>
+          </p:txBody>
+        </p:sp>
+        <p:sp>
+          <p:nvSpPr>
+            <p:cNvPr id="63" name="pl63"/>
+            <p:cNvSpPr/>
+            <p:nvPr/>
+          </p:nvSpPr>
+          <p:spPr>
+            <a:xfrm>
+              <a:off x="2965536" y="4336484"/>
+              <a:ext cx="0" cy="1317069"/>
+            </a:xfrm>
+            <a:custGeom>
+              <a:avLst/>
+              <a:pathLst>
+                <a:path w="0" h="1317069">
+                  <a:moveTo>
+                    <a:pt x="0" y="1317069"/>
+                  </a:moveTo>
+                  <a:lnTo>
+                    <a:pt x="0" y="0"/>
+                  </a:lnTo>
+                  <a:lnTo>
+                    <a:pt x="0" y="0"/>
+                  </a:lnTo>
+                </a:path>
+              </a:pathLst>
+            </a:custGeom>
+            <a:ln w="13550" cap="flat">
+              <a:solidFill>
+                <a:srgbClr val="EBEBEB">
+                  <a:alpha val="100000"/>
+                </a:srgbClr>
+              </a:solidFill>
+              <a:prstDash val="solid"/>
+              <a:round/>
+            </a:ln>
+          </p:spPr>
+          <p:txBody>
+            <a:bodyPr/>
+            <a:lstStyle/>
+            <a:p/>
+          </p:txBody>
+        </p:sp>
+        <p:sp>
+          <p:nvSpPr>
+            <p:cNvPr id="64" name="pl64"/>
+            <p:cNvSpPr/>
+            <p:nvPr/>
+          </p:nvSpPr>
+          <p:spPr>
+            <a:xfrm>
+              <a:off x="3825799" y="4336484"/>
+              <a:ext cx="0" cy="1317069"/>
+            </a:xfrm>
+            <a:custGeom>
+              <a:avLst/>
+              <a:pathLst>
+                <a:path w="0" h="1317069">
+                  <a:moveTo>
+                    <a:pt x="0" y="1317069"/>
+                  </a:moveTo>
+                  <a:lnTo>
+                    <a:pt x="0" y="0"/>
+                  </a:lnTo>
+                  <a:lnTo>
+                    <a:pt x="0" y="0"/>
+                  </a:lnTo>
+                </a:path>
+              </a:pathLst>
+            </a:custGeom>
+            <a:ln w="13550" cap="flat">
+              <a:solidFill>
+                <a:srgbClr val="EBEBEB">
+                  <a:alpha val="100000"/>
+                </a:srgbClr>
+              </a:solidFill>
+              <a:prstDash val="solid"/>
+              <a:round/>
+            </a:ln>
+          </p:spPr>
+          <p:txBody>
+            <a:bodyPr/>
+            <a:lstStyle/>
+            <a:p/>
+          </p:txBody>
+        </p:sp>
+        <p:sp>
+          <p:nvSpPr>
+            <p:cNvPr id="65" name="pl65"/>
+            <p:cNvSpPr/>
+            <p:nvPr/>
+          </p:nvSpPr>
+          <p:spPr>
+            <a:xfrm>
+              <a:off x="4686062" y="4336484"/>
+              <a:ext cx="0" cy="1317069"/>
+            </a:xfrm>
+            <a:custGeom>
+              <a:avLst/>
+              <a:pathLst>
+                <a:path w="0" h="1317069">
+                  <a:moveTo>
+                    <a:pt x="0" y="1317069"/>
+                  </a:moveTo>
+                  <a:lnTo>
+                    <a:pt x="0" y="0"/>
+                  </a:lnTo>
+                  <a:lnTo>
+                    <a:pt x="0" y="0"/>
+                  </a:lnTo>
+                </a:path>
+              </a:pathLst>
+            </a:custGeom>
+            <a:ln w="13550" cap="flat">
+              <a:solidFill>
+                <a:srgbClr val="EBEBEB">
+                  <a:alpha val="100000"/>
+                </a:srgbClr>
+              </a:solidFill>
+              <a:prstDash val="solid"/>
+              <a:round/>
+            </a:ln>
+          </p:spPr>
+          <p:txBody>
+            <a:bodyPr/>
+            <a:lstStyle/>
+            <a:p/>
+          </p:txBody>
+        </p:sp>
+        <p:sp>
+          <p:nvSpPr>
+            <p:cNvPr id="66" name="pl66"/>
+            <p:cNvSpPr/>
+            <p:nvPr/>
+          </p:nvSpPr>
+          <p:spPr>
+            <a:xfrm>
+              <a:off x="5546325" y="4336484"/>
+              <a:ext cx="0" cy="1317069"/>
+            </a:xfrm>
+            <a:custGeom>
+              <a:avLst/>
+              <a:pathLst>
+                <a:path w="0" h="1317069">
+                  <a:moveTo>
+                    <a:pt x="0" y="1317069"/>
+                  </a:moveTo>
+                  <a:lnTo>
+                    <a:pt x="0" y="0"/>
+                  </a:lnTo>
+                  <a:lnTo>
+                    <a:pt x="0" y="0"/>
+                  </a:lnTo>
+                </a:path>
+              </a:pathLst>
+            </a:custGeom>
+            <a:ln w="13550" cap="flat">
+              <a:solidFill>
+                <a:srgbClr val="EBEBEB">
+                  <a:alpha val="100000"/>
+                </a:srgbClr>
+              </a:solidFill>
+              <a:prstDash val="solid"/>
+              <a:round/>
+            </a:ln>
+          </p:spPr>
+          <p:txBody>
+            <a:bodyPr/>
+            <a:lstStyle/>
+            <a:p/>
+          </p:txBody>
+        </p:sp>
+        <p:sp>
+          <p:nvSpPr>
+            <p:cNvPr id="67" name="pl67"/>
+            <p:cNvSpPr/>
+            <p:nvPr/>
+          </p:nvSpPr>
+          <p:spPr>
+            <a:xfrm>
+              <a:off x="6406588" y="4336484"/>
+              <a:ext cx="0" cy="1317069"/>
+            </a:xfrm>
+            <a:custGeom>
+              <a:avLst/>
+              <a:pathLst>
+                <a:path w="0" h="1317069">
+                  <a:moveTo>
+                    <a:pt x="0" y="1317069"/>
+                  </a:moveTo>
+                  <a:lnTo>
+                    <a:pt x="0" y="0"/>
+                  </a:lnTo>
+                  <a:lnTo>
+                    <a:pt x="0" y="0"/>
+                  </a:lnTo>
+                </a:path>
+              </a:pathLst>
+            </a:custGeom>
+            <a:ln w="13550" cap="flat">
+              <a:solidFill>
+                <a:srgbClr val="EBEBEB">
+                  <a:alpha val="100000"/>
+                </a:srgbClr>
+              </a:solidFill>
+              <a:prstDash val="solid"/>
+              <a:round/>
+            </a:ln>
+          </p:spPr>
+          <p:txBody>
+            <a:bodyPr/>
+            <a:lstStyle/>
+            <a:p/>
+          </p:txBody>
+        </p:sp>
+        <p:sp>
+          <p:nvSpPr>
+            <p:cNvPr id="68" name="pl68"/>
+            <p:cNvSpPr/>
+            <p:nvPr/>
+          </p:nvSpPr>
+          <p:spPr>
+            <a:xfrm>
+              <a:off x="7266851" y="4336484"/>
+              <a:ext cx="0" cy="1317069"/>
+            </a:xfrm>
+            <a:custGeom>
+              <a:avLst/>
+              <a:pathLst>
+                <a:path w="0" h="1317069">
+                  <a:moveTo>
+                    <a:pt x="0" y="1317069"/>
+                  </a:moveTo>
+                  <a:lnTo>
+                    <a:pt x="0" y="0"/>
+                  </a:lnTo>
+                  <a:lnTo>
+                    <a:pt x="0" y="0"/>
+                  </a:lnTo>
+                </a:path>
+              </a:pathLst>
+            </a:custGeom>
+            <a:ln w="13550" cap="flat">
+              <a:solidFill>
+                <a:srgbClr val="EBEBEB">
+                  <a:alpha val="100000"/>
+                </a:srgbClr>
+              </a:solidFill>
+              <a:prstDash val="solid"/>
+              <a:round/>
+            </a:ln>
+          </p:spPr>
+          <p:txBody>
+            <a:bodyPr/>
+            <a:lstStyle/>
+            <a:p/>
+          </p:txBody>
+        </p:sp>
+        <p:sp>
+          <p:nvSpPr>
+            <p:cNvPr id="69" name="pl69"/>
+            <p:cNvSpPr/>
+            <p:nvPr/>
+          </p:nvSpPr>
+          <p:spPr>
+            <a:xfrm>
+              <a:off x="8127114" y="4336484"/>
+              <a:ext cx="0" cy="1317069"/>
+            </a:xfrm>
+            <a:custGeom>
+              <a:avLst/>
+              <a:pathLst>
+                <a:path w="0" h="1317069">
+                  <a:moveTo>
+                    <a:pt x="0" y="1317069"/>
+                  </a:moveTo>
+                  <a:lnTo>
+                    <a:pt x="0" y="0"/>
+                  </a:lnTo>
+                  <a:lnTo>
+                    <a:pt x="0" y="0"/>
+                  </a:lnTo>
+                </a:path>
+              </a:pathLst>
+            </a:custGeom>
+            <a:ln w="13550" cap="flat">
+              <a:solidFill>
+                <a:srgbClr val="EBEBEB">
+                  <a:alpha val="100000"/>
+                </a:srgbClr>
+              </a:solidFill>
+              <a:prstDash val="solid"/>
+              <a:round/>
+            </a:ln>
+          </p:spPr>
+          <p:txBody>
+            <a:bodyPr/>
+            <a:lstStyle/>
+            <a:p/>
+          </p:txBody>
+        </p:sp>
+        <p:sp>
+          <p:nvSpPr>
+            <p:cNvPr id="70" name="pg70"/>
+            <p:cNvSpPr/>
+            <p:nvPr/>
+          </p:nvSpPr>
+          <p:spPr>
+            <a:xfrm>
+              <a:off x="1235312" y="5097171"/>
+              <a:ext cx="6964104" cy="344358"/>
+            </a:xfrm>
+            <a:custGeom>
+              <a:avLst/>
+              <a:pathLst>
+                <a:path w="6964104" h="344358">
+                  <a:moveTo>
+                    <a:pt x="0" y="0"/>
+                  </a:moveTo>
+                  <a:lnTo>
+                    <a:pt x="70344" y="5896"/>
+                  </a:lnTo>
+                  <a:lnTo>
+                    <a:pt x="140688" y="11722"/>
+                  </a:lnTo>
+                  <a:lnTo>
+                    <a:pt x="211033" y="17479"/>
+                  </a:lnTo>
+                  <a:lnTo>
+                    <a:pt x="281377" y="23168"/>
+                  </a:lnTo>
+                  <a:lnTo>
+                    <a:pt x="351722" y="28789"/>
+                  </a:lnTo>
+                  <a:lnTo>
+                    <a:pt x="422066" y="34344"/>
+                  </a:lnTo>
+                  <a:lnTo>
+                    <a:pt x="492411" y="39832"/>
+                  </a:lnTo>
+                  <a:lnTo>
+                    <a:pt x="562755" y="45255"/>
+                  </a:lnTo>
+                  <a:lnTo>
+                    <a:pt x="633100" y="50614"/>
+                  </a:lnTo>
+                  <a:lnTo>
+                    <a:pt x="703444" y="55910"/>
+                  </a:lnTo>
+                  <a:lnTo>
+                    <a:pt x="773789" y="61142"/>
+                  </a:lnTo>
+                  <a:lnTo>
+                    <a:pt x="844133" y="66312"/>
+                  </a:lnTo>
+                  <a:lnTo>
+                    <a:pt x="914478" y="71421"/>
+                  </a:lnTo>
+                  <a:lnTo>
+                    <a:pt x="984822" y="76469"/>
+                  </a:lnTo>
+                  <a:lnTo>
+                    <a:pt x="1055167" y="81457"/>
+                  </a:lnTo>
+                  <a:lnTo>
+                    <a:pt x="1125511" y="86386"/>
+                  </a:lnTo>
+                  <a:lnTo>
+                    <a:pt x="1195856" y="91257"/>
+                  </a:lnTo>
+                  <a:lnTo>
+                    <a:pt x="1266200" y="96070"/>
+                  </a:lnTo>
+                  <a:lnTo>
+                    <a:pt x="1336545" y="100825"/>
+                  </a:lnTo>
+                  <a:lnTo>
+                    <a:pt x="1406889" y="105524"/>
+                  </a:lnTo>
+                  <a:lnTo>
+                    <a:pt x="1477234" y="110167"/>
+                  </a:lnTo>
+                  <a:lnTo>
+                    <a:pt x="1547578" y="114755"/>
+                  </a:lnTo>
+                  <a:lnTo>
+                    <a:pt x="1617923" y="119289"/>
+                  </a:lnTo>
+                  <a:lnTo>
+                    <a:pt x="1688267" y="123769"/>
+                  </a:lnTo>
+                  <a:lnTo>
+                    <a:pt x="1758612" y="128195"/>
+                  </a:lnTo>
+                  <a:lnTo>
+                    <a:pt x="1828956" y="132569"/>
+                  </a:lnTo>
+                  <a:lnTo>
+                    <a:pt x="1899301" y="136891"/>
+                  </a:lnTo>
+                  <a:lnTo>
+                    <a:pt x="1969645" y="141162"/>
+                  </a:lnTo>
+                  <a:lnTo>
+                    <a:pt x="2039990" y="145382"/>
+                  </a:lnTo>
+                  <a:lnTo>
+                    <a:pt x="2110334" y="149552"/>
+                  </a:lnTo>
+                  <a:lnTo>
+                    <a:pt x="2180679" y="153672"/>
+                  </a:lnTo>
+                  <a:lnTo>
+                    <a:pt x="2251023" y="157743"/>
+                  </a:lnTo>
+                  <a:lnTo>
+                    <a:pt x="2321368" y="161766"/>
+                  </a:lnTo>
+                  <a:lnTo>
+                    <a:pt x="2391712" y="165742"/>
+                  </a:lnTo>
+                  <a:lnTo>
+                    <a:pt x="2462057" y="169670"/>
+                  </a:lnTo>
+                  <a:lnTo>
+                    <a:pt x="2532401" y="173551"/>
+                  </a:lnTo>
+                  <a:lnTo>
+                    <a:pt x="2602746" y="177386"/>
+                  </a:lnTo>
+                  <a:lnTo>
+                    <a:pt x="2673090" y="181176"/>
+                  </a:lnTo>
+                  <a:lnTo>
+                    <a:pt x="2743435" y="184921"/>
+                  </a:lnTo>
+                  <a:lnTo>
+                    <a:pt x="2813779" y="188621"/>
+                  </a:lnTo>
+                  <a:lnTo>
+                    <a:pt x="2884124" y="192278"/>
+                  </a:lnTo>
+                  <a:lnTo>
+                    <a:pt x="2954468" y="195891"/>
+                  </a:lnTo>
+                  <a:lnTo>
+                    <a:pt x="3024813" y="197703"/>
+                  </a:lnTo>
+                  <a:lnTo>
+                    <a:pt x="3095157" y="198518"/>
+                  </a:lnTo>
+                  <a:lnTo>
+                    <a:pt x="3165502" y="199330"/>
+                  </a:lnTo>
+                  <a:lnTo>
+                    <a:pt x="3235846" y="200141"/>
+                  </a:lnTo>
+                  <a:lnTo>
+                    <a:pt x="3306191" y="200949"/>
+                  </a:lnTo>
+                  <a:lnTo>
+                    <a:pt x="3376535" y="201755"/>
+                  </a:lnTo>
+                  <a:lnTo>
+                    <a:pt x="3446880" y="202558"/>
+                  </a:lnTo>
+                  <a:lnTo>
+                    <a:pt x="3517224" y="203360"/>
+                  </a:lnTo>
+                  <a:lnTo>
+                    <a:pt x="3587569" y="204159"/>
+                  </a:lnTo>
+                  <a:lnTo>
+                    <a:pt x="3657913" y="204956"/>
+                  </a:lnTo>
+                  <a:lnTo>
+                    <a:pt x="3728257" y="205751"/>
+                  </a:lnTo>
+                  <a:lnTo>
+                    <a:pt x="3798602" y="206544"/>
+                  </a:lnTo>
+                  <a:lnTo>
+                    <a:pt x="3868946" y="207335"/>
+                  </a:lnTo>
+                  <a:lnTo>
+                    <a:pt x="3939291" y="208123"/>
+                  </a:lnTo>
+                  <a:lnTo>
+                    <a:pt x="4009635" y="208909"/>
+                  </a:lnTo>
+                  <a:lnTo>
+                    <a:pt x="4079980" y="209693"/>
+                  </a:lnTo>
+                  <a:lnTo>
+                    <a:pt x="4150324" y="210475"/>
+                  </a:lnTo>
+                  <a:lnTo>
+                    <a:pt x="4220669" y="211255"/>
+                  </a:lnTo>
+                  <a:lnTo>
+                    <a:pt x="4291013" y="212033"/>
+                  </a:lnTo>
+                  <a:lnTo>
+                    <a:pt x="4361358" y="212809"/>
+                  </a:lnTo>
+                  <a:lnTo>
+                    <a:pt x="4431702" y="213582"/>
+                  </a:lnTo>
+                  <a:lnTo>
+                    <a:pt x="4502047" y="214354"/>
+                  </a:lnTo>
+                  <a:lnTo>
+                    <a:pt x="4572391" y="215123"/>
+                  </a:lnTo>
+                  <a:lnTo>
+                    <a:pt x="4642736" y="215890"/>
+                  </a:lnTo>
+                  <a:lnTo>
+                    <a:pt x="4713080" y="216655"/>
+                  </a:lnTo>
+                  <a:lnTo>
+                    <a:pt x="4783425" y="217418"/>
+                  </a:lnTo>
+                  <a:lnTo>
+                    <a:pt x="4853769" y="218179"/>
+                  </a:lnTo>
+                  <a:lnTo>
+                    <a:pt x="4924114" y="218938"/>
+                  </a:lnTo>
+                  <a:lnTo>
+                    <a:pt x="4994458" y="219695"/>
+                  </a:lnTo>
+                  <a:lnTo>
+                    <a:pt x="5064803" y="220450"/>
+                  </a:lnTo>
+                  <a:lnTo>
+                    <a:pt x="5135147" y="221203"/>
+                  </a:lnTo>
+                  <a:lnTo>
+                    <a:pt x="5205492" y="221953"/>
+                  </a:lnTo>
+                  <a:lnTo>
+                    <a:pt x="5275836" y="222702"/>
+                  </a:lnTo>
+                  <a:lnTo>
+                    <a:pt x="5346181" y="223448"/>
+                  </a:lnTo>
+                  <a:lnTo>
+                    <a:pt x="5416525" y="224193"/>
+                  </a:lnTo>
+                  <a:lnTo>
+                    <a:pt x="5486870" y="224935"/>
+                  </a:lnTo>
+                  <a:lnTo>
+                    <a:pt x="5557214" y="225676"/>
+                  </a:lnTo>
+                  <a:lnTo>
+                    <a:pt x="5627559" y="226414"/>
+                  </a:lnTo>
+                  <a:lnTo>
+                    <a:pt x="5697903" y="227151"/>
+                  </a:lnTo>
+                  <a:lnTo>
+                    <a:pt x="5768248" y="227885"/>
+                  </a:lnTo>
+                  <a:lnTo>
+                    <a:pt x="5838592" y="228618"/>
+                  </a:lnTo>
+                  <a:lnTo>
+                    <a:pt x="5908937" y="229348"/>
+                  </a:lnTo>
+                  <a:lnTo>
+                    <a:pt x="5979281" y="230076"/>
+                  </a:lnTo>
+                  <a:lnTo>
+                    <a:pt x="6049626" y="230803"/>
+                  </a:lnTo>
+                  <a:lnTo>
+                    <a:pt x="6119970" y="231527"/>
+                  </a:lnTo>
+                  <a:lnTo>
+                    <a:pt x="6190315" y="232250"/>
+                  </a:lnTo>
+                  <a:lnTo>
+                    <a:pt x="6260659" y="232970"/>
+                  </a:lnTo>
+                  <a:lnTo>
+                    <a:pt x="6331004" y="233689"/>
+                  </a:lnTo>
+                  <a:lnTo>
+                    <a:pt x="6401348" y="234406"/>
+                  </a:lnTo>
+                  <a:lnTo>
+                    <a:pt x="6471693" y="235120"/>
+                  </a:lnTo>
+                  <a:lnTo>
+                    <a:pt x="6542037" y="235833"/>
+                  </a:lnTo>
+                  <a:lnTo>
+                    <a:pt x="6612382" y="236544"/>
+                  </a:lnTo>
+                  <a:lnTo>
+                    <a:pt x="6682726" y="237252"/>
+                  </a:lnTo>
+                  <a:lnTo>
+                    <a:pt x="6753071" y="237959"/>
+                  </a:lnTo>
+                  <a:lnTo>
+                    <a:pt x="6823415" y="238664"/>
+                  </a:lnTo>
+                  <a:lnTo>
+                    <a:pt x="6893760" y="239367"/>
+                  </a:lnTo>
+                  <a:lnTo>
+                    <a:pt x="6964104" y="240068"/>
+                  </a:lnTo>
+                  <a:lnTo>
+                    <a:pt x="6964104" y="344358"/>
+                  </a:lnTo>
+                  <a:lnTo>
+                    <a:pt x="6893760" y="342530"/>
+                  </a:lnTo>
+                  <a:lnTo>
+                    <a:pt x="6823415" y="340679"/>
+                  </a:lnTo>
+                  <a:lnTo>
+                    <a:pt x="6753071" y="338806"/>
+                  </a:lnTo>
+                  <a:lnTo>
+                    <a:pt x="6682726" y="336911"/>
+                  </a:lnTo>
+                  <a:lnTo>
+                    <a:pt x="6612382" y="334993"/>
+                  </a:lnTo>
+                  <a:lnTo>
+                    <a:pt x="6542037" y="333051"/>
+                  </a:lnTo>
+                  <a:lnTo>
+                    <a:pt x="6471693" y="331087"/>
+                  </a:lnTo>
+                  <a:lnTo>
+                    <a:pt x="6401348" y="329099"/>
+                  </a:lnTo>
+                  <a:lnTo>
+                    <a:pt x="6331004" y="327087"/>
+                  </a:lnTo>
+                  <a:lnTo>
+                    <a:pt x="6260659" y="325050"/>
+                  </a:lnTo>
+                  <a:lnTo>
+                    <a:pt x="6190315" y="322990"/>
+                  </a:lnTo>
+                  <a:lnTo>
+                    <a:pt x="6119970" y="320904"/>
+                  </a:lnTo>
+                  <a:lnTo>
+                    <a:pt x="6049626" y="318794"/>
+                  </a:lnTo>
+                  <a:lnTo>
+                    <a:pt x="5979281" y="316658"/>
+                  </a:lnTo>
+                  <a:lnTo>
+                    <a:pt x="5908937" y="314496"/>
+                  </a:lnTo>
+                  <a:lnTo>
+                    <a:pt x="5838592" y="312309"/>
+                  </a:lnTo>
+                  <a:lnTo>
+                    <a:pt x="5768248" y="310095"/>
+                  </a:lnTo>
+                  <a:lnTo>
+                    <a:pt x="5697903" y="307855"/>
+                  </a:lnTo>
+                  <a:lnTo>
+                    <a:pt x="5627559" y="305587"/>
+                  </a:lnTo>
+                  <a:lnTo>
+                    <a:pt x="5557214" y="303293"/>
+                  </a:lnTo>
+                  <a:lnTo>
+                    <a:pt x="5486870" y="300971"/>
+                  </a:lnTo>
+                  <a:lnTo>
+                    <a:pt x="5416525" y="298620"/>
+                  </a:lnTo>
+                  <a:lnTo>
+                    <a:pt x="5346181" y="296242"/>
+                  </a:lnTo>
+                  <a:lnTo>
+                    <a:pt x="5275836" y="293835"/>
+                  </a:lnTo>
+                  <a:lnTo>
+                    <a:pt x="5205492" y="291399"/>
+                  </a:lnTo>
+                  <a:lnTo>
+                    <a:pt x="5135147" y="288934"/>
+                  </a:lnTo>
+                  <a:lnTo>
+                    <a:pt x="5064803" y="286440"/>
+                  </a:lnTo>
+                  <a:lnTo>
+                    <a:pt x="4994458" y="283915"/>
+                  </a:lnTo>
+                  <a:lnTo>
+                    <a:pt x="4924114" y="281360"/>
+                  </a:lnTo>
+                  <a:lnTo>
+                    <a:pt x="4853769" y="278774"/>
+                  </a:lnTo>
+                  <a:lnTo>
+                    <a:pt x="4783425" y="276157"/>
+                  </a:lnTo>
+                  <a:lnTo>
+                    <a:pt x="4713080" y="273509"/>
+                  </a:lnTo>
+                  <a:lnTo>
+                    <a:pt x="4642736" y="270829"/>
+                  </a:lnTo>
+                  <a:lnTo>
+                    <a:pt x="4572391" y="268116"/>
+                  </a:lnTo>
+                  <a:lnTo>
+                    <a:pt x="4502047" y="265372"/>
+                  </a:lnTo>
+                  <a:lnTo>
+                    <a:pt x="4431702" y="262594"/>
+                  </a:lnTo>
+                  <a:lnTo>
+                    <a:pt x="4361358" y="259782"/>
+                  </a:lnTo>
+                  <a:lnTo>
+                    <a:pt x="4291013" y="256937"/>
+                  </a:lnTo>
+                  <a:lnTo>
+                    <a:pt x="4220669" y="254058"/>
+                  </a:lnTo>
+                  <a:lnTo>
+                    <a:pt x="4150324" y="251144"/>
+                  </a:lnTo>
+                  <a:lnTo>
+                    <a:pt x="4079980" y="248195"/>
+                  </a:lnTo>
+                  <a:lnTo>
+                    <a:pt x="4009635" y="245211"/>
+                  </a:lnTo>
+                  <a:lnTo>
+                    <a:pt x="3939291" y="242191"/>
+                  </a:lnTo>
+                  <a:lnTo>
+                    <a:pt x="3868946" y="239134"/>
+                  </a:lnTo>
+                  <a:lnTo>
+                    <a:pt x="3798602" y="236041"/>
+                  </a:lnTo>
+                  <a:lnTo>
+                    <a:pt x="3728257" y="232910"/>
+                  </a:lnTo>
+                  <a:lnTo>
+                    <a:pt x="3657913" y="229742"/>
+                  </a:lnTo>
+                  <a:lnTo>
+                    <a:pt x="3587569" y="226536"/>
+                  </a:lnTo>
+                  <a:lnTo>
+                    <a:pt x="3517224" y="223292"/>
+                  </a:lnTo>
+                  <a:lnTo>
+                    <a:pt x="3446880" y="220008"/>
+                  </a:lnTo>
+                  <a:lnTo>
+                    <a:pt x="3376535" y="216685"/>
+                  </a:lnTo>
+                  <a:lnTo>
+                    <a:pt x="3306191" y="213322"/>
+                  </a:lnTo>
+                  <a:lnTo>
+                    <a:pt x="3235846" y="209918"/>
+                  </a:lnTo>
+                  <a:lnTo>
+                    <a:pt x="3165502" y="206474"/>
+                  </a:lnTo>
+                  <a:lnTo>
+                    <a:pt x="3095157" y="202988"/>
+                  </a:lnTo>
+                  <a:lnTo>
+                    <a:pt x="3024813" y="199461"/>
+                  </a:lnTo>
+                  <a:lnTo>
+                    <a:pt x="2954468" y="196886"/>
+                  </a:lnTo>
+                  <a:lnTo>
+                    <a:pt x="2884124" y="196067"/>
+                  </a:lnTo>
+                  <a:lnTo>
+                    <a:pt x="2813779" y="195246"/>
+                  </a:lnTo>
+                  <a:lnTo>
+                    <a:pt x="2743435" y="194422"/>
+                  </a:lnTo>
+                  <a:lnTo>
+                    <a:pt x="2673090" y="193596"/>
+                  </a:lnTo>
+                  <a:lnTo>
+                    <a:pt x="2602746" y="192768"/>
+                  </a:lnTo>
+                  <a:lnTo>
+                    <a:pt x="2532401" y="191937"/>
+                  </a:lnTo>
+                  <a:lnTo>
+                    <a:pt x="2462057" y="191105"/>
+                  </a:lnTo>
+                  <a:lnTo>
+                    <a:pt x="2391712" y="190270"/>
+                  </a:lnTo>
+                  <a:lnTo>
+                    <a:pt x="2321368" y="189433"/>
+                  </a:lnTo>
+                  <a:lnTo>
+                    <a:pt x="2251023" y="188593"/>
+                  </a:lnTo>
+                  <a:lnTo>
+                    <a:pt x="2180679" y="187751"/>
+                  </a:lnTo>
+                  <a:lnTo>
+                    <a:pt x="2110334" y="186907"/>
+                  </a:lnTo>
+                  <a:lnTo>
+                    <a:pt x="2039990" y="186060"/>
+                  </a:lnTo>
+                  <a:lnTo>
+                    <a:pt x="1969645" y="185212"/>
+                  </a:lnTo>
+                  <a:lnTo>
+                    <a:pt x="1899301" y="184361"/>
+                  </a:lnTo>
+                  <a:lnTo>
+                    <a:pt x="1828956" y="183507"/>
+                  </a:lnTo>
+                  <a:lnTo>
+                    <a:pt x="1758612" y="182651"/>
+                  </a:lnTo>
+                  <a:lnTo>
+                    <a:pt x="1688267" y="181793"/>
+                  </a:lnTo>
+                  <a:lnTo>
+                    <a:pt x="1617923" y="180933"/>
+                  </a:lnTo>
+                  <a:lnTo>
+                    <a:pt x="1547578" y="180070"/>
+                  </a:lnTo>
+                  <a:lnTo>
+                    <a:pt x="1477234" y="179205"/>
+                  </a:lnTo>
+                  <a:lnTo>
+                    <a:pt x="1406889" y="178337"/>
+                  </a:lnTo>
+                  <a:lnTo>
+                    <a:pt x="1336545" y="177468"/>
+                  </a:lnTo>
+                  <a:lnTo>
+                    <a:pt x="1266200" y="176595"/>
+                  </a:lnTo>
+                  <a:lnTo>
+                    <a:pt x="1195856" y="175721"/>
+                  </a:lnTo>
+                  <a:lnTo>
+                    <a:pt x="1125511" y="174844"/>
+                  </a:lnTo>
+                  <a:lnTo>
+                    <a:pt x="1055167" y="173964"/>
+                  </a:lnTo>
+                  <a:lnTo>
+                    <a:pt x="984822" y="173082"/>
+                  </a:lnTo>
+                  <a:lnTo>
+                    <a:pt x="914478" y="172198"/>
+                  </a:lnTo>
+                  <a:lnTo>
+                    <a:pt x="844133" y="171311"/>
+                  </a:lnTo>
+                  <a:lnTo>
+                    <a:pt x="773789" y="170422"/>
+                  </a:lnTo>
+                  <a:lnTo>
+                    <a:pt x="703444" y="169531"/>
+                  </a:lnTo>
+                  <a:lnTo>
+                    <a:pt x="633100" y="168637"/>
+                  </a:lnTo>
+                  <a:lnTo>
+                    <a:pt x="562755" y="167740"/>
+                  </a:lnTo>
+                  <a:lnTo>
+                    <a:pt x="492411" y="166842"/>
+                  </a:lnTo>
+                  <a:lnTo>
+                    <a:pt x="422066" y="165940"/>
+                  </a:lnTo>
+                  <a:lnTo>
+                    <a:pt x="351722" y="165036"/>
+                  </a:lnTo>
+                  <a:lnTo>
+                    <a:pt x="281377" y="164130"/>
+                  </a:lnTo>
+                  <a:lnTo>
+                    <a:pt x="211033" y="163221"/>
+                  </a:lnTo>
+                  <a:lnTo>
+                    <a:pt x="140688" y="162310"/>
+                  </a:lnTo>
+                  <a:lnTo>
+                    <a:pt x="70344" y="161397"/>
+                  </a:lnTo>
+                  <a:lnTo>
+                    <a:pt x="0" y="160480"/>
+                  </a:lnTo>
+                  <a:close/>
+                </a:path>
+              </a:pathLst>
+            </a:custGeom>
+            <a:solidFill>
+              <a:srgbClr val="FF8C00">
+                <a:alpha val="20000"/>
+              </a:srgbClr>
+            </a:solidFill>
+          </p:spPr>
+          <p:txBody>
+            <a:bodyPr/>
+            <a:lstStyle/>
+            <a:p/>
+          </p:txBody>
+        </p:sp>
+        <p:sp>
+          <p:nvSpPr>
+            <p:cNvPr id="71" name="pl71"/>
+            <p:cNvSpPr/>
+            <p:nvPr/>
+          </p:nvSpPr>
+          <p:spPr>
+            <a:xfrm>
+              <a:off x="1235312" y="5097171"/>
+              <a:ext cx="6964104" cy="240068"/>
+            </a:xfrm>
+            <a:custGeom>
+              <a:avLst/>
+              <a:pathLst>
+                <a:path w="6964104" h="240068">
+                  <a:moveTo>
+                    <a:pt x="0" y="0"/>
+                  </a:moveTo>
+                  <a:lnTo>
+                    <a:pt x="70344" y="5896"/>
+                  </a:lnTo>
+                  <a:lnTo>
+                    <a:pt x="140688" y="11722"/>
+                  </a:lnTo>
+                  <a:lnTo>
+                    <a:pt x="211033" y="17479"/>
+                  </a:lnTo>
+                  <a:lnTo>
+                    <a:pt x="281377" y="23168"/>
+                  </a:lnTo>
+                  <a:lnTo>
+                    <a:pt x="351722" y="28789"/>
+                  </a:lnTo>
+                  <a:lnTo>
+                    <a:pt x="422066" y="34344"/>
+                  </a:lnTo>
+                  <a:lnTo>
+                    <a:pt x="492411" y="39832"/>
+                  </a:lnTo>
+                  <a:lnTo>
+                    <a:pt x="562755" y="45255"/>
+                  </a:lnTo>
+                  <a:lnTo>
+                    <a:pt x="633100" y="50614"/>
+                  </a:lnTo>
+                  <a:lnTo>
+                    <a:pt x="703444" y="55910"/>
+                  </a:lnTo>
+                  <a:lnTo>
+                    <a:pt x="773789" y="61142"/>
+                  </a:lnTo>
+                  <a:lnTo>
+                    <a:pt x="844133" y="66312"/>
+                  </a:lnTo>
+                  <a:lnTo>
+                    <a:pt x="914478" y="71421"/>
+                  </a:lnTo>
+                  <a:lnTo>
+                    <a:pt x="984822" y="76469"/>
+                  </a:lnTo>
+                  <a:lnTo>
+                    <a:pt x="1055167" y="81457"/>
+                  </a:lnTo>
+                  <a:lnTo>
+                    <a:pt x="1125511" y="86386"/>
+                  </a:lnTo>
+                  <a:lnTo>
+                    <a:pt x="1195856" y="91257"/>
+                  </a:lnTo>
+                  <a:lnTo>
+                    <a:pt x="1266200" y="96070"/>
+                  </a:lnTo>
+                  <a:lnTo>
+                    <a:pt x="1336545" y="100825"/>
+                  </a:lnTo>
+                  <a:lnTo>
+                    <a:pt x="1406889" y="105524"/>
+                  </a:lnTo>
+                  <a:lnTo>
+                    <a:pt x="1477234" y="110167"/>
+                  </a:lnTo>
+                  <a:lnTo>
+                    <a:pt x="1547578" y="114755"/>
+                  </a:lnTo>
+                  <a:lnTo>
+                    <a:pt x="1617923" y="119289"/>
+                  </a:lnTo>
+                  <a:lnTo>
+                    <a:pt x="1688267" y="123769"/>
+                  </a:lnTo>
+                  <a:lnTo>
+                    <a:pt x="1758612" y="128195"/>
+                  </a:lnTo>
+                  <a:lnTo>
+                    <a:pt x="1828956" y="132569"/>
+                  </a:lnTo>
+                  <a:lnTo>
+                    <a:pt x="1899301" y="136891"/>
+                  </a:lnTo>
+                  <a:lnTo>
+                    <a:pt x="1969645" y="141162"/>
+                  </a:lnTo>
+                  <a:lnTo>
+                    <a:pt x="2039990" y="145382"/>
+                  </a:lnTo>
+                  <a:lnTo>
+                    <a:pt x="2110334" y="149552"/>
+                  </a:lnTo>
+                  <a:lnTo>
+                    <a:pt x="2180679" y="153672"/>
+                  </a:lnTo>
+                  <a:lnTo>
+                    <a:pt x="2251023" y="157743"/>
+                  </a:lnTo>
+                  <a:lnTo>
+                    <a:pt x="2321368" y="161766"/>
+                  </a:lnTo>
+                  <a:lnTo>
+                    <a:pt x="2391712" y="165742"/>
+                  </a:lnTo>
+                  <a:lnTo>
+                    <a:pt x="2462057" y="169670"/>
+                  </a:lnTo>
+                  <a:lnTo>
+                    <a:pt x="2532401" y="173551"/>
+                  </a:lnTo>
+                  <a:lnTo>
+                    <a:pt x="2602746" y="177386"/>
+                  </a:lnTo>
+                  <a:lnTo>
+                    <a:pt x="2673090" y="181176"/>
+                  </a:lnTo>
+                  <a:lnTo>
+                    <a:pt x="2743435" y="184921"/>
+                  </a:lnTo>
+                  <a:lnTo>
+                    <a:pt x="2813779" y="188621"/>
+                  </a:lnTo>
+                  <a:lnTo>
+                    <a:pt x="2884124" y="192278"/>
+                  </a:lnTo>
+                  <a:lnTo>
+                    <a:pt x="2954468" y="195891"/>
+                  </a:lnTo>
+                  <a:lnTo>
+                    <a:pt x="3024813" y="197703"/>
+                  </a:lnTo>
+                  <a:lnTo>
+                    <a:pt x="3095157" y="198518"/>
+                  </a:lnTo>
+                  <a:lnTo>
+                    <a:pt x="3165502" y="199330"/>
+                  </a:lnTo>
+                  <a:lnTo>
+                    <a:pt x="3235846" y="200141"/>
+                  </a:lnTo>
+                  <a:lnTo>
+                    <a:pt x="3306191" y="200949"/>
+                  </a:lnTo>
+                  <a:lnTo>
+                    <a:pt x="3376535" y="201755"/>
+                  </a:lnTo>
+                  <a:lnTo>
+                    <a:pt x="3446880" y="202558"/>
+                  </a:lnTo>
+                  <a:lnTo>
+                    <a:pt x="3517224" y="203360"/>
+                  </a:lnTo>
+                  <a:lnTo>
+                    <a:pt x="3587569" y="204159"/>
+                  </a:lnTo>
+                  <a:lnTo>
+                    <a:pt x="3657913" y="204956"/>
+                  </a:lnTo>
+                  <a:lnTo>
+                    <a:pt x="3728257" y="205751"/>
+                  </a:lnTo>
+                  <a:lnTo>
+                    <a:pt x="3798602" y="206544"/>
+                  </a:lnTo>
+                  <a:lnTo>
+                    <a:pt x="3868946" y="207335"/>
+                  </a:lnTo>
+                  <a:lnTo>
+                    <a:pt x="3939291" y="208123"/>
+                  </a:lnTo>
+                  <a:lnTo>
+                    <a:pt x="4009635" y="208909"/>
+                  </a:lnTo>
+                  <a:lnTo>
+                    <a:pt x="4079980" y="209693"/>
+                  </a:lnTo>
+                  <a:lnTo>
+                    <a:pt x="4150324" y="210475"/>
+                  </a:lnTo>
+                  <a:lnTo>
+                    <a:pt x="4220669" y="211255"/>
+                  </a:lnTo>
+                  <a:lnTo>
+                    <a:pt x="4291013" y="212033"/>
+                  </a:lnTo>
+                  <a:lnTo>
+                    <a:pt x="4361358" y="212809"/>
+                  </a:lnTo>
+                  <a:lnTo>
+                    <a:pt x="4431702" y="213582"/>
+                  </a:lnTo>
+                  <a:lnTo>
+                    <a:pt x="4502047" y="214354"/>
+                  </a:lnTo>
+                  <a:lnTo>
+                    <a:pt x="4572391" y="215123"/>
+                  </a:lnTo>
+                  <a:lnTo>
+                    <a:pt x="4642736" y="215890"/>
+                  </a:lnTo>
+                  <a:lnTo>
+                    <a:pt x="4713080" y="216655"/>
+                  </a:lnTo>
+                  <a:lnTo>
+                    <a:pt x="4783425" y="217418"/>
+                  </a:lnTo>
+                  <a:lnTo>
+                    <a:pt x="4853769" y="218179"/>
+                  </a:lnTo>
+                  <a:lnTo>
+                    <a:pt x="4924114" y="218938"/>
+                  </a:lnTo>
+                  <a:lnTo>
+                    <a:pt x="4994458" y="219695"/>
+                  </a:lnTo>
+                  <a:lnTo>
+                    <a:pt x="5064803" y="220450"/>
+                  </a:lnTo>
+                  <a:lnTo>
+                    <a:pt x="5135147" y="221203"/>
+                  </a:lnTo>
+                  <a:lnTo>
+                    <a:pt x="5205492" y="221953"/>
+                  </a:lnTo>
+                  <a:lnTo>
+                    <a:pt x="5275836" y="222702"/>
+                  </a:lnTo>
+                  <a:lnTo>
+                    <a:pt x="5346181" y="223448"/>
+                  </a:lnTo>
+                  <a:lnTo>
+                    <a:pt x="5416525" y="224193"/>
+                  </a:lnTo>
+                  <a:lnTo>
+                    <a:pt x="5486870" y="224935"/>
+                  </a:lnTo>
+                  <a:lnTo>
+                    <a:pt x="5557214" y="225676"/>
+                  </a:lnTo>
+                  <a:lnTo>
+                    <a:pt x="5627559" y="226414"/>
+                  </a:lnTo>
+                  <a:lnTo>
+                    <a:pt x="5697903" y="227151"/>
+                  </a:lnTo>
+                  <a:lnTo>
+                    <a:pt x="5768248" y="227885"/>
+                  </a:lnTo>
+                  <a:lnTo>
+                    <a:pt x="5838592" y="228618"/>
+                  </a:lnTo>
+                  <a:lnTo>
+                    <a:pt x="5908937" y="229348"/>
+                  </a:lnTo>
+                  <a:lnTo>
+                    <a:pt x="5979281" y="230076"/>
+                  </a:lnTo>
+                  <a:lnTo>
+                    <a:pt x="6049626" y="230803"/>
+                  </a:lnTo>
+                  <a:lnTo>
+                    <a:pt x="6119970" y="231527"/>
+                  </a:lnTo>
+                  <a:lnTo>
+                    <a:pt x="6190315" y="232250"/>
+                  </a:lnTo>
+                  <a:lnTo>
+                    <a:pt x="6260659" y="232970"/>
+                  </a:lnTo>
+                  <a:lnTo>
+                    <a:pt x="6331004" y="233689"/>
+                  </a:lnTo>
+                  <a:lnTo>
+                    <a:pt x="6401348" y="234406"/>
+                  </a:lnTo>
+                  <a:lnTo>
+                    <a:pt x="6471693" y="235120"/>
+                  </a:lnTo>
+                  <a:lnTo>
+                    <a:pt x="6542037" y="235833"/>
+                  </a:lnTo>
+                  <a:lnTo>
+                    <a:pt x="6612382" y="236544"/>
+                  </a:lnTo>
+                  <a:lnTo>
+                    <a:pt x="6682726" y="237252"/>
+                  </a:lnTo>
+                  <a:lnTo>
+                    <a:pt x="6753071" y="237959"/>
+                  </a:lnTo>
+                  <a:lnTo>
+                    <a:pt x="6823415" y="238664"/>
+                  </a:lnTo>
+                  <a:lnTo>
+                    <a:pt x="6893760" y="239367"/>
+                  </a:lnTo>
+                  <a:lnTo>
+                    <a:pt x="6964104" y="240068"/>
+                  </a:lnTo>
+                </a:path>
+              </a:pathLst>
+            </a:custGeom>
+          </p:spPr>
+          <p:txBody>
+            <a:bodyPr/>
+            <a:lstStyle/>
+            <a:p/>
+          </p:txBody>
+        </p:sp>
+        <p:sp>
+          <p:nvSpPr>
+            <p:cNvPr id="72" name="pl72"/>
+            <p:cNvSpPr/>
+            <p:nvPr/>
+          </p:nvSpPr>
+          <p:spPr>
+            <a:xfrm>
+              <a:off x="1235312" y="5257652"/>
+              <a:ext cx="6964104" cy="183877"/>
+            </a:xfrm>
+            <a:custGeom>
+              <a:avLst/>
+              <a:pathLst>
+                <a:path w="6964104" h="183877">
+                  <a:moveTo>
+                    <a:pt x="6964104" y="183877"/>
+                  </a:moveTo>
+                  <a:lnTo>
+                    <a:pt x="6893760" y="182049"/>
+                  </a:lnTo>
+                  <a:lnTo>
+                    <a:pt x="6823415" y="180198"/>
+                  </a:lnTo>
+                  <a:lnTo>
+                    <a:pt x="6753071" y="178325"/>
+                  </a:lnTo>
+                  <a:lnTo>
+                    <a:pt x="6682726" y="176430"/>
+                  </a:lnTo>
+                  <a:lnTo>
+                    <a:pt x="6612382" y="174512"/>
+                  </a:lnTo>
+                  <a:lnTo>
+                    <a:pt x="6542037" y="172571"/>
+                  </a:lnTo>
+                  <a:lnTo>
+                    <a:pt x="6471693" y="170606"/>
+                  </a:lnTo>
+                  <a:lnTo>
+                    <a:pt x="6401348" y="168618"/>
+                  </a:lnTo>
+                  <a:lnTo>
+                    <a:pt x="6331004" y="166606"/>
+                  </a:lnTo>
+                  <a:lnTo>
+                    <a:pt x="6260659" y="164570"/>
+                  </a:lnTo>
+                  <a:lnTo>
+                    <a:pt x="6190315" y="162509"/>
+                  </a:lnTo>
+                  <a:lnTo>
+                    <a:pt x="6119970" y="160424"/>
+                  </a:lnTo>
+                  <a:lnTo>
+                    <a:pt x="6049626" y="158313"/>
+                  </a:lnTo>
+                  <a:lnTo>
+                    <a:pt x="5979281" y="156177"/>
+                  </a:lnTo>
+                  <a:lnTo>
+                    <a:pt x="5908937" y="154016"/>
+                  </a:lnTo>
+                  <a:lnTo>
+                    <a:pt x="5838592" y="151828"/>
+                  </a:lnTo>
+                  <a:lnTo>
+                    <a:pt x="5768248" y="149614"/>
+                  </a:lnTo>
+                  <a:lnTo>
+                    <a:pt x="5697903" y="147374"/>
+                  </a:lnTo>
+                  <a:lnTo>
+                    <a:pt x="5627559" y="145107"/>
+                  </a:lnTo>
+                  <a:lnTo>
+                    <a:pt x="5557214" y="142812"/>
+                  </a:lnTo>
+                  <a:lnTo>
+                    <a:pt x="5486870" y="140490"/>
+                  </a:lnTo>
+                  <a:lnTo>
+                    <a:pt x="5416525" y="138140"/>
+                  </a:lnTo>
+                  <a:lnTo>
+                    <a:pt x="5346181" y="135761"/>
+                  </a:lnTo>
+                  <a:lnTo>
+                    <a:pt x="5275836" y="133354"/>
+                  </a:lnTo>
+                  <a:lnTo>
+                    <a:pt x="5205492" y="130919"/>
+                  </a:lnTo>
+                  <a:lnTo>
+                    <a:pt x="5135147" y="128454"/>
+                  </a:lnTo>
+                  <a:lnTo>
+                    <a:pt x="5064803" y="125959"/>
+                  </a:lnTo>
+                  <a:lnTo>
+                    <a:pt x="4994458" y="123434"/>
+                  </a:lnTo>
+                  <a:lnTo>
+                    <a:pt x="4924114" y="120879"/>
+                  </a:lnTo>
+                  <a:lnTo>
+                    <a:pt x="4853769" y="118293"/>
+                  </a:lnTo>
+                  <a:lnTo>
+                    <a:pt x="4783425" y="115676"/>
+                  </a:lnTo>
+                  <a:lnTo>
+                    <a:pt x="4713080" y="113028"/>
+                  </a:lnTo>
+                  <a:lnTo>
+                    <a:pt x="4642736" y="110348"/>
+                  </a:lnTo>
+                  <a:lnTo>
+                    <a:pt x="4572391" y="107636"/>
+                  </a:lnTo>
+                  <a:lnTo>
+                    <a:pt x="4502047" y="104891"/>
+                  </a:lnTo>
+                  <a:lnTo>
+                    <a:pt x="4431702" y="102113"/>
+                  </a:lnTo>
+                  <a:lnTo>
+                    <a:pt x="4361358" y="99302"/>
+                  </a:lnTo>
+                  <a:lnTo>
+                    <a:pt x="4291013" y="96456"/>
+                  </a:lnTo>
+                  <a:lnTo>
+                    <a:pt x="4220669" y="93577"/>
+                  </a:lnTo>
+                  <a:lnTo>
+                    <a:pt x="4150324" y="90663"/>
+                  </a:lnTo>
+                  <a:lnTo>
+                    <a:pt x="4079980" y="87714"/>
+                  </a:lnTo>
+                  <a:lnTo>
+                    <a:pt x="4009635" y="84730"/>
+                  </a:lnTo>
+                  <a:lnTo>
+                    <a:pt x="3939291" y="81710"/>
+                  </a:lnTo>
+                  <a:lnTo>
+                    <a:pt x="3868946" y="78653"/>
+                  </a:lnTo>
+                  <a:lnTo>
+                    <a:pt x="3798602" y="75560"/>
+                  </a:lnTo>
+                  <a:lnTo>
+                    <a:pt x="3728257" y="72430"/>
+                  </a:lnTo>
+                  <a:lnTo>
+                    <a:pt x="3657913" y="69262"/>
+                  </a:lnTo>
+                  <a:lnTo>
+                    <a:pt x="3587569" y="66056"/>
+                  </a:lnTo>
+                  <a:lnTo>
+                    <a:pt x="3517224" y="62811"/>
+                  </a:lnTo>
+                  <a:lnTo>
+                    <a:pt x="3446880" y="59527"/>
+                  </a:lnTo>
+                  <a:lnTo>
+                    <a:pt x="3376535" y="56204"/>
+                  </a:lnTo>
+                  <a:lnTo>
+                    <a:pt x="3306191" y="52841"/>
+                  </a:lnTo>
+                  <a:lnTo>
+                    <a:pt x="3235846" y="49438"/>
+                  </a:lnTo>
+                  <a:lnTo>
+                    <a:pt x="3165502" y="45993"/>
+                  </a:lnTo>
+                  <a:lnTo>
+                    <a:pt x="3095157" y="42508"/>
+                  </a:lnTo>
+                  <a:lnTo>
+                    <a:pt x="3024813" y="38980"/>
+                  </a:lnTo>
+                  <a:lnTo>
+                    <a:pt x="2954468" y="36405"/>
+                  </a:lnTo>
+                  <a:lnTo>
+                    <a:pt x="2884124" y="35586"/>
+                  </a:lnTo>
+                  <a:lnTo>
+                    <a:pt x="2813779" y="34765"/>
+                  </a:lnTo>
+                  <a:lnTo>
+                    <a:pt x="2743435" y="33941"/>
+                  </a:lnTo>
+                  <a:lnTo>
+                    <a:pt x="2673090" y="33115"/>
+                  </a:lnTo>
+                  <a:lnTo>
+                    <a:pt x="2602746" y="32287"/>
+                  </a:lnTo>
+                  <a:lnTo>
+                    <a:pt x="2532401" y="31457"/>
+                  </a:lnTo>
+                  <a:lnTo>
+                    <a:pt x="2462057" y="30624"/>
+                  </a:lnTo>
+                  <a:lnTo>
+                    <a:pt x="2391712" y="29789"/>
+                  </a:lnTo>
+                  <a:lnTo>
+                    <a:pt x="2321368" y="28952"/>
+                  </a:lnTo>
+                  <a:lnTo>
+                    <a:pt x="2251023" y="28112"/>
+                  </a:lnTo>
+                  <a:lnTo>
+                    <a:pt x="2180679" y="27270"/>
+                  </a:lnTo>
+                  <a:lnTo>
+                    <a:pt x="2110334" y="26426"/>
+                  </a:lnTo>
+                  <a:lnTo>
+                    <a:pt x="2039990" y="25580"/>
+                  </a:lnTo>
+                  <a:lnTo>
+                    <a:pt x="1969645" y="24731"/>
+                  </a:lnTo>
+                  <a:lnTo>
+                    <a:pt x="1899301" y="23880"/>
+                  </a:lnTo>
+                  <a:lnTo>
+                    <a:pt x="1828956" y="23026"/>
+                  </a:lnTo>
+                  <a:lnTo>
+                    <a:pt x="1758612" y="22171"/>
+                  </a:lnTo>
+                  <a:lnTo>
+                    <a:pt x="1688267" y="21313"/>
+                  </a:lnTo>
+                  <a:lnTo>
+                    <a:pt x="1617923" y="20452"/>
+                  </a:lnTo>
+                  <a:lnTo>
+                    <a:pt x="1547578" y="19589"/>
+                  </a:lnTo>
+                  <a:lnTo>
+                    <a:pt x="1477234" y="18724"/>
+                  </a:lnTo>
+                  <a:lnTo>
+                    <a:pt x="1406889" y="17857"/>
+                  </a:lnTo>
+                  <a:lnTo>
+                    <a:pt x="1336545" y="16987"/>
+                  </a:lnTo>
+                  <a:lnTo>
+                    <a:pt x="1266200" y="16114"/>
+                  </a:lnTo>
+                  <a:lnTo>
+                    <a:pt x="1195856" y="15240"/>
+                  </a:lnTo>
+                  <a:lnTo>
+                    <a:pt x="1125511" y="14363"/>
+                  </a:lnTo>
+                  <a:lnTo>
+                    <a:pt x="1055167" y="13483"/>
+                  </a:lnTo>
+                  <a:lnTo>
+                    <a:pt x="984822" y="12602"/>
+                  </a:lnTo>
+                  <a:lnTo>
+                    <a:pt x="914478" y="11717"/>
+                  </a:lnTo>
+                  <a:lnTo>
+                    <a:pt x="844133" y="10831"/>
+                  </a:lnTo>
+                  <a:lnTo>
+                    <a:pt x="773789" y="9941"/>
+                  </a:lnTo>
+                  <a:lnTo>
+                    <a:pt x="703444" y="9050"/>
+                  </a:lnTo>
+                  <a:lnTo>
+                    <a:pt x="633100" y="8156"/>
+                  </a:lnTo>
+                  <a:lnTo>
+                    <a:pt x="562755" y="7260"/>
+                  </a:lnTo>
+                  <a:lnTo>
+                    <a:pt x="492411" y="6361"/>
+                  </a:lnTo>
+                  <a:lnTo>
+                    <a:pt x="422066" y="5459"/>
+                  </a:lnTo>
+                  <a:lnTo>
+                    <a:pt x="351722" y="4556"/>
+                  </a:lnTo>
+                  <a:lnTo>
+                    <a:pt x="281377" y="3649"/>
+                  </a:lnTo>
+                  <a:lnTo>
+                    <a:pt x="211033" y="2741"/>
+                  </a:lnTo>
+                  <a:lnTo>
+                    <a:pt x="140688" y="1829"/>
+                  </a:lnTo>
+                  <a:lnTo>
+                    <a:pt x="70344" y="916"/>
+                  </a:lnTo>
+                  <a:lnTo>
+                    <a:pt x="0" y="0"/>
+                  </a:lnTo>
+                </a:path>
+              </a:pathLst>
+            </a:custGeom>
+          </p:spPr>
+          <p:txBody>
+            <a:bodyPr/>
+            <a:lstStyle/>
+            <a:p/>
+          </p:txBody>
+        </p:sp>
+        <p:sp>
+          <p:nvSpPr>
+            <p:cNvPr id="73" name="pl73"/>
+            <p:cNvSpPr/>
+            <p:nvPr/>
+          </p:nvSpPr>
+          <p:spPr>
+            <a:xfrm>
+              <a:off x="1235312" y="5185219"/>
+              <a:ext cx="6964104" cy="210933"/>
+            </a:xfrm>
+            <a:custGeom>
+              <a:avLst/>
+              <a:pathLst>
+                <a:path w="6964104" h="210933">
+                  <a:moveTo>
+                    <a:pt x="0" y="0"/>
+                  </a:moveTo>
+                  <a:lnTo>
+                    <a:pt x="70344" y="2986"/>
+                  </a:lnTo>
+                  <a:lnTo>
+                    <a:pt x="140688" y="5951"/>
+                  </a:lnTo>
+                  <a:lnTo>
+                    <a:pt x="211033" y="8894"/>
+                  </a:lnTo>
+                  <a:lnTo>
+                    <a:pt x="281377" y="11815"/>
+                  </a:lnTo>
+                  <a:lnTo>
+                    <a:pt x="351722" y="14715"/>
+                  </a:lnTo>
+                  <a:lnTo>
+                    <a:pt x="422066" y="17594"/>
+                  </a:lnTo>
+                  <a:lnTo>
+                    <a:pt x="492411" y="20452"/>
+                  </a:lnTo>
+                  <a:lnTo>
+                    <a:pt x="562755" y="23289"/>
+                  </a:lnTo>
+                  <a:lnTo>
+                    <a:pt x="633100" y="26105"/>
+                  </a:lnTo>
+                  <a:lnTo>
+                    <a:pt x="703444" y="28901"/>
+                  </a:lnTo>
+                  <a:lnTo>
+                    <a:pt x="773789" y="31676"/>
+                  </a:lnTo>
+                  <a:lnTo>
+                    <a:pt x="844133" y="34431"/>
+                  </a:lnTo>
+                  <a:lnTo>
+                    <a:pt x="914478" y="37166"/>
+                  </a:lnTo>
+                  <a:lnTo>
+                    <a:pt x="984822" y="39881"/>
+                  </a:lnTo>
+                  <a:lnTo>
+                    <a:pt x="1055167" y="42576"/>
+                  </a:lnTo>
+                  <a:lnTo>
+                    <a:pt x="1125511" y="45251"/>
+                  </a:lnTo>
+                  <a:lnTo>
+                    <a:pt x="1195856" y="47907"/>
+                  </a:lnTo>
+                  <a:lnTo>
+                    <a:pt x="1266200" y="50543"/>
+                  </a:lnTo>
+                  <a:lnTo>
+                    <a:pt x="1336545" y="53160"/>
+                  </a:lnTo>
+                  <a:lnTo>
+                    <a:pt x="1406889" y="55758"/>
+                  </a:lnTo>
+                  <a:lnTo>
+                    <a:pt x="1477234" y="58336"/>
+                  </a:lnTo>
+                  <a:lnTo>
+                    <a:pt x="1547578" y="60896"/>
+                  </a:lnTo>
+                  <a:lnTo>
+                    <a:pt x="1617923" y="63438"/>
+                  </a:lnTo>
+                  <a:lnTo>
+                    <a:pt x="1688267" y="65960"/>
+                  </a:lnTo>
+                  <a:lnTo>
+                    <a:pt x="1758612" y="68465"/>
+                  </a:lnTo>
+                  <a:lnTo>
+                    <a:pt x="1828956" y="70951"/>
+                  </a:lnTo>
+                  <a:lnTo>
+                    <a:pt x="1899301" y="73418"/>
+                  </a:lnTo>
+                  <a:lnTo>
+                    <a:pt x="1969645" y="75868"/>
+                  </a:lnTo>
+                  <a:lnTo>
+                    <a:pt x="2039990" y="78300"/>
+                  </a:lnTo>
+                  <a:lnTo>
+                    <a:pt x="2110334" y="80714"/>
+                  </a:lnTo>
+                  <a:lnTo>
+                    <a:pt x="2180679" y="83110"/>
+                  </a:lnTo>
+                  <a:lnTo>
+                    <a:pt x="2251023" y="85489"/>
+                  </a:lnTo>
+                  <a:lnTo>
+                    <a:pt x="2321368" y="87851"/>
+                  </a:lnTo>
+                  <a:lnTo>
+                    <a:pt x="2391712" y="90195"/>
+                  </a:lnTo>
+                  <a:lnTo>
+                    <a:pt x="2462057" y="92522"/>
+                  </a:lnTo>
+                  <a:lnTo>
+                    <a:pt x="2532401" y="94832"/>
+                  </a:lnTo>
+                  <a:lnTo>
+                    <a:pt x="2602746" y="97125"/>
+                  </a:lnTo>
+                  <a:lnTo>
+                    <a:pt x="2673090" y="99401"/>
+                  </a:lnTo>
+                  <a:lnTo>
+                    <a:pt x="2743435" y="101661"/>
+                  </a:lnTo>
+                  <a:lnTo>
+                    <a:pt x="2813779" y="103904"/>
+                  </a:lnTo>
+                  <a:lnTo>
+                    <a:pt x="2884124" y="106131"/>
+                  </a:lnTo>
+                  <a:lnTo>
+                    <a:pt x="2954468" y="108342"/>
+                  </a:lnTo>
+                  <a:lnTo>
+                    <a:pt x="3024813" y="110536"/>
+                  </a:lnTo>
+                  <a:lnTo>
+                    <a:pt x="3095157" y="112714"/>
+                  </a:lnTo>
+                  <a:lnTo>
+                    <a:pt x="3165502" y="114877"/>
+                  </a:lnTo>
+                  <a:lnTo>
+                    <a:pt x="3235846" y="117023"/>
+                  </a:lnTo>
+                  <a:lnTo>
+                    <a:pt x="3306191" y="119154"/>
+                  </a:lnTo>
+                  <a:lnTo>
+                    <a:pt x="3376535" y="121270"/>
+                  </a:lnTo>
+                  <a:lnTo>
+                    <a:pt x="3446880" y="123370"/>
+                  </a:lnTo>
+                  <a:lnTo>
+                    <a:pt x="3517224" y="125454"/>
+                  </a:lnTo>
+                  <a:lnTo>
+                    <a:pt x="3587569" y="127523"/>
+                  </a:lnTo>
+                  <a:lnTo>
+                    <a:pt x="3657913" y="129577"/>
+                  </a:lnTo>
+                  <a:lnTo>
+                    <a:pt x="3728257" y="131617"/>
+                  </a:lnTo>
+                  <a:lnTo>
+                    <a:pt x="3798602" y="133641"/>
+                  </a:lnTo>
+                  <a:lnTo>
+                    <a:pt x="3868946" y="135650"/>
+                  </a:lnTo>
+                  <a:lnTo>
+                    <a:pt x="3939291" y="137645"/>
+                  </a:lnTo>
+                  <a:lnTo>
+                    <a:pt x="4009635" y="139625"/>
+                  </a:lnTo>
+                  <a:lnTo>
+                    <a:pt x="4079980" y="141591"/>
+                  </a:lnTo>
+                  <a:lnTo>
+                    <a:pt x="4150324" y="143542"/>
+                  </a:lnTo>
+                  <a:lnTo>
+                    <a:pt x="4220669" y="145479"/>
+                  </a:lnTo>
+                  <a:lnTo>
+                    <a:pt x="4291013" y="147402"/>
+                  </a:lnTo>
+                  <a:lnTo>
+                    <a:pt x="4361358" y="149311"/>
+                  </a:lnTo>
+                  <a:lnTo>
+                    <a:pt x="4431702" y="151205"/>
+                  </a:lnTo>
+                  <a:lnTo>
+                    <a:pt x="4502047" y="153086"/>
+                  </a:lnTo>
+                  <a:lnTo>
+                    <a:pt x="4572391" y="154954"/>
+                  </a:lnTo>
+                  <a:lnTo>
+                    <a:pt x="4642736" y="156807"/>
+                  </a:lnTo>
+                  <a:lnTo>
+                    <a:pt x="4713080" y="158647"/>
+                  </a:lnTo>
+                  <a:lnTo>
+                    <a:pt x="4783425" y="160474"/>
+                  </a:lnTo>
+                  <a:lnTo>
+                    <a:pt x="4853769" y="162287"/>
+                  </a:lnTo>
+                  <a:lnTo>
+                    <a:pt x="4924114" y="164087"/>
+                  </a:lnTo>
+                  <a:lnTo>
+                    <a:pt x="4994458" y="165874"/>
+                  </a:lnTo>
+                  <a:lnTo>
+                    <a:pt x="5064803" y="167647"/>
+                  </a:lnTo>
+                  <a:lnTo>
+                    <a:pt x="5135147" y="169408"/>
+                  </a:lnTo>
+                  <a:lnTo>
+                    <a:pt x="5205492" y="171156"/>
+                  </a:lnTo>
+                  <a:lnTo>
+                    <a:pt x="5275836" y="172891"/>
+                  </a:lnTo>
+                  <a:lnTo>
+                    <a:pt x="5346181" y="174614"/>
+                  </a:lnTo>
+                  <a:lnTo>
+                    <a:pt x="5416525" y="176323"/>
+                  </a:lnTo>
+                  <a:lnTo>
+                    <a:pt x="5486870" y="178021"/>
+                  </a:lnTo>
+                  <a:lnTo>
+                    <a:pt x="5557214" y="179706"/>
+                  </a:lnTo>
+                  <a:lnTo>
+                    <a:pt x="5627559" y="181378"/>
+                  </a:lnTo>
+                  <a:lnTo>
+                    <a:pt x="5697903" y="183039"/>
+                  </a:lnTo>
+                  <a:lnTo>
+                    <a:pt x="5768248" y="184687"/>
+                  </a:lnTo>
+                  <a:lnTo>
+                    <a:pt x="5838592" y="186323"/>
+                  </a:lnTo>
+                  <a:lnTo>
+                    <a:pt x="5908937" y="187947"/>
+                  </a:lnTo>
+                  <a:lnTo>
+                    <a:pt x="5979281" y="189560"/>
+                  </a:lnTo>
+                  <a:lnTo>
+                    <a:pt x="6049626" y="191160"/>
+                  </a:lnTo>
+                  <a:lnTo>
+                    <a:pt x="6119970" y="192749"/>
+                  </a:lnTo>
+                  <a:lnTo>
+                    <a:pt x="6190315" y="194326"/>
+                  </a:lnTo>
+                  <a:lnTo>
+                    <a:pt x="6260659" y="195892"/>
+                  </a:lnTo>
+                  <a:lnTo>
+                    <a:pt x="6331004" y="197446"/>
+                  </a:lnTo>
+                  <a:lnTo>
+                    <a:pt x="6401348" y="198989"/>
+                  </a:lnTo>
+                  <a:lnTo>
+                    <a:pt x="6471693" y="200521"/>
+                  </a:lnTo>
+                  <a:lnTo>
+                    <a:pt x="6542037" y="202041"/>
+                  </a:lnTo>
+                  <a:lnTo>
+                    <a:pt x="6612382" y="203550"/>
+                  </a:lnTo>
+                  <a:lnTo>
+                    <a:pt x="6682726" y="205049"/>
+                  </a:lnTo>
+                  <a:lnTo>
+                    <a:pt x="6753071" y="206536"/>
+                  </a:lnTo>
+                  <a:lnTo>
+                    <a:pt x="6823415" y="208012"/>
+                  </a:lnTo>
+                  <a:lnTo>
+                    <a:pt x="6893760" y="209478"/>
+                  </a:lnTo>
+                  <a:lnTo>
+                    <a:pt x="6964104" y="210933"/>
+                  </a:lnTo>
+                </a:path>
+              </a:pathLst>
+            </a:custGeom>
+            <a:ln w="27101" cap="flat">
+              <a:solidFill>
+                <a:srgbClr val="FF8C00">
+                  <a:alpha val="100000"/>
+                </a:srgbClr>
+              </a:solidFill>
+              <a:prstDash val="solid"/>
+              <a:round/>
+            </a:ln>
+          </p:spPr>
+          <p:txBody>
+            <a:bodyPr/>
+            <a:lstStyle/>
+            <a:p/>
+          </p:txBody>
+        </p:sp>
+        <p:sp>
+          <p:nvSpPr>
+            <p:cNvPr id="74" name="pl74"/>
+            <p:cNvSpPr/>
+            <p:nvPr/>
+          </p:nvSpPr>
+          <p:spPr>
+            <a:xfrm>
+              <a:off x="887106" y="5294352"/>
+              <a:ext cx="7660515" cy="0"/>
+            </a:xfrm>
+            <a:custGeom>
+              <a:avLst/>
+              <a:pathLst>
+                <a:path w="7660515" h="0">
+                  <a:moveTo>
+                    <a:pt x="0" y="0"/>
+                  </a:moveTo>
+                  <a:lnTo>
+                    <a:pt x="7660515" y="0"/>
+                  </a:lnTo>
+                  <a:lnTo>
+                    <a:pt x="7660515" y="0"/>
+                  </a:lnTo>
+                </a:path>
+              </a:pathLst>
+            </a:custGeom>
+            <a:ln w="13550" cap="flat">
+              <a:solidFill>
+                <a:srgbClr val="7F7F7F">
+                  <a:alpha val="100000"/>
+                </a:srgbClr>
+              </a:solidFill>
+              <a:prstDash val="dash"/>
+              <a:round/>
+            </a:ln>
+          </p:spPr>
+          <p:txBody>
+            <a:bodyPr/>
+            <a:lstStyle/>
+            <a:p/>
+          </p:txBody>
+        </p:sp>
+        <p:sp>
+          <p:nvSpPr>
+            <p:cNvPr id="75" name="pl75"/>
+            <p:cNvSpPr/>
+            <p:nvPr/>
+          </p:nvSpPr>
+          <p:spPr>
+            <a:xfrm>
+              <a:off x="4215100" y="4336484"/>
+              <a:ext cx="0" cy="1317069"/>
+            </a:xfrm>
+            <a:custGeom>
+              <a:avLst/>
+              <a:pathLst>
+                <a:path w="0" h="1317069">
+                  <a:moveTo>
+                    <a:pt x="0" y="1317069"/>
+                  </a:moveTo>
+                  <a:lnTo>
+                    <a:pt x="0" y="0"/>
+                  </a:lnTo>
+                  <a:lnTo>
+                    <a:pt x="0" y="0"/>
+                  </a:lnTo>
+                </a:path>
+              </a:pathLst>
+            </a:custGeom>
+            <a:ln w="13550" cap="flat">
+              <a:solidFill>
+                <a:srgbClr val="666666">
+                  <a:alpha val="100000"/>
+                </a:srgbClr>
+              </a:solidFill>
+              <a:prstDash val="dot"/>
+              <a:round/>
+            </a:ln>
+          </p:spPr>
+          <p:txBody>
+            <a:bodyPr/>
+            <a:lstStyle/>
+            <a:p/>
+          </p:txBody>
+        </p:sp>
+        <p:sp>
+          <p:nvSpPr>
+            <p:cNvPr id="76" name="pl76"/>
+            <p:cNvSpPr/>
+            <p:nvPr/>
+          </p:nvSpPr>
+          <p:spPr>
+            <a:xfrm>
+              <a:off x="3046793" y="4336484"/>
+              <a:ext cx="0" cy="1317069"/>
+            </a:xfrm>
+            <a:custGeom>
+              <a:avLst/>
+              <a:pathLst>
+                <a:path w="0" h="1317069">
+                  <a:moveTo>
+                    <a:pt x="0" y="1317069"/>
+                  </a:moveTo>
+                  <a:lnTo>
+                    <a:pt x="0" y="0"/>
+                  </a:lnTo>
+                  <a:lnTo>
+                    <a:pt x="0" y="0"/>
+                  </a:lnTo>
+                </a:path>
+              </a:pathLst>
+            </a:custGeom>
+            <a:ln w="13550" cap="flat">
+              <a:solidFill>
+                <a:srgbClr val="4682B4">
+                  <a:alpha val="69803"/>
+                </a:srgbClr>
+              </a:solidFill>
+              <a:prstDash val="dash"/>
+              <a:round/>
+            </a:ln>
+          </p:spPr>
+          <p:txBody>
+            <a:bodyPr/>
+            <a:lstStyle/>
+            <a:p/>
+          </p:txBody>
+        </p:sp>
+        <p:sp>
+          <p:nvSpPr>
+            <p:cNvPr id="77" name="pl77"/>
+            <p:cNvSpPr/>
+            <p:nvPr/>
+          </p:nvSpPr>
+          <p:spPr>
+            <a:xfrm>
+              <a:off x="5409191" y="4336484"/>
+              <a:ext cx="0" cy="1317069"/>
+            </a:xfrm>
+            <a:custGeom>
+              <a:avLst/>
+              <a:pathLst>
+                <a:path w="0" h="1317069">
+                  <a:moveTo>
+                    <a:pt x="0" y="1317069"/>
+                  </a:moveTo>
+                  <a:lnTo>
+                    <a:pt x="0" y="0"/>
+                  </a:lnTo>
+                  <a:lnTo>
+                    <a:pt x="0" y="0"/>
+                  </a:lnTo>
+                </a:path>
+              </a:pathLst>
+            </a:custGeom>
+            <a:ln w="13550" cap="flat">
+              <a:solidFill>
+                <a:srgbClr val="4682B4">
+                  <a:alpha val="69803"/>
+                </a:srgbClr>
+              </a:solidFill>
+              <a:prstDash val="dash"/>
+              <a:round/>
+            </a:ln>
+          </p:spPr>
+          <p:txBody>
+            <a:bodyPr/>
+            <a:lstStyle/>
+            <a:p/>
+          </p:txBody>
+        </p:sp>
+        <p:sp>
+          <p:nvSpPr>
+            <p:cNvPr id="78" name="tx78"/>
+            <p:cNvSpPr/>
+            <p:nvPr/>
+          </p:nvSpPr>
+          <p:spPr>
+            <a:xfrm>
+              <a:off x="762297" y="5553636"/>
+              <a:ext cx="62179" cy="80101"/>
+            </a:xfrm>
+            <a:prstGeom prst="rect">
+              <a:avLst/>
+            </a:prstGeom>
+            <a:noFill/>
+          </p:spPr>
+          <p:txBody>
+            <a:bodyPr lIns="0" rIns="0" tIns="0" bIns="0" anchorCtr="1" anchor="ctr" wrap="none"/>
+            <a:lstStyle/>
+            <a:p>
+              <a:pPr algn="l" marL="0" marR="0" indent="0">
+                <a:lnSpc>
+                  <a:spcPts val="880"/>
+                </a:lnSpc>
+                <a:spcBef>
+                  <a:spcPts val="0"/>
+                </a:spcBef>
+                <a:spcAft>
+                  <a:spcPts val="0"/>
+                </a:spcAft>
+              </a:pPr>
+              <a:r>
+                <a:rPr sz="880">
+                  <a:solidFill>
+                    <a:srgbClr val="4D4D4D">
+                      <a:alpha val="100000"/>
+                    </a:srgbClr>
+                  </a:solidFill>
+                  <a:latin typeface="Helvetica"/>
+                  <a:cs typeface="Helvetica"/>
+                </a:rPr>
+                <a:t>0</a:t>
+              </a:r>
+            </a:p>
+          </p:txBody>
+        </p:sp>
+        <p:sp>
+          <p:nvSpPr>
+            <p:cNvPr id="79" name="tx79"/>
+            <p:cNvSpPr/>
+            <p:nvPr/>
+          </p:nvSpPr>
+          <p:spPr>
+            <a:xfrm>
+              <a:off x="762297" y="5254302"/>
+              <a:ext cx="62179" cy="80101"/>
+            </a:xfrm>
+            <a:prstGeom prst="rect">
+              <a:avLst/>
+            </a:prstGeom>
+            <a:noFill/>
+          </p:spPr>
+          <p:txBody>
+            <a:bodyPr lIns="0" rIns="0" tIns="0" bIns="0" anchorCtr="1" anchor="ctr" wrap="none"/>
+            <a:lstStyle/>
+            <a:p>
+              <a:pPr algn="l" marL="0" marR="0" indent="0">
+                <a:lnSpc>
+                  <a:spcPts val="880"/>
+                </a:lnSpc>
+                <a:spcBef>
+                  <a:spcPts val="0"/>
+                </a:spcBef>
+                <a:spcAft>
+                  <a:spcPts val="0"/>
+                </a:spcAft>
+              </a:pPr>
+              <a:r>
+                <a:rPr sz="880">
+                  <a:solidFill>
+                    <a:srgbClr val="4D4D4D">
+                      <a:alpha val="100000"/>
+                    </a:srgbClr>
+                  </a:solidFill>
+                  <a:latin typeface="Helvetica"/>
+                  <a:cs typeface="Helvetica"/>
+                </a:rPr>
+                <a:t>1</a:t>
+              </a:r>
+            </a:p>
+          </p:txBody>
+        </p:sp>
+        <p:sp>
+          <p:nvSpPr>
+            <p:cNvPr id="80" name="tx80"/>
+            <p:cNvSpPr/>
+            <p:nvPr/>
+          </p:nvSpPr>
+          <p:spPr>
+            <a:xfrm>
+              <a:off x="762297" y="4954968"/>
+              <a:ext cx="62179" cy="80101"/>
+            </a:xfrm>
+            <a:prstGeom prst="rect">
+              <a:avLst/>
+            </a:prstGeom>
+            <a:noFill/>
+          </p:spPr>
+          <p:txBody>
+            <a:bodyPr lIns="0" rIns="0" tIns="0" bIns="0" anchorCtr="1" anchor="ctr" wrap="none"/>
+            <a:lstStyle/>
+            <a:p>
+              <a:pPr algn="l" marL="0" marR="0" indent="0">
+                <a:lnSpc>
+                  <a:spcPts val="880"/>
+                </a:lnSpc>
+                <a:spcBef>
+                  <a:spcPts val="0"/>
+                </a:spcBef>
+                <a:spcAft>
+                  <a:spcPts val="0"/>
+                </a:spcAft>
+              </a:pPr>
+              <a:r>
+                <a:rPr sz="880">
+                  <a:solidFill>
+                    <a:srgbClr val="4D4D4D">
+                      <a:alpha val="100000"/>
+                    </a:srgbClr>
+                  </a:solidFill>
+                  <a:latin typeface="Helvetica"/>
+                  <a:cs typeface="Helvetica"/>
+                </a:rPr>
+                <a:t>2</a:t>
+              </a:r>
+            </a:p>
+          </p:txBody>
+        </p:sp>
+        <p:sp>
+          <p:nvSpPr>
+            <p:cNvPr id="81" name="tx81"/>
+            <p:cNvSpPr/>
+            <p:nvPr/>
+          </p:nvSpPr>
+          <p:spPr>
+            <a:xfrm>
+              <a:off x="762297" y="4655634"/>
+              <a:ext cx="62179" cy="80101"/>
+            </a:xfrm>
+            <a:prstGeom prst="rect">
+              <a:avLst/>
+            </a:prstGeom>
+            <a:noFill/>
+          </p:spPr>
+          <p:txBody>
+            <a:bodyPr lIns="0" rIns="0" tIns="0" bIns="0" anchorCtr="1" anchor="ctr" wrap="none"/>
+            <a:lstStyle/>
+            <a:p>
+              <a:pPr algn="l" marL="0" marR="0" indent="0">
+                <a:lnSpc>
+                  <a:spcPts val="880"/>
+                </a:lnSpc>
+                <a:spcBef>
+                  <a:spcPts val="0"/>
+                </a:spcBef>
+                <a:spcAft>
+                  <a:spcPts val="0"/>
+                </a:spcAft>
+              </a:pPr>
+              <a:r>
+                <a:rPr sz="880">
+                  <a:solidFill>
+                    <a:srgbClr val="4D4D4D">
+                      <a:alpha val="100000"/>
+                    </a:srgbClr>
+                  </a:solidFill>
+                  <a:latin typeface="Helvetica"/>
+                  <a:cs typeface="Helvetica"/>
+                </a:rPr>
+                <a:t>3</a:t>
+              </a:r>
+            </a:p>
+          </p:txBody>
+        </p:sp>
+        <p:sp>
+          <p:nvSpPr>
+            <p:cNvPr id="82" name="tx82"/>
+            <p:cNvSpPr/>
+            <p:nvPr/>
+          </p:nvSpPr>
+          <p:spPr>
+            <a:xfrm>
+              <a:off x="762297" y="4356300"/>
+              <a:ext cx="62179" cy="80101"/>
+            </a:xfrm>
+            <a:prstGeom prst="rect">
+              <a:avLst/>
+            </a:prstGeom>
+            <a:noFill/>
+          </p:spPr>
+          <p:txBody>
+            <a:bodyPr lIns="0" rIns="0" tIns="0" bIns="0" anchorCtr="1" anchor="ctr" wrap="none"/>
+            <a:lstStyle/>
+            <a:p>
+              <a:pPr algn="l" marL="0" marR="0" indent="0">
+                <a:lnSpc>
+                  <a:spcPts val="880"/>
+                </a:lnSpc>
+                <a:spcBef>
+                  <a:spcPts val="0"/>
+                </a:spcBef>
+                <a:spcAft>
+                  <a:spcPts val="0"/>
+                </a:spcAft>
+              </a:pPr>
+              <a:r>
+                <a:rPr sz="880">
+                  <a:solidFill>
+                    <a:srgbClr val="4D4D4D">
+                      <a:alpha val="100000"/>
+                    </a:srgbClr>
+                  </a:solidFill>
+                  <a:latin typeface="Helvetica"/>
+                  <a:cs typeface="Helvetica"/>
+                </a:rPr>
+                <a:t>4</a:t>
+              </a:r>
+            </a:p>
+          </p:txBody>
+        </p:sp>
+        <p:sp>
+          <p:nvSpPr>
+            <p:cNvPr id="83" name="tx83"/>
+            <p:cNvSpPr/>
+            <p:nvPr/>
+          </p:nvSpPr>
+          <p:spPr>
+            <a:xfrm>
+              <a:off x="1164222" y="5716183"/>
+              <a:ext cx="161574" cy="80101"/>
+            </a:xfrm>
+            <a:prstGeom prst="rect">
+              <a:avLst/>
+            </a:prstGeom>
+            <a:noFill/>
+          </p:spPr>
+          <p:txBody>
+            <a:bodyPr lIns="0" rIns="0" tIns="0" bIns="0" anchorCtr="1" anchor="ctr" wrap="none"/>
+            <a:lstStyle/>
+            <a:p>
+              <a:pPr algn="l" marL="0" marR="0" indent="0">
+                <a:lnSpc>
+                  <a:spcPts val="880"/>
+                </a:lnSpc>
+                <a:spcBef>
+                  <a:spcPts val="0"/>
+                </a:spcBef>
+                <a:spcAft>
+                  <a:spcPts val="0"/>
+                </a:spcAft>
+              </a:pPr>
+              <a:r>
+                <a:rPr sz="880">
+                  <a:solidFill>
+                    <a:srgbClr val="4D4D4D">
+                      <a:alpha val="100000"/>
+                    </a:srgbClr>
+                  </a:solidFill>
+                  <a:latin typeface="Helvetica"/>
+                  <a:cs typeface="Helvetica"/>
+                </a:rPr>
+                <a:t>-50</a:t>
+              </a:r>
+            </a:p>
+          </p:txBody>
+        </p:sp>
+        <p:sp>
+          <p:nvSpPr>
+            <p:cNvPr id="84" name="tx84"/>
+            <p:cNvSpPr/>
+            <p:nvPr/>
+          </p:nvSpPr>
+          <p:spPr>
+            <a:xfrm>
+              <a:off x="2024485" y="5716183"/>
+              <a:ext cx="161574" cy="80101"/>
+            </a:xfrm>
+            <a:prstGeom prst="rect">
+              <a:avLst/>
+            </a:prstGeom>
+            <a:noFill/>
+          </p:spPr>
+          <p:txBody>
+            <a:bodyPr lIns="0" rIns="0" tIns="0" bIns="0" anchorCtr="1" anchor="ctr" wrap="none"/>
+            <a:lstStyle/>
+            <a:p>
+              <a:pPr algn="l" marL="0" marR="0" indent="0">
+                <a:lnSpc>
+                  <a:spcPts val="880"/>
+                </a:lnSpc>
+                <a:spcBef>
+                  <a:spcPts val="0"/>
+                </a:spcBef>
+                <a:spcAft>
+                  <a:spcPts val="0"/>
+                </a:spcAft>
+              </a:pPr>
+              <a:r>
+                <a:rPr sz="880">
+                  <a:solidFill>
+                    <a:srgbClr val="4D4D4D">
+                      <a:alpha val="100000"/>
+                    </a:srgbClr>
+                  </a:solidFill>
+                  <a:latin typeface="Helvetica"/>
+                  <a:cs typeface="Helvetica"/>
+                </a:rPr>
+                <a:t>-40</a:t>
+              </a:r>
+            </a:p>
+          </p:txBody>
+        </p:sp>
+        <p:sp>
+          <p:nvSpPr>
+            <p:cNvPr id="85" name="tx85"/>
+            <p:cNvSpPr/>
+            <p:nvPr/>
+          </p:nvSpPr>
+          <p:spPr>
+            <a:xfrm>
+              <a:off x="2884749" y="5716183"/>
+              <a:ext cx="161574" cy="80101"/>
+            </a:xfrm>
+            <a:prstGeom prst="rect">
+              <a:avLst/>
+            </a:prstGeom>
+            <a:noFill/>
+          </p:spPr>
+          <p:txBody>
+            <a:bodyPr lIns="0" rIns="0" tIns="0" bIns="0" anchorCtr="1" anchor="ctr" wrap="none"/>
+            <a:lstStyle/>
+            <a:p>
+              <a:pPr algn="l" marL="0" marR="0" indent="0">
+                <a:lnSpc>
+                  <a:spcPts val="880"/>
+                </a:lnSpc>
+                <a:spcBef>
+                  <a:spcPts val="0"/>
+                </a:spcBef>
+                <a:spcAft>
+                  <a:spcPts val="0"/>
+                </a:spcAft>
+              </a:pPr>
+              <a:r>
+                <a:rPr sz="880">
+                  <a:solidFill>
+                    <a:srgbClr val="4D4D4D">
+                      <a:alpha val="100000"/>
+                    </a:srgbClr>
+                  </a:solidFill>
+                  <a:latin typeface="Helvetica"/>
+                  <a:cs typeface="Helvetica"/>
+                </a:rPr>
+                <a:t>-30</a:t>
+              </a:r>
+            </a:p>
+          </p:txBody>
+        </p:sp>
+        <p:sp>
+          <p:nvSpPr>
+            <p:cNvPr id="86" name="tx86"/>
+            <p:cNvSpPr/>
+            <p:nvPr/>
+          </p:nvSpPr>
+          <p:spPr>
+            <a:xfrm>
+              <a:off x="3745012" y="5716183"/>
+              <a:ext cx="161574" cy="80101"/>
+            </a:xfrm>
+            <a:prstGeom prst="rect">
+              <a:avLst/>
+            </a:prstGeom>
+            <a:noFill/>
+          </p:spPr>
+          <p:txBody>
+            <a:bodyPr lIns="0" rIns="0" tIns="0" bIns="0" anchorCtr="1" anchor="ctr" wrap="none"/>
+            <a:lstStyle/>
+            <a:p>
+              <a:pPr algn="l" marL="0" marR="0" indent="0">
+                <a:lnSpc>
+                  <a:spcPts val="880"/>
+                </a:lnSpc>
+                <a:spcBef>
+                  <a:spcPts val="0"/>
+                </a:spcBef>
+                <a:spcAft>
+                  <a:spcPts val="0"/>
+                </a:spcAft>
+              </a:pPr>
+              <a:r>
+                <a:rPr sz="880">
+                  <a:solidFill>
+                    <a:srgbClr val="4D4D4D">
+                      <a:alpha val="100000"/>
+                    </a:srgbClr>
+                  </a:solidFill>
+                  <a:latin typeface="Helvetica"/>
+                  <a:cs typeface="Helvetica"/>
+                </a:rPr>
+                <a:t>-20</a:t>
+              </a:r>
+            </a:p>
+          </p:txBody>
+        </p:sp>
+        <p:sp>
+          <p:nvSpPr>
+            <p:cNvPr id="87" name="tx87"/>
+            <p:cNvSpPr/>
+            <p:nvPr/>
+          </p:nvSpPr>
+          <p:spPr>
+            <a:xfrm>
+              <a:off x="4605275" y="5716183"/>
+              <a:ext cx="161574" cy="80101"/>
+            </a:xfrm>
+            <a:prstGeom prst="rect">
+              <a:avLst/>
+            </a:prstGeom>
+            <a:noFill/>
+          </p:spPr>
+          <p:txBody>
+            <a:bodyPr lIns="0" rIns="0" tIns="0" bIns="0" anchorCtr="1" anchor="ctr" wrap="none"/>
+            <a:lstStyle/>
+            <a:p>
+              <a:pPr algn="l" marL="0" marR="0" indent="0">
+                <a:lnSpc>
+                  <a:spcPts val="880"/>
+                </a:lnSpc>
+                <a:spcBef>
+                  <a:spcPts val="0"/>
+                </a:spcBef>
+                <a:spcAft>
+                  <a:spcPts val="0"/>
+                </a:spcAft>
+              </a:pPr>
+              <a:r>
+                <a:rPr sz="880">
+                  <a:solidFill>
+                    <a:srgbClr val="4D4D4D">
+                      <a:alpha val="100000"/>
+                    </a:srgbClr>
+                  </a:solidFill>
+                  <a:latin typeface="Helvetica"/>
+                  <a:cs typeface="Helvetica"/>
+                </a:rPr>
+                <a:t>-10</a:t>
+              </a:r>
+            </a:p>
+          </p:txBody>
+        </p:sp>
+        <p:sp>
+          <p:nvSpPr>
+            <p:cNvPr id="88" name="tx88"/>
+            <p:cNvSpPr/>
+            <p:nvPr/>
+          </p:nvSpPr>
+          <p:spPr>
+            <a:xfrm>
+              <a:off x="5515235" y="5716183"/>
+              <a:ext cx="62179" cy="80101"/>
+            </a:xfrm>
+            <a:prstGeom prst="rect">
+              <a:avLst/>
+            </a:prstGeom>
+            <a:noFill/>
+          </p:spPr>
+          <p:txBody>
+            <a:bodyPr lIns="0" rIns="0" tIns="0" bIns="0" anchorCtr="1" anchor="ctr" wrap="none"/>
+            <a:lstStyle/>
+            <a:p>
+              <a:pPr algn="l" marL="0" marR="0" indent="0">
+                <a:lnSpc>
+                  <a:spcPts val="880"/>
+                </a:lnSpc>
+                <a:spcBef>
+                  <a:spcPts val="0"/>
+                </a:spcBef>
+                <a:spcAft>
+                  <a:spcPts val="0"/>
+                </a:spcAft>
+              </a:pPr>
+              <a:r>
+                <a:rPr sz="880">
+                  <a:solidFill>
+                    <a:srgbClr val="4D4D4D">
+                      <a:alpha val="100000"/>
+                    </a:srgbClr>
+                  </a:solidFill>
+                  <a:latin typeface="Helvetica"/>
+                  <a:cs typeface="Helvetica"/>
+                </a:rPr>
+                <a:t>0</a:t>
+              </a:r>
+            </a:p>
+          </p:txBody>
+        </p:sp>
+        <p:sp>
+          <p:nvSpPr>
+            <p:cNvPr id="89" name="tx89"/>
+            <p:cNvSpPr/>
+            <p:nvPr/>
+          </p:nvSpPr>
+          <p:spPr>
+            <a:xfrm>
+              <a:off x="6344409" y="5716183"/>
+              <a:ext cx="124358" cy="80101"/>
+            </a:xfrm>
+            <a:prstGeom prst="rect">
+              <a:avLst/>
+            </a:prstGeom>
+            <a:noFill/>
+          </p:spPr>
+          <p:txBody>
+            <a:bodyPr lIns="0" rIns="0" tIns="0" bIns="0" anchorCtr="1" anchor="ctr" wrap="none"/>
+            <a:lstStyle/>
+            <a:p>
+              <a:pPr algn="l" marL="0" marR="0" indent="0">
+                <a:lnSpc>
+                  <a:spcPts val="880"/>
+                </a:lnSpc>
+                <a:spcBef>
+                  <a:spcPts val="0"/>
+                </a:spcBef>
+                <a:spcAft>
+                  <a:spcPts val="0"/>
+                </a:spcAft>
+              </a:pPr>
+              <a:r>
+                <a:rPr sz="880">
+                  <a:solidFill>
+                    <a:srgbClr val="4D4D4D">
+                      <a:alpha val="100000"/>
+                    </a:srgbClr>
+                  </a:solidFill>
+                  <a:latin typeface="Helvetica"/>
+                  <a:cs typeface="Helvetica"/>
+                </a:rPr>
+                <a:t>10</a:t>
+              </a:r>
+            </a:p>
+          </p:txBody>
+        </p:sp>
+        <p:sp>
+          <p:nvSpPr>
+            <p:cNvPr id="90" name="tx90"/>
+            <p:cNvSpPr/>
+            <p:nvPr/>
+          </p:nvSpPr>
+          <p:spPr>
+            <a:xfrm>
+              <a:off x="7204672" y="5716183"/>
+              <a:ext cx="124358" cy="80101"/>
+            </a:xfrm>
+            <a:prstGeom prst="rect">
+              <a:avLst/>
+            </a:prstGeom>
+            <a:noFill/>
+          </p:spPr>
+          <p:txBody>
+            <a:bodyPr lIns="0" rIns="0" tIns="0" bIns="0" anchorCtr="1" anchor="ctr" wrap="none"/>
+            <a:lstStyle/>
+            <a:p>
+              <a:pPr algn="l" marL="0" marR="0" indent="0">
+                <a:lnSpc>
+                  <a:spcPts val="880"/>
+                </a:lnSpc>
+                <a:spcBef>
+                  <a:spcPts val="0"/>
+                </a:spcBef>
+                <a:spcAft>
+                  <a:spcPts val="0"/>
+                </a:spcAft>
+              </a:pPr>
+              <a:r>
+                <a:rPr sz="880">
+                  <a:solidFill>
+                    <a:srgbClr val="4D4D4D">
+                      <a:alpha val="100000"/>
+                    </a:srgbClr>
+                  </a:solidFill>
+                  <a:latin typeface="Helvetica"/>
+                  <a:cs typeface="Helvetica"/>
+                </a:rPr>
+                <a:t>20</a:t>
+              </a:r>
+            </a:p>
+          </p:txBody>
+        </p:sp>
+        <p:sp>
+          <p:nvSpPr>
+            <p:cNvPr id="91" name="tx91"/>
+            <p:cNvSpPr/>
+            <p:nvPr/>
+          </p:nvSpPr>
+          <p:spPr>
+            <a:xfrm>
+              <a:off x="8064935" y="5716183"/>
+              <a:ext cx="124358" cy="80101"/>
+            </a:xfrm>
+            <a:prstGeom prst="rect">
+              <a:avLst/>
+            </a:prstGeom>
+            <a:noFill/>
+          </p:spPr>
+          <p:txBody>
+            <a:bodyPr lIns="0" rIns="0" tIns="0" bIns="0" anchorCtr="1" anchor="ctr" wrap="none"/>
+            <a:lstStyle/>
+            <a:p>
+              <a:pPr algn="l" marL="0" marR="0" indent="0">
+                <a:lnSpc>
+                  <a:spcPts val="880"/>
+                </a:lnSpc>
+                <a:spcBef>
+                  <a:spcPts val="0"/>
+                </a:spcBef>
+                <a:spcAft>
+                  <a:spcPts val="0"/>
+                </a:spcAft>
+              </a:pPr>
+              <a:r>
+                <a:rPr sz="880">
+                  <a:solidFill>
+                    <a:srgbClr val="4D4D4D">
+                      <a:alpha val="100000"/>
+                    </a:srgbClr>
+                  </a:solidFill>
+                  <a:latin typeface="Helvetica"/>
+                  <a:cs typeface="Helvetica"/>
+                </a:rPr>
+                <a:t>30</a:t>
+              </a:r>
+            </a:p>
+          </p:txBody>
+        </p:sp>
+        <p:sp>
+          <p:nvSpPr>
+            <p:cNvPr id="92" name="tx92"/>
+            <p:cNvSpPr/>
+            <p:nvPr/>
+          </p:nvSpPr>
+          <p:spPr>
+            <a:xfrm>
+              <a:off x="1561815" y="5855859"/>
+              <a:ext cx="6311097" cy="100218"/>
+            </a:xfrm>
+            <a:prstGeom prst="rect">
+              <a:avLst/>
+            </a:prstGeom>
+            <a:noFill/>
+          </p:spPr>
+          <p:txBody>
+            <a:bodyPr lIns="0" rIns="0" tIns="0" bIns="0" anchorCtr="1" anchor="ctr" wrap="none"/>
+            <a:lstStyle/>
+            <a:p>
+              <a:pPr algn="l" marL="0" marR="0" indent="0">
+                <a:lnSpc>
+                  <a:spcPts val="1100"/>
+                </a:lnSpc>
+                <a:spcBef>
+                  <a:spcPts val="0"/>
+                </a:spcBef>
+                <a:spcAft>
+                  <a:spcPts val="0"/>
+                </a:spcAft>
+              </a:pPr>
+              <a:r>
+                <a:rPr sz="1100">
+                  <a:solidFill>
+                    <a:srgbClr val="000000">
+                      <a:alpha val="100000"/>
+                    </a:srgbClr>
+                  </a:solidFill>
+                  <a:latin typeface="Helvetica"/>
+                  <a:cs typeface="Helvetica"/>
+                </a:rPr>
+                <a:t>Sensitivity eGFR Difference (%): 100 × (CKD-EPI 2012 CysC − CKD-EPI 2021 Cr) / CKD-EPI 2021 Cr</a:t>
+              </a:r>
+            </a:p>
+          </p:txBody>
+        </p:sp>
+        <p:sp>
+          <p:nvSpPr>
+            <p:cNvPr id="93" name="tx93"/>
+            <p:cNvSpPr/>
+            <p:nvPr/>
+          </p:nvSpPr>
+          <p:spPr>
+            <a:xfrm rot="-5400000">
+              <a:off x="138035" y="4944909"/>
+              <a:ext cx="1016904" cy="100218"/>
+            </a:xfrm>
+            <a:prstGeom prst="rect">
+              <a:avLst/>
+            </a:prstGeom>
+            <a:noFill/>
+          </p:spPr>
+          <p:txBody>
+            <a:bodyPr lIns="0" rIns="0" tIns="0" bIns="0" anchorCtr="1" anchor="ctr" wrap="none"/>
+            <a:lstStyle/>
+            <a:p>
+              <a:pPr algn="l" marL="0" marR="0" indent="0">
+                <a:lnSpc>
+                  <a:spcPts val="1100"/>
+                </a:lnSpc>
+                <a:spcBef>
+                  <a:spcPts val="0"/>
+                </a:spcBef>
+                <a:spcAft>
+                  <a:spcPts val="0"/>
+                </a:spcAft>
+              </a:pPr>
+              <a:r>
+                <a:rPr sz="1100">
+                  <a:solidFill>
+                    <a:srgbClr val="000000">
+                      <a:alpha val="100000"/>
+                    </a:srgbClr>
+                  </a:solidFill>
+                  <a:latin typeface="Helvetica"/>
+                  <a:cs typeface="Helvetica"/>
+                </a:rPr>
+                <a:t>subHR (95% CI)</a:t>
+              </a:r>
+            </a:p>
+          </p:txBody>
+        </p:sp>
+        <p:sp>
+          <p:nvSpPr>
+            <p:cNvPr id="94" name="tx94"/>
+            <p:cNvSpPr/>
+            <p:nvPr/>
+          </p:nvSpPr>
+          <p:spPr>
+            <a:xfrm>
+              <a:off x="887106" y="4159544"/>
+              <a:ext cx="6959864" cy="82021"/>
+            </a:xfrm>
+            <a:prstGeom prst="rect">
+              <a:avLst/>
+            </a:prstGeom>
+            <a:noFill/>
+          </p:spPr>
+          <p:txBody>
+            <a:bodyPr lIns="0" rIns="0" tIns="0" bIns="0" anchorCtr="1" anchor="ctr" wrap="none"/>
+            <a:lstStyle/>
+            <a:p>
+              <a:pPr algn="l" marL="0" marR="0" indent="0">
+                <a:lnSpc>
+                  <a:spcPts val="900"/>
+                </a:lnSpc>
+                <a:spcBef>
+                  <a:spcPts val="0"/>
+                </a:spcBef>
+                <a:spcAft>
+                  <a:spcPts val="0"/>
+                </a:spcAft>
+              </a:pPr>
+              <a:r>
+                <a:rPr sz="900">
+                  <a:solidFill>
+                    <a:srgbClr val="404040">
+                      <a:alpha val="100000"/>
+                    </a:srgbClr>
+                  </a:solidFill>
+                  <a:latin typeface="Helvetica"/>
+                  <a:cs typeface="Helvetica"/>
+                </a:rPr>
+                <a:t>subHR per 10 % decline: 1.09 (1.03-1.16), p_Bonf = 0.011 (n = 6)  |  per IQR decline (Δ = 27.5 %): 1.28 (1.10-1.49)  |  IQR: [-29.1, -1.6] %</a:t>
+              </a:r>
+            </a:p>
+          </p:txBody>
+        </p:sp>
+        <p:sp>
+          <p:nvSpPr>
+            <p:cNvPr id="95" name="tx95"/>
+            <p:cNvSpPr/>
+            <p:nvPr/>
+          </p:nvSpPr>
+          <p:spPr>
+            <a:xfrm>
+              <a:off x="887106" y="3932770"/>
               <a:ext cx="2132106" cy="120152"/>
             </a:xfrm>
             <a:prstGeom prst="rect">
